--- a/praksa/RAST/izradaprezentacije/AI_alati_prezentacija.pptx
+++ b/praksa/RAST/izradaprezentacije/AI_alati_prezentacija.pptx
@@ -13607,7 +13607,7 @@
         </p:nvGraphicFramePr>
         <p:xfrm>
           <a:off x="274320" y="804672"/>
-          <a:ext cx="8595360" cy="914400"/>
+          <a:ext cx="8595360" cy="3840480"/>
         </p:xfrm>
         <a:graphic>
           <a:graphicData uri="http://schemas.openxmlformats.org/drawingml/2006/table">

--- a/praksa/RAST/izradaprezentacije/AI_alati_prezentacija.pptx
+++ b/praksa/RAST/izradaprezentacije/AI_alati_prezentacija.pptx
@@ -5,28 +5,30 @@
     <p:sldMasterId id="2147483648" r:id="rId1"/>
   </p:sldMasterIdLst>
   <p:notesMasterIdLst>
-    <p:notesMasterId r:id="rId21"/>
+    <p:notesMasterId r:id="rId23"/>
   </p:notesMasterIdLst>
   <p:sldIdLst>
     <p:sldId id="256" r:id="rId2"/>
     <p:sldId id="257" r:id="rId3"/>
-    <p:sldId id="271" r:id="rId4"/>
-    <p:sldId id="273" r:id="rId5"/>
-    <p:sldId id="274" r:id="rId6"/>
-    <p:sldId id="272" r:id="rId7"/>
-    <p:sldId id="258" r:id="rId8"/>
+    <p:sldId id="273" r:id="rId4"/>
+    <p:sldId id="274" r:id="rId5"/>
+    <p:sldId id="272" r:id="rId6"/>
+    <p:sldId id="258" r:id="rId7"/>
+    <p:sldId id="276" r:id="rId8"/>
     <p:sldId id="259" r:id="rId9"/>
     <p:sldId id="260" r:id="rId10"/>
     <p:sldId id="261" r:id="rId11"/>
     <p:sldId id="262" r:id="rId12"/>
     <p:sldId id="263" r:id="rId13"/>
     <p:sldId id="264" r:id="rId14"/>
-    <p:sldId id="265" r:id="rId15"/>
-    <p:sldId id="266" r:id="rId16"/>
-    <p:sldId id="267" r:id="rId17"/>
-    <p:sldId id="268" r:id="rId18"/>
-    <p:sldId id="269" r:id="rId19"/>
-    <p:sldId id="270" r:id="rId20"/>
+    <p:sldId id="278" r:id="rId15"/>
+    <p:sldId id="277" r:id="rId16"/>
+    <p:sldId id="265" r:id="rId17"/>
+    <p:sldId id="266" r:id="rId18"/>
+    <p:sldId id="267" r:id="rId19"/>
+    <p:sldId id="268" r:id="rId20"/>
+    <p:sldId id="269" r:id="rId21"/>
+    <p:sldId id="270" r:id="rId22"/>
   </p:sldIdLst>
   <p:sldSz cx="9144000" cy="5143500" type="screen16x9"/>
   <p:notesSz cx="5143500" cy="9144000"/>
@@ -404,7 +406,7 @@
           <a:p>
             <a:fld id="{F7021451-1387-4CA6-816F-3879F97B5CBC}" type="slidenum">
               <a:rPr lang="en-US"/>
-              <a:t>14</a:t>
+              <a:t>13</a:t>
             </a:fld>
             <a:endParaRPr lang="en-US"/>
           </a:p>
@@ -428,7 +430,13 @@
   <p:cSld>
     <p:spTree>
       <p:nvGrpSpPr>
-        <p:cNvPr id="1" name=""/>
+        <p:cNvPr id="1" name="">
+          <a:extLst>
+            <a:ext uri="{FF2B5EF4-FFF2-40B4-BE49-F238E27FC236}">
+              <a16:creationId xmlns:a16="http://schemas.microsoft.com/office/drawing/2014/main" id="{1C7F03B0-8B6C-4A50-E56E-F23DD95B7C83}"/>
+            </a:ext>
+          </a:extLst>
+        </p:cNvPr>
         <p:cNvGrpSpPr/>
         <p:nvPr/>
       </p:nvGrpSpPr>
@@ -442,7 +450,13 @@
       </p:grpSpPr>
       <p:sp>
         <p:nvSpPr>
-          <p:cNvPr id="2" name="Slide Image Placeholder 1"/>
+          <p:cNvPr id="2" name="Slide Image Placeholder 1">
+            <a:extLst>
+              <a:ext uri="{FF2B5EF4-FFF2-40B4-BE49-F238E27FC236}">
+                <a16:creationId xmlns:a16="http://schemas.microsoft.com/office/drawing/2014/main" id="{703635E8-5E5A-72D5-6C19-8C3F5A0186D8}"/>
+              </a:ext>
+            </a:extLst>
+          </p:cNvPr>
           <p:cNvSpPr>
             <a:spLocks noGrp="1" noRot="1" noChangeAspect="1"/>
           </p:cNvSpPr>
@@ -454,7 +468,13 @@
       </p:sp>
       <p:sp>
         <p:nvSpPr>
-          <p:cNvPr id="3" name="Notes Placeholder 2"/>
+          <p:cNvPr id="3" name="Notes Placeholder 2">
+            <a:extLst>
+              <a:ext uri="{FF2B5EF4-FFF2-40B4-BE49-F238E27FC236}">
+                <a16:creationId xmlns:a16="http://schemas.microsoft.com/office/drawing/2014/main" id="{3B45DA50-CFC5-6514-D48E-EF991A897781}"/>
+              </a:ext>
+            </a:extLst>
+          </p:cNvPr>
           <p:cNvSpPr>
             <a:spLocks noGrp="1"/>
           </p:cNvSpPr>
@@ -473,7 +493,13 @@
       </p:sp>
       <p:sp>
         <p:nvSpPr>
-          <p:cNvPr id="4" name="Slide Number Placeholder 3"/>
+          <p:cNvPr id="4" name="Slide Number Placeholder 3">
+            <a:extLst>
+              <a:ext uri="{FF2B5EF4-FFF2-40B4-BE49-F238E27FC236}">
+                <a16:creationId xmlns:a16="http://schemas.microsoft.com/office/drawing/2014/main" id="{B2F0CE7F-66F7-1296-A778-8B13AD8FBA69}"/>
+              </a:ext>
+            </a:extLst>
+          </p:cNvPr>
           <p:cNvSpPr>
             <a:spLocks noGrp="1"/>
           </p:cNvSpPr>
@@ -497,7 +523,7 @@
     </p:spTree>
     <p:extLst>
       <p:ext uri="{BB962C8B-B14F-4D97-AF65-F5344CB8AC3E}">
-        <p14:creationId xmlns:p14="http://schemas.microsoft.com/office/powerpoint/2010/main" val="1024086991"/>
+        <p14:creationId xmlns:p14="http://schemas.microsoft.com/office/powerpoint/2010/main" val="2438627036"/>
       </p:ext>
     </p:extLst>
   </p:cSld>
@@ -843,6 +869,174 @@
 </p:notes>
 </file>
 
+<file path=ppt/notesSlides/notesSlide16.xml><?xml version="1.0" encoding="utf-8"?>
+<p:notes xmlns:a="http://schemas.openxmlformats.org/drawingml/2006/main" xmlns:r="http://schemas.openxmlformats.org/officeDocument/2006/relationships" xmlns:p="http://schemas.openxmlformats.org/presentationml/2006/main">
+  <p:cSld>
+    <p:spTree>
+      <p:nvGrpSpPr>
+        <p:cNvPr id="1" name=""/>
+        <p:cNvGrpSpPr/>
+        <p:nvPr/>
+      </p:nvGrpSpPr>
+      <p:grpSpPr>
+        <a:xfrm>
+          <a:off x="0" y="0"/>
+          <a:ext cx="0" cy="0"/>
+          <a:chOff x="0" y="0"/>
+          <a:chExt cx="0" cy="0"/>
+        </a:xfrm>
+      </p:grpSpPr>
+      <p:sp>
+        <p:nvSpPr>
+          <p:cNvPr id="2" name="Slide Image Placeholder 1"/>
+          <p:cNvSpPr>
+            <a:spLocks noGrp="1" noRot="1" noChangeAspect="1"/>
+          </p:cNvSpPr>
+          <p:nvPr>
+            <p:ph type="sldImg"/>
+          </p:nvPr>
+        </p:nvSpPr>
+        <p:spPr/>
+      </p:sp>
+      <p:sp>
+        <p:nvSpPr>
+          <p:cNvPr id="3" name="Notes Placeholder 2"/>
+          <p:cNvSpPr>
+            <a:spLocks noGrp="1"/>
+          </p:cNvSpPr>
+          <p:nvPr>
+            <p:ph type="body" idx="1"/>
+          </p:nvPr>
+        </p:nvSpPr>
+        <p:spPr/>
+        <p:txBody>
+          <a:bodyPr/>
+          <a:lstStyle/>
+          <a:p>
+            <a:endParaRPr lang="en-US" dirty="0"/>
+          </a:p>
+        </p:txBody>
+      </p:sp>
+      <p:sp>
+        <p:nvSpPr>
+          <p:cNvPr id="4" name="Slide Number Placeholder 3"/>
+          <p:cNvSpPr>
+            <a:spLocks noGrp="1"/>
+          </p:cNvSpPr>
+          <p:nvPr>
+            <p:ph type="sldNum" sz="quarter" idx="10"/>
+          </p:nvPr>
+        </p:nvSpPr>
+        <p:spPr/>
+        <p:txBody>
+          <a:bodyPr/>
+          <a:lstStyle/>
+          <a:p>
+            <a:fld id="{F7021451-1387-4CA6-816F-3879F97B5CBC}" type="slidenum">
+              <a:rPr lang="en-US"/>
+              <a:t>20</a:t>
+            </a:fld>
+            <a:endParaRPr lang="en-US"/>
+          </a:p>
+        </p:txBody>
+      </p:sp>
+    </p:spTree>
+    <p:extLst>
+      <p:ext uri="{BB962C8B-B14F-4D97-AF65-F5344CB8AC3E}">
+        <p14:creationId xmlns:p14="http://schemas.microsoft.com/office/powerpoint/2010/main" val="1024086991"/>
+      </p:ext>
+    </p:extLst>
+  </p:cSld>
+  <p:clrMapOvr>
+    <a:masterClrMapping/>
+  </p:clrMapOvr>
+</p:notes>
+</file>
+
+<file path=ppt/notesSlides/notesSlide17.xml><?xml version="1.0" encoding="utf-8"?>
+<p:notes xmlns:a="http://schemas.openxmlformats.org/drawingml/2006/main" xmlns:r="http://schemas.openxmlformats.org/officeDocument/2006/relationships" xmlns:p="http://schemas.openxmlformats.org/presentationml/2006/main">
+  <p:cSld>
+    <p:spTree>
+      <p:nvGrpSpPr>
+        <p:cNvPr id="1" name=""/>
+        <p:cNvGrpSpPr/>
+        <p:nvPr/>
+      </p:nvGrpSpPr>
+      <p:grpSpPr>
+        <a:xfrm>
+          <a:off x="0" y="0"/>
+          <a:ext cx="0" cy="0"/>
+          <a:chOff x="0" y="0"/>
+          <a:chExt cx="0" cy="0"/>
+        </a:xfrm>
+      </p:grpSpPr>
+      <p:sp>
+        <p:nvSpPr>
+          <p:cNvPr id="2" name="Slide Image Placeholder 1"/>
+          <p:cNvSpPr>
+            <a:spLocks noGrp="1" noRot="1" noChangeAspect="1"/>
+          </p:cNvSpPr>
+          <p:nvPr>
+            <p:ph type="sldImg"/>
+          </p:nvPr>
+        </p:nvSpPr>
+        <p:spPr/>
+      </p:sp>
+      <p:sp>
+        <p:nvSpPr>
+          <p:cNvPr id="3" name="Notes Placeholder 2"/>
+          <p:cNvSpPr>
+            <a:spLocks noGrp="1"/>
+          </p:cNvSpPr>
+          <p:nvPr>
+            <p:ph type="body" idx="1"/>
+          </p:nvPr>
+        </p:nvSpPr>
+        <p:spPr/>
+        <p:txBody>
+          <a:bodyPr/>
+          <a:lstStyle/>
+          <a:p>
+            <a:endParaRPr lang="en-US" dirty="0"/>
+          </a:p>
+        </p:txBody>
+      </p:sp>
+      <p:sp>
+        <p:nvSpPr>
+          <p:cNvPr id="4" name="Slide Number Placeholder 3"/>
+          <p:cNvSpPr>
+            <a:spLocks noGrp="1"/>
+          </p:cNvSpPr>
+          <p:nvPr>
+            <p:ph type="sldNum" sz="quarter" idx="10"/>
+          </p:nvPr>
+        </p:nvSpPr>
+        <p:spPr/>
+        <p:txBody>
+          <a:bodyPr/>
+          <a:lstStyle/>
+          <a:p>
+            <a:fld id="{F7021451-1387-4CA6-816F-3879F97B5CBC}" type="slidenum">
+              <a:rPr lang="en-US"/>
+              <a:t>21</a:t>
+            </a:fld>
+            <a:endParaRPr lang="en-US"/>
+          </a:p>
+        </p:txBody>
+      </p:sp>
+    </p:spTree>
+    <p:extLst>
+      <p:ext uri="{BB962C8B-B14F-4D97-AF65-F5344CB8AC3E}">
+        <p14:creationId xmlns:p14="http://schemas.microsoft.com/office/powerpoint/2010/main" val="1024086991"/>
+      </p:ext>
+    </p:extLst>
+  </p:cSld>
+  <p:clrMapOvr>
+    <a:masterClrMapping/>
+  </p:clrMapOvr>
+</p:notes>
+</file>
+
 <file path=ppt/notesSlides/notesSlide2.xml><?xml version="1.0" encoding="utf-8"?>
 <p:notes xmlns:a="http://schemas.openxmlformats.org/drawingml/2006/main" xmlns:r="http://schemas.openxmlformats.org/officeDocument/2006/relationships" xmlns:p="http://schemas.openxmlformats.org/presentationml/2006/main">
   <p:cSld>
@@ -992,7 +1186,7 @@
           <a:p>
             <a:fld id="{F7021451-1387-4CA6-816F-3879F97B5CBC}" type="slidenum">
               <a:rPr lang="en-US"/>
-              <a:t>7</a:t>
+              <a:t>6</a:t>
             </a:fld>
             <a:endParaRPr lang="en-US"/>
           </a:p>
@@ -1016,7 +1210,13 @@
   <p:cSld>
     <p:spTree>
       <p:nvGrpSpPr>
-        <p:cNvPr id="1" name=""/>
+        <p:cNvPr id="1" name="">
+          <a:extLst>
+            <a:ext uri="{FF2B5EF4-FFF2-40B4-BE49-F238E27FC236}">
+              <a16:creationId xmlns:a16="http://schemas.microsoft.com/office/drawing/2014/main" id="{B959A58D-4684-9152-5C86-DF72BB7DDC83}"/>
+            </a:ext>
+          </a:extLst>
+        </p:cNvPr>
         <p:cNvGrpSpPr/>
         <p:nvPr/>
       </p:nvGrpSpPr>
@@ -1030,7 +1230,13 @@
       </p:grpSpPr>
       <p:sp>
         <p:nvSpPr>
-          <p:cNvPr id="2" name="Slide Image Placeholder 1"/>
+          <p:cNvPr id="2" name="Slide Image Placeholder 1">
+            <a:extLst>
+              <a:ext uri="{FF2B5EF4-FFF2-40B4-BE49-F238E27FC236}">
+                <a16:creationId xmlns:a16="http://schemas.microsoft.com/office/drawing/2014/main" id="{6A33203B-9F66-2ED1-538A-A09BA439DB4C}"/>
+              </a:ext>
+            </a:extLst>
+          </p:cNvPr>
           <p:cNvSpPr>
             <a:spLocks noGrp="1" noRot="1" noChangeAspect="1"/>
           </p:cNvSpPr>
@@ -1042,7 +1248,13 @@
       </p:sp>
       <p:sp>
         <p:nvSpPr>
-          <p:cNvPr id="3" name="Notes Placeholder 2"/>
+          <p:cNvPr id="3" name="Notes Placeholder 2">
+            <a:extLst>
+              <a:ext uri="{FF2B5EF4-FFF2-40B4-BE49-F238E27FC236}">
+                <a16:creationId xmlns:a16="http://schemas.microsoft.com/office/drawing/2014/main" id="{F9E846A2-CD33-B09C-4FFC-7072A113DD24}"/>
+              </a:ext>
+            </a:extLst>
+          </p:cNvPr>
           <p:cNvSpPr>
             <a:spLocks noGrp="1"/>
           </p:cNvSpPr>
@@ -1061,7 +1273,13 @@
       </p:sp>
       <p:sp>
         <p:nvSpPr>
-          <p:cNvPr id="4" name="Slide Number Placeholder 3"/>
+          <p:cNvPr id="4" name="Slide Number Placeholder 3">
+            <a:extLst>
+              <a:ext uri="{FF2B5EF4-FFF2-40B4-BE49-F238E27FC236}">
+                <a16:creationId xmlns:a16="http://schemas.microsoft.com/office/drawing/2014/main" id="{09DB4416-7069-D1AF-8753-3F5BCB782717}"/>
+              </a:ext>
+            </a:extLst>
+          </p:cNvPr>
           <p:cNvSpPr>
             <a:spLocks noGrp="1"/>
           </p:cNvSpPr>
@@ -1076,7 +1294,7 @@
           <a:p>
             <a:fld id="{F7021451-1387-4CA6-816F-3879F97B5CBC}" type="slidenum">
               <a:rPr lang="en-US"/>
-              <a:t>8</a:t>
+              <a:t>7</a:t>
             </a:fld>
             <a:endParaRPr lang="en-US"/>
           </a:p>
@@ -1085,7 +1303,7 @@
     </p:spTree>
     <p:extLst>
       <p:ext uri="{BB962C8B-B14F-4D97-AF65-F5344CB8AC3E}">
-        <p14:creationId xmlns:p14="http://schemas.microsoft.com/office/powerpoint/2010/main" val="1024086991"/>
+        <p14:creationId xmlns:p14="http://schemas.microsoft.com/office/powerpoint/2010/main" val="2131187769"/>
       </p:ext>
     </p:extLst>
   </p:cSld>
@@ -1160,7 +1378,7 @@
           <a:p>
             <a:fld id="{F7021451-1387-4CA6-816F-3879F97B5CBC}" type="slidenum">
               <a:rPr lang="en-US"/>
-              <a:t>9</a:t>
+              <a:t>8</a:t>
             </a:fld>
             <a:endParaRPr lang="en-US"/>
           </a:p>
@@ -1244,7 +1462,7 @@
           <a:p>
             <a:fld id="{F7021451-1387-4CA6-816F-3879F97B5CBC}" type="slidenum">
               <a:rPr lang="en-US"/>
-              <a:t>10</a:t>
+              <a:t>9</a:t>
             </a:fld>
             <a:endParaRPr lang="en-US"/>
           </a:p>
@@ -1328,7 +1546,7 @@
           <a:p>
             <a:fld id="{F7021451-1387-4CA6-816F-3879F97B5CBC}" type="slidenum">
               <a:rPr lang="en-US"/>
-              <a:t>11</a:t>
+              <a:t>10</a:t>
             </a:fld>
             <a:endParaRPr lang="en-US"/>
           </a:p>
@@ -1412,7 +1630,7 @@
           <a:p>
             <a:fld id="{F7021451-1387-4CA6-816F-3879F97B5CBC}" type="slidenum">
               <a:rPr lang="en-US"/>
-              <a:t>12</a:t>
+              <a:t>11</a:t>
             </a:fld>
             <a:endParaRPr lang="en-US"/>
           </a:p>
@@ -1496,7 +1714,7 @@
           <a:p>
             <a:fld id="{F7021451-1387-4CA6-816F-3879F97B5CBC}" type="slidenum">
               <a:rPr lang="en-US"/>
-              <a:t>13</a:t>
+              <a:t>12</a:t>
             </a:fld>
             <a:endParaRPr lang="en-US"/>
           </a:p>
@@ -1950,74 +2168,6 @@
       </p:sp>
       <p:sp>
         <p:nvSpPr>
-          <p:cNvPr id="4" name="Shape 2"/>
-          <p:cNvSpPr/>
-          <p:nvPr/>
-        </p:nvSpPr>
-        <p:spPr>
-          <a:xfrm>
-            <a:off x="457200" y="3401568"/>
-            <a:ext cx="5212080" cy="402336"/>
-          </a:xfrm>
-          <a:prstGeom prst="rect">
-            <a:avLst/>
-          </a:prstGeom>
-          <a:solidFill>
-            <a:srgbClr val="CC0000"/>
-          </a:solidFill>
-          <a:ln w="12700">
-            <a:solidFill>
-              <a:srgbClr val="CC0000"/>
-            </a:solidFill>
-            <a:prstDash val="solid"/>
-          </a:ln>
-        </p:spPr>
-        <p:txBody>
-          <a:bodyPr/>
-          <a:lstStyle/>
-          <a:p>
-            <a:endParaRPr lang="en-US"/>
-          </a:p>
-        </p:txBody>
-      </p:sp>
-      <p:sp>
-        <p:nvSpPr>
-          <p:cNvPr id="5" name="Text 3"/>
-          <p:cNvSpPr/>
-          <p:nvPr/>
-        </p:nvSpPr>
-        <p:spPr>
-          <a:xfrm>
-            <a:off x="457200" y="3401568"/>
-            <a:ext cx="5212080" cy="402336"/>
-          </a:xfrm>
-          <a:prstGeom prst="rect">
-            <a:avLst/>
-          </a:prstGeom>
-          <a:noFill/>
-          <a:ln/>
-        </p:spPr>
-        <p:txBody>
-          <a:bodyPr wrap="square" lIns="0" tIns="101600" rIns="0" bIns="0" rtlCol="0" anchor="ctr"/>
-          <a:lstStyle/>
-          <a:p>
-            <a:pPr marL="0" indent="0">
-              <a:buNone/>
-            </a:pPr>
-            <a:r>
-              <a:rPr lang="en-US" sz="1400" dirty="0">
-                <a:solidFill>
-                  <a:srgbClr val="FFFFFF"/>
-                </a:solidFill>
-              </a:rPr>
-              <a:t>Za odrasle i osobe starije životne dobi</a:t>
-            </a:r>
-            <a:endParaRPr lang="en-US" sz="1400" dirty="0"/>
-          </a:p>
-        </p:txBody>
-      </p:sp>
-      <p:sp>
-        <p:nvSpPr>
           <p:cNvPr id="6" name="Text 4"/>
           <p:cNvSpPr/>
           <p:nvPr/>
@@ -2674,21 +2824,72 @@
                   <a:srgbClr val="FFFFFF"/>
                 </a:solidFill>
               </a:rPr>
-              <a:t>OpenAI
-</a:t>
-            </a:r>
-            <a:r>
-              <a:rPr lang="en-US" sz="1300" dirty="0">
-                <a:solidFill>
-                  <a:srgbClr val="AAAAAA"/>
-                </a:solidFill>
-              </a:rPr>
-              <a:t>→ Bijeli logotip, crna pozadina</a:t>
+              <a:t>OpenAI</a:t>
             </a:r>
             <a:endParaRPr lang="en-US" sz="1300" dirty="0"/>
           </a:p>
         </p:txBody>
       </p:sp>
+      <p:pic>
+        <p:nvPicPr>
+          <p:cNvPr id="23" name="Picture 22">
+            <a:extLst>
+              <a:ext uri="{FF2B5EF4-FFF2-40B4-BE49-F238E27FC236}">
+                <a16:creationId xmlns:a16="http://schemas.microsoft.com/office/drawing/2014/main" id="{1AEE5C6C-B3E8-CD4E-D5BA-90BF695088A5}"/>
+              </a:ext>
+            </a:extLst>
+          </p:cNvPr>
+          <p:cNvPicPr>
+            <a:picLocks noChangeAspect="1"/>
+          </p:cNvPicPr>
+          <p:nvPr/>
+        </p:nvPicPr>
+        <p:blipFill>
+          <a:blip r:embed="rId3"/>
+          <a:stretch>
+            <a:fillRect/>
+          </a:stretch>
+        </p:blipFill>
+        <p:spPr>
+          <a:xfrm>
+            <a:off x="6055878" y="3470471"/>
+            <a:ext cx="971444" cy="868357"/>
+          </a:xfrm>
+          <a:prstGeom prst="rect">
+            <a:avLst/>
+          </a:prstGeom>
+        </p:spPr>
+      </p:pic>
+      <p:pic>
+        <p:nvPicPr>
+          <p:cNvPr id="25" name="Picture 24">
+            <a:extLst>
+              <a:ext uri="{FF2B5EF4-FFF2-40B4-BE49-F238E27FC236}">
+                <a16:creationId xmlns:a16="http://schemas.microsoft.com/office/drawing/2014/main" id="{33869AA6-2CE8-5574-1D94-2B358F228542}"/>
+              </a:ext>
+            </a:extLst>
+          </p:cNvPr>
+          <p:cNvPicPr>
+            <a:picLocks noChangeAspect="1"/>
+          </p:cNvPicPr>
+          <p:nvPr/>
+        </p:nvPicPr>
+        <p:blipFill>
+          <a:blip r:embed="rId4"/>
+          <a:stretch>
+            <a:fillRect/>
+          </a:stretch>
+        </p:blipFill>
+        <p:spPr>
+          <a:xfrm>
+            <a:off x="7447833" y="3265324"/>
+            <a:ext cx="1058699" cy="1278650"/>
+          </a:xfrm>
+          <a:prstGeom prst="rect">
+            <a:avLst/>
+          </a:prstGeom>
+        </p:spPr>
+      </p:pic>
     </p:spTree>
   </p:cSld>
   <p:clrMapOvr>
@@ -2978,7 +3179,39 @@
                   <a:srgbClr val="444444"/>
                 </a:solidFill>
               </a:rPr>
-              <a:t>7 stilova (Friendly, Direct, Nerdy…). Biramo jednim klikom u Settings &gt; Personalization.</a:t>
+              <a:t>7 stilova (Friendly, Direct, Nerdy…). </a:t>
+            </a:r>
+            <a:r>
+              <a:rPr lang="en-US" sz="1200" dirty="0" err="1">
+                <a:solidFill>
+                  <a:srgbClr val="444444"/>
+                </a:solidFill>
+              </a:rPr>
+              <a:t>Biramo</a:t>
+            </a:r>
+            <a:r>
+              <a:rPr lang="en-US" sz="1200" dirty="0">
+                <a:solidFill>
+                  <a:srgbClr val="444444"/>
+                </a:solidFill>
+              </a:rPr>
+              <a:t> u </a:t>
+            </a:r>
+            <a:r>
+              <a:rPr lang="en-US" sz="1200" dirty="0" err="1">
+                <a:solidFill>
+                  <a:srgbClr val="444444"/>
+                </a:solidFill>
+              </a:rPr>
+              <a:t>postavkama</a:t>
+            </a:r>
+            <a:r>
+              <a:rPr lang="en-US" sz="1200" dirty="0">
+                <a:solidFill>
+                  <a:srgbClr val="444444"/>
+                </a:solidFill>
+              </a:rPr>
+              <a:t>.</a:t>
             </a:r>
             <a:endParaRPr lang="en-US" sz="1200" dirty="0"/>
           </a:p>
@@ -3172,7 +3405,55 @@
                   <a:srgbClr val="444444"/>
                 </a:solidFill>
               </a:rPr>
-              <a:t>Jednom upišite tko ste i kako želite odgovore — vrijedi za sve buduće razgovore.</a:t>
+              <a:t>Jednom upišite tko ste i kako želite odgovore — vrijedi za sve buduće </a:t>
+            </a:r>
+            <a:r>
+              <a:rPr lang="en-US" sz="1200" dirty="0" err="1">
+                <a:solidFill>
+                  <a:srgbClr val="444444"/>
+                </a:solidFill>
+              </a:rPr>
+              <a:t>razgovore</a:t>
+            </a:r>
+            <a:r>
+              <a:rPr lang="en-US" sz="1200" dirty="0">
+                <a:solidFill>
+                  <a:srgbClr val="444444"/>
+                </a:solidFill>
+              </a:rPr>
+              <a:t>. </a:t>
+            </a:r>
+            <a:r>
+              <a:rPr lang="en-US" sz="1200" dirty="0" err="1">
+                <a:solidFill>
+                  <a:srgbClr val="444444"/>
+                </a:solidFill>
+              </a:rPr>
+              <a:t>Istraživanje</a:t>
+            </a:r>
+            <a:r>
+              <a:rPr lang="en-US" sz="1200" dirty="0">
+                <a:solidFill>
+                  <a:srgbClr val="444444"/>
+                </a:solidFill>
+              </a:rPr>
+              <a:t> </a:t>
+            </a:r>
+            <a:r>
+              <a:rPr lang="en-US" sz="1200" dirty="0" err="1">
+                <a:solidFill>
+                  <a:srgbClr val="444444"/>
+                </a:solidFill>
+              </a:rPr>
+              <a:t>postavki</a:t>
+            </a:r>
+            <a:r>
+              <a:rPr lang="en-US" sz="1200" dirty="0">
+                <a:solidFill>
+                  <a:srgbClr val="444444"/>
+                </a:solidFill>
+              </a:rPr>
+              <a:t>.</a:t>
             </a:r>
             <a:endParaRPr lang="en-US" sz="1200" dirty="0"/>
           </a:p>
@@ -3560,7 +3841,55 @@
                   <a:srgbClr val="444444"/>
                 </a:solidFill>
               </a:rPr>
-              <a:t>Odvojeni 'projekti' za recepte, zdravlje, obitelj — svaki s vlastitim uputama i memorijom.</a:t>
+              <a:t>Odvojeni 'projekti' za recepte, zdravlje, obitelj — svaki s vlastitim uputama i </a:t>
+            </a:r>
+            <a:r>
+              <a:rPr lang="en-US" sz="1200" dirty="0" err="1">
+                <a:solidFill>
+                  <a:srgbClr val="444444"/>
+                </a:solidFill>
+              </a:rPr>
+              <a:t>memorijom</a:t>
+            </a:r>
+            <a:r>
+              <a:rPr lang="en-US" sz="1200" dirty="0">
+                <a:solidFill>
+                  <a:srgbClr val="444444"/>
+                </a:solidFill>
+              </a:rPr>
+              <a:t>. </a:t>
+            </a:r>
+            <a:r>
+              <a:rPr lang="en-US" sz="1200" dirty="0" err="1">
+                <a:solidFill>
+                  <a:srgbClr val="444444"/>
+                </a:solidFill>
+              </a:rPr>
+              <a:t>Grupirani</a:t>
+            </a:r>
+            <a:r>
+              <a:rPr lang="en-US" sz="1200" dirty="0">
+                <a:solidFill>
+                  <a:srgbClr val="444444"/>
+                </a:solidFill>
+              </a:rPr>
+              <a:t> </a:t>
+            </a:r>
+            <a:r>
+              <a:rPr lang="en-US" sz="1200" dirty="0" err="1">
+                <a:solidFill>
+                  <a:srgbClr val="444444"/>
+                </a:solidFill>
+              </a:rPr>
+              <a:t>razgovori</a:t>
+            </a:r>
+            <a:r>
+              <a:rPr lang="en-US" sz="1200" dirty="0">
+                <a:solidFill>
+                  <a:srgbClr val="444444"/>
+                </a:solidFill>
+              </a:rPr>
+              <a:t>.</a:t>
             </a:r>
             <a:endParaRPr lang="en-US" sz="1200" dirty="0"/>
           </a:p>
@@ -3896,12 +4225,28 @@
               <a:buNone/>
             </a:pPr>
             <a:r>
+              <a:rPr lang="en-US" sz="1300" b="1" dirty="0" err="1">
+                <a:solidFill>
+                  <a:srgbClr val="FFFFFF"/>
+                </a:solidFill>
+              </a:rPr>
+              <a:t>Dodavanje</a:t>
+            </a:r>
+            <a:r>
               <a:rPr lang="en-US" sz="1300" b="1" dirty="0">
                 <a:solidFill>
                   <a:srgbClr val="FFFFFF"/>
                 </a:solidFill>
               </a:rPr>
-              <a:t>Zdravlje</a:t>
+              <a:t> </a:t>
+            </a:r>
+            <a:r>
+              <a:rPr lang="en-US" sz="1300" b="1" dirty="0" err="1">
+                <a:solidFill>
+                  <a:srgbClr val="FFFFFF"/>
+                </a:solidFill>
+              </a:rPr>
+              <a:t>datoteka</a:t>
             </a:r>
             <a:endParaRPr lang="en-US" sz="1300" dirty="0"/>
           </a:p>
@@ -3937,7 +4282,87 @@
                   <a:srgbClr val="444444"/>
                 </a:solidFill>
               </a:rPr>
-              <a:t>"Liječnik mi je napisao: 'stenoza aortnog zaliska I35.0'. Objasni mi to na jednostavnom hrvatskom, bez žargona."</a:t>
+              <a:t>“</a:t>
+            </a:r>
+            <a:r>
+              <a:rPr lang="en-US" sz="1200" i="1" dirty="0" err="1">
+                <a:solidFill>
+                  <a:srgbClr val="444444"/>
+                </a:solidFill>
+              </a:rPr>
+              <a:t>Objasni</a:t>
+            </a:r>
+            <a:r>
+              <a:rPr lang="en-US" sz="1200" i="1" dirty="0">
+                <a:solidFill>
+                  <a:srgbClr val="444444"/>
+                </a:solidFill>
+              </a:rPr>
+              <a:t> mi </a:t>
+            </a:r>
+            <a:r>
+              <a:rPr lang="en-US" sz="1200" i="1" dirty="0" err="1">
+                <a:solidFill>
+                  <a:srgbClr val="444444"/>
+                </a:solidFill>
+              </a:rPr>
+              <a:t>što</a:t>
+            </a:r>
+            <a:r>
+              <a:rPr lang="en-US" sz="1200" i="1" dirty="0">
+                <a:solidFill>
+                  <a:srgbClr val="444444"/>
+                </a:solidFill>
+              </a:rPr>
+              <a:t> je </a:t>
+            </a:r>
+            <a:r>
+              <a:rPr lang="en-US" sz="1200" i="1" dirty="0" err="1">
+                <a:solidFill>
+                  <a:srgbClr val="444444"/>
+                </a:solidFill>
+              </a:rPr>
+              <a:t>na</a:t>
+            </a:r>
+            <a:r>
+              <a:rPr lang="en-US" sz="1200" i="1" dirty="0">
+                <a:solidFill>
+                  <a:srgbClr val="444444"/>
+                </a:solidFill>
+              </a:rPr>
+              <a:t> </a:t>
+            </a:r>
+            <a:r>
+              <a:rPr lang="en-US" sz="1200" i="1" dirty="0" err="1">
+                <a:solidFill>
+                  <a:srgbClr val="444444"/>
+                </a:solidFill>
+              </a:rPr>
+              <a:t>priloženoj</a:t>
+            </a:r>
+            <a:r>
+              <a:rPr lang="en-US" sz="1200" i="1" dirty="0">
+                <a:solidFill>
+                  <a:srgbClr val="444444"/>
+                </a:solidFill>
+              </a:rPr>
+              <a:t> </a:t>
+            </a:r>
+            <a:r>
+              <a:rPr lang="en-US" sz="1200" i="1" dirty="0" err="1">
+                <a:solidFill>
+                  <a:srgbClr val="444444"/>
+                </a:solidFill>
+              </a:rPr>
+              <a:t>slici</a:t>
+            </a:r>
+            <a:r>
+              <a:rPr lang="en-US" sz="1200" i="1" dirty="0">
+                <a:solidFill>
+                  <a:srgbClr val="444444"/>
+                </a:solidFill>
+              </a:rPr>
+              <a:t>”</a:t>
             </a:r>
             <a:endParaRPr lang="en-US" sz="1200" dirty="0"/>
           </a:p>
@@ -4219,6 +4644,66 @@
           </a:p>
         </p:txBody>
       </p:sp>
+      <p:pic>
+        <p:nvPicPr>
+          <p:cNvPr id="23" name="Picture 22">
+            <a:extLst>
+              <a:ext uri="{FF2B5EF4-FFF2-40B4-BE49-F238E27FC236}">
+                <a16:creationId xmlns:a16="http://schemas.microsoft.com/office/drawing/2014/main" id="{BDAE69EF-AA0D-46EF-7BE5-15464551B653}"/>
+              </a:ext>
+            </a:extLst>
+          </p:cNvPr>
+          <p:cNvPicPr>
+            <a:picLocks noChangeAspect="1"/>
+          </p:cNvPicPr>
+          <p:nvPr/>
+        </p:nvPicPr>
+        <p:blipFill>
+          <a:blip r:embed="rId3"/>
+          <a:stretch>
+            <a:fillRect/>
+          </a:stretch>
+        </p:blipFill>
+        <p:spPr>
+          <a:xfrm>
+            <a:off x="7151956" y="1625779"/>
+            <a:ext cx="966206" cy="945971"/>
+          </a:xfrm>
+          <a:prstGeom prst="rect">
+            <a:avLst/>
+          </a:prstGeom>
+        </p:spPr>
+      </p:pic>
+      <p:pic>
+        <p:nvPicPr>
+          <p:cNvPr id="25" name="Picture 24">
+            <a:extLst>
+              <a:ext uri="{FF2B5EF4-FFF2-40B4-BE49-F238E27FC236}">
+                <a16:creationId xmlns:a16="http://schemas.microsoft.com/office/drawing/2014/main" id="{AC40623D-CCBE-C069-7B2A-340541886C3A}"/>
+              </a:ext>
+            </a:extLst>
+          </p:cNvPr>
+          <p:cNvPicPr>
+            <a:picLocks noChangeAspect="1"/>
+          </p:cNvPicPr>
+          <p:nvPr/>
+        </p:nvPicPr>
+        <p:blipFill>
+          <a:blip r:embed="rId4"/>
+          <a:stretch>
+            <a:fillRect/>
+          </a:stretch>
+        </p:blipFill>
+        <p:spPr>
+          <a:xfrm>
+            <a:off x="5424841" y="1846385"/>
+            <a:ext cx="1063007" cy="492545"/>
+          </a:xfrm>
+          <a:prstGeom prst="rect">
+            <a:avLst/>
+          </a:prstGeom>
+        </p:spPr>
+      </p:pic>
     </p:spTree>
   </p:cSld>
   <p:clrMapOvr>
@@ -4724,12 +5209,714 @@
                   <a:srgbClr val="444444"/>
                 </a:solidFill>
               </a:rPr>
-              <a:t>Primjena: čestitke, pozivnice, Facebook objave, slike za ispis!</a:t>
+              <a:t>Primjena: čestitke, pozivnice, Facebook objave, slike za </a:t>
+            </a:r>
+            <a:r>
+              <a:rPr lang="en-US" sz="1300" dirty="0" err="1">
+                <a:solidFill>
+                  <a:srgbClr val="444444"/>
+                </a:solidFill>
+              </a:rPr>
+              <a:t>ispis</a:t>
+            </a:r>
+            <a:r>
+              <a:rPr lang="en-US" sz="1300" dirty="0">
+                <a:solidFill>
+                  <a:srgbClr val="444444"/>
+                </a:solidFill>
+              </a:rPr>
+              <a:t>!</a:t>
+            </a:r>
+          </a:p>
+          <a:p>
+            <a:pPr marL="342900" indent="-342900">
+              <a:spcAft>
+                <a:spcPts val="800"/>
+              </a:spcAft>
+              <a:buSzPct val="100000"/>
+              <a:buChar char="•"/>
+            </a:pPr>
+            <a:r>
+              <a:rPr lang="en-US" sz="1300" dirty="0" err="1">
+                <a:solidFill>
+                  <a:srgbClr val="444444"/>
+                </a:solidFill>
+              </a:rPr>
+              <a:t>Primjer</a:t>
+            </a:r>
+            <a:r>
+              <a:rPr lang="en-US" sz="1300" dirty="0">
+                <a:solidFill>
+                  <a:srgbClr val="444444"/>
+                </a:solidFill>
+              </a:rPr>
+              <a:t>: “</a:t>
+            </a:r>
+            <a:r>
+              <a:rPr lang="en-US" sz="1300" dirty="0" err="1">
+                <a:solidFill>
+                  <a:srgbClr val="444444"/>
+                </a:solidFill>
+              </a:rPr>
+              <a:t>generiraj</a:t>
+            </a:r>
+            <a:r>
+              <a:rPr lang="en-US" sz="1300" dirty="0">
+                <a:solidFill>
+                  <a:srgbClr val="444444"/>
+                </a:solidFill>
+              </a:rPr>
+              <a:t> </a:t>
+            </a:r>
+            <a:r>
+              <a:rPr lang="en-US" sz="1300" dirty="0" err="1">
+                <a:solidFill>
+                  <a:srgbClr val="444444"/>
+                </a:solidFill>
+              </a:rPr>
+              <a:t>sliku</a:t>
+            </a:r>
+            <a:r>
+              <a:rPr lang="en-US" sz="1300" dirty="0">
+                <a:solidFill>
+                  <a:srgbClr val="444444"/>
+                </a:solidFill>
+              </a:rPr>
+              <a:t> </a:t>
+            </a:r>
+            <a:r>
+              <a:rPr lang="en-US" sz="1300" dirty="0" err="1">
+                <a:solidFill>
+                  <a:srgbClr val="444444"/>
+                </a:solidFill>
+              </a:rPr>
+              <a:t>zelene</a:t>
+            </a:r>
+            <a:r>
+              <a:rPr lang="en-US" sz="1300" dirty="0">
+                <a:solidFill>
+                  <a:srgbClr val="444444"/>
+                </a:solidFill>
+              </a:rPr>
+              <a:t> </a:t>
+            </a:r>
+            <a:r>
+              <a:rPr lang="en-US" sz="1300" dirty="0" err="1">
+                <a:solidFill>
+                  <a:srgbClr val="444444"/>
+                </a:solidFill>
+              </a:rPr>
+              <a:t>oaze</a:t>
+            </a:r>
+            <a:r>
+              <a:rPr lang="en-US" sz="1300" dirty="0">
+                <a:solidFill>
+                  <a:srgbClr val="444444"/>
+                </a:solidFill>
+              </a:rPr>
+              <a:t>” </a:t>
+            </a:r>
+            <a:r>
+              <a:rPr lang="en-US" sz="1300" dirty="0" err="1">
+                <a:solidFill>
+                  <a:srgbClr val="444444"/>
+                </a:solidFill>
+              </a:rPr>
+              <a:t>na</a:t>
+            </a:r>
+            <a:r>
+              <a:rPr lang="en-US" sz="1300" dirty="0">
+                <a:solidFill>
+                  <a:srgbClr val="444444"/>
+                </a:solidFill>
+              </a:rPr>
+              <a:t> </a:t>
+            </a:r>
+            <a:r>
+              <a:rPr lang="en-US" sz="1300" dirty="0" err="1">
+                <a:solidFill>
+                  <a:srgbClr val="444444"/>
+                </a:solidFill>
+              </a:rPr>
+              <a:t>idućem</a:t>
+            </a:r>
+            <a:r>
+              <a:rPr lang="en-US" sz="1300" dirty="0">
+                <a:solidFill>
+                  <a:srgbClr val="444444"/>
+                </a:solidFill>
+              </a:rPr>
+              <a:t> </a:t>
+            </a:r>
+            <a:r>
+              <a:rPr lang="en-US" sz="1300" dirty="0" err="1">
+                <a:solidFill>
+                  <a:srgbClr val="444444"/>
+                </a:solidFill>
+              </a:rPr>
+              <a:t>slajdu</a:t>
+            </a:r>
+            <a:endParaRPr lang="en-US" sz="1300" dirty="0">
+              <a:solidFill>
+                <a:srgbClr val="444444"/>
+              </a:solidFill>
+            </a:endParaRPr>
+          </a:p>
+          <a:p>
+            <a:pPr marL="342900" indent="-342900">
+              <a:spcAft>
+                <a:spcPts val="800"/>
+              </a:spcAft>
+              <a:buSzPct val="100000"/>
+              <a:buChar char="•"/>
+            </a:pPr>
+            <a:r>
+              <a:rPr lang="en-US" sz="1300" dirty="0" err="1">
+                <a:solidFill>
+                  <a:srgbClr val="444444"/>
+                </a:solidFill>
+              </a:rPr>
+              <a:t>Desni</a:t>
+            </a:r>
+            <a:r>
+              <a:rPr lang="en-US" sz="1300" dirty="0">
+                <a:solidFill>
+                  <a:srgbClr val="444444"/>
+                </a:solidFill>
+              </a:rPr>
+              <a:t> </a:t>
+            </a:r>
+            <a:r>
+              <a:rPr lang="en-US" sz="1300" dirty="0" err="1">
+                <a:solidFill>
+                  <a:srgbClr val="444444"/>
+                </a:solidFill>
+              </a:rPr>
+              <a:t>klik</a:t>
+            </a:r>
+            <a:r>
+              <a:rPr lang="en-US" sz="1300" dirty="0">
+                <a:solidFill>
+                  <a:srgbClr val="444444"/>
+                </a:solidFill>
+              </a:rPr>
+              <a:t> </a:t>
+            </a:r>
+            <a:r>
+              <a:rPr lang="en-US" sz="1300" dirty="0" err="1">
+                <a:solidFill>
+                  <a:srgbClr val="444444"/>
+                </a:solidFill>
+              </a:rPr>
+              <a:t>na</a:t>
+            </a:r>
+            <a:r>
+              <a:rPr lang="en-US" sz="1300" dirty="0">
+                <a:solidFill>
+                  <a:srgbClr val="444444"/>
+                </a:solidFill>
+              </a:rPr>
+              <a:t> </a:t>
+            </a:r>
+            <a:r>
+              <a:rPr lang="en-US" sz="1300" dirty="0" err="1">
+                <a:solidFill>
+                  <a:srgbClr val="444444"/>
+                </a:solidFill>
+              </a:rPr>
+              <a:t>sliku</a:t>
+            </a:r>
+            <a:r>
+              <a:rPr lang="en-US" sz="1300" dirty="0">
+                <a:solidFill>
+                  <a:srgbClr val="444444"/>
+                </a:solidFill>
+              </a:rPr>
+              <a:t> -&gt; </a:t>
+            </a:r>
+            <a:r>
+              <a:rPr lang="en-US" sz="1300" dirty="0" err="1">
+                <a:solidFill>
+                  <a:srgbClr val="444444"/>
+                </a:solidFill>
+              </a:rPr>
+              <a:t>preuzmi</a:t>
+            </a:r>
+            <a:r>
+              <a:rPr lang="en-US" sz="1300" dirty="0">
+                <a:solidFill>
+                  <a:srgbClr val="444444"/>
+                </a:solidFill>
+              </a:rPr>
+              <a:t> </a:t>
+            </a:r>
+            <a:r>
+              <a:rPr lang="en-US" sz="1300" dirty="0" err="1">
+                <a:solidFill>
+                  <a:srgbClr val="444444"/>
+                </a:solidFill>
+              </a:rPr>
+              <a:t>sliku</a:t>
+            </a:r>
+            <a:r>
+              <a:rPr lang="en-US" sz="1300" dirty="0">
+                <a:solidFill>
+                  <a:srgbClr val="444444"/>
+                </a:solidFill>
+              </a:rPr>
+              <a:t> -&gt; </a:t>
+            </a:r>
+            <a:r>
+              <a:rPr lang="en-US" sz="1300" dirty="0" err="1">
+                <a:solidFill>
+                  <a:srgbClr val="444444"/>
+                </a:solidFill>
+              </a:rPr>
+              <a:t>odabir</a:t>
+            </a:r>
+            <a:r>
+              <a:rPr lang="en-US" sz="1300" dirty="0">
+                <a:solidFill>
+                  <a:srgbClr val="444444"/>
+                </a:solidFill>
+              </a:rPr>
+              <a:t> </a:t>
+            </a:r>
+            <a:r>
+              <a:rPr lang="en-US" sz="1300" dirty="0" err="1">
+                <a:solidFill>
+                  <a:srgbClr val="444444"/>
+                </a:solidFill>
+              </a:rPr>
+              <a:t>lokacije</a:t>
+            </a:r>
+            <a:r>
+              <a:rPr lang="en-US" sz="1300" dirty="0">
+                <a:solidFill>
+                  <a:srgbClr val="444444"/>
+                </a:solidFill>
+              </a:rPr>
+              <a:t> </a:t>
+            </a:r>
+            <a:r>
+              <a:rPr lang="en-US" sz="1300" dirty="0" err="1">
+                <a:solidFill>
+                  <a:srgbClr val="444444"/>
+                </a:solidFill>
+              </a:rPr>
+              <a:t>na</a:t>
+            </a:r>
+            <a:r>
+              <a:rPr lang="en-US" sz="1300" dirty="0">
+                <a:solidFill>
+                  <a:srgbClr val="444444"/>
+                </a:solidFill>
+              </a:rPr>
+              <a:t> </a:t>
+            </a:r>
+            <a:r>
+              <a:rPr lang="en-US" sz="1300" dirty="0" err="1">
+                <a:solidFill>
+                  <a:srgbClr val="444444"/>
+                </a:solidFill>
+              </a:rPr>
+              <a:t>disku</a:t>
+            </a:r>
+            <a:r>
+              <a:rPr lang="en-US" sz="1300" dirty="0">
+                <a:solidFill>
+                  <a:srgbClr val="444444"/>
+                </a:solidFill>
+              </a:rPr>
+              <a:t> za </a:t>
+            </a:r>
+            <a:r>
+              <a:rPr lang="en-US" sz="1300" dirty="0" err="1">
+                <a:solidFill>
+                  <a:srgbClr val="444444"/>
+                </a:solidFill>
+              </a:rPr>
+              <a:t>preuzimanje</a:t>
+            </a:r>
+            <a:r>
+              <a:rPr lang="en-US" sz="1300" dirty="0">
+                <a:solidFill>
+                  <a:srgbClr val="444444"/>
+                </a:solidFill>
+              </a:rPr>
+              <a:t> </a:t>
+            </a:r>
+            <a:r>
+              <a:rPr lang="en-US" sz="1300" dirty="0" err="1">
+                <a:solidFill>
+                  <a:srgbClr val="444444"/>
+                </a:solidFill>
+              </a:rPr>
+              <a:t>slike</a:t>
+            </a:r>
+            <a:endParaRPr lang="en-US" sz="1300" dirty="0">
+              <a:solidFill>
+                <a:srgbClr val="444444"/>
+              </a:solidFill>
+            </a:endParaRPr>
+          </a:p>
+          <a:p>
+            <a:pPr marL="342900" indent="-342900">
+              <a:spcAft>
+                <a:spcPts val="800"/>
+              </a:spcAft>
+              <a:buSzPct val="100000"/>
+              <a:buChar char="•"/>
+            </a:pPr>
+            <a:r>
+              <a:rPr lang="en-US" sz="1300" dirty="0" err="1">
+                <a:solidFill>
+                  <a:srgbClr val="444444"/>
+                </a:solidFill>
+              </a:rPr>
+              <a:t>Podijelite</a:t>
+            </a:r>
+            <a:r>
+              <a:rPr lang="en-US" sz="1300" dirty="0">
+                <a:solidFill>
+                  <a:srgbClr val="444444"/>
+                </a:solidFill>
+              </a:rPr>
+              <a:t> </a:t>
+            </a:r>
+            <a:r>
+              <a:rPr lang="en-US" sz="1300" dirty="0" err="1">
+                <a:solidFill>
+                  <a:srgbClr val="444444"/>
+                </a:solidFill>
+              </a:rPr>
+              <a:t>sliku</a:t>
+            </a:r>
+            <a:r>
+              <a:rPr lang="en-US" sz="1300" dirty="0">
+                <a:solidFill>
+                  <a:srgbClr val="444444"/>
+                </a:solidFill>
+              </a:rPr>
+              <a:t> </a:t>
+            </a:r>
+            <a:r>
+              <a:rPr lang="en-US" sz="1300" dirty="0" err="1">
+                <a:solidFill>
+                  <a:srgbClr val="444444"/>
+                </a:solidFill>
+              </a:rPr>
+              <a:t>izravno</a:t>
+            </a:r>
+            <a:r>
+              <a:rPr lang="en-US" sz="1300" dirty="0">
+                <a:solidFill>
+                  <a:srgbClr val="444444"/>
+                </a:solidFill>
+              </a:rPr>
+              <a:t> </a:t>
+            </a:r>
+            <a:r>
+              <a:rPr lang="en-US" sz="1300" dirty="0" err="1">
+                <a:solidFill>
+                  <a:srgbClr val="444444"/>
+                </a:solidFill>
+              </a:rPr>
+              <a:t>iz</a:t>
+            </a:r>
+            <a:r>
+              <a:rPr lang="en-US" sz="1300" dirty="0">
+                <a:solidFill>
+                  <a:srgbClr val="444444"/>
+                </a:solidFill>
+              </a:rPr>
+              <a:t> </a:t>
+            </a:r>
+            <a:r>
+              <a:rPr lang="en-US" sz="1300" dirty="0" err="1">
+                <a:solidFill>
+                  <a:srgbClr val="444444"/>
+                </a:solidFill>
+              </a:rPr>
+              <a:t>razgovora</a:t>
+            </a:r>
+            <a:r>
+              <a:rPr lang="en-US" sz="1300" dirty="0">
+                <a:solidFill>
+                  <a:srgbClr val="444444"/>
+                </a:solidFill>
+              </a:rPr>
+              <a:t> -&gt;</a:t>
             </a:r>
             <a:endParaRPr lang="en-US" sz="1300" dirty="0"/>
           </a:p>
         </p:txBody>
       </p:sp>
+      <p:pic>
+        <p:nvPicPr>
+          <p:cNvPr id="17" name="Picture 16">
+            <a:extLst>
+              <a:ext uri="{FF2B5EF4-FFF2-40B4-BE49-F238E27FC236}">
+                <a16:creationId xmlns:a16="http://schemas.microsoft.com/office/drawing/2014/main" id="{4D8DCF40-32AB-1E56-25F3-718FEA7CBD2F}"/>
+              </a:ext>
+            </a:extLst>
+          </p:cNvPr>
+          <p:cNvPicPr>
+            <a:picLocks noChangeAspect="1"/>
+          </p:cNvPicPr>
+          <p:nvPr/>
+        </p:nvPicPr>
+        <p:blipFill>
+          <a:blip r:embed="rId3"/>
+          <a:stretch>
+            <a:fillRect/>
+          </a:stretch>
+        </p:blipFill>
+        <p:spPr>
+          <a:xfrm>
+            <a:off x="7995091" y="4228292"/>
+            <a:ext cx="409726" cy="539640"/>
+          </a:xfrm>
+          <a:prstGeom prst="rect">
+            <a:avLst/>
+          </a:prstGeom>
+        </p:spPr>
+      </p:pic>
+      <p:pic>
+        <p:nvPicPr>
+          <p:cNvPr id="4104" name="Picture 8" descr="ChatGPT - Wikipedia">
+            <a:extLst>
+              <a:ext uri="{FF2B5EF4-FFF2-40B4-BE49-F238E27FC236}">
+                <a16:creationId xmlns:a16="http://schemas.microsoft.com/office/drawing/2014/main" id="{9A49E283-1A7E-8E47-8D5B-9CD525B2F950}"/>
+              </a:ext>
+            </a:extLst>
+          </p:cNvPr>
+          <p:cNvPicPr>
+            <a:picLocks noChangeAspect="1" noChangeArrowheads="1"/>
+          </p:cNvPicPr>
+          <p:nvPr/>
+        </p:nvPicPr>
+        <p:blipFill>
+          <a:blip r:embed="rId4">
+            <a:extLst>
+              <a:ext uri="{28A0092B-C50C-407E-A947-70E740481C1C}">
+                <a14:useLocalDpi xmlns:a14="http://schemas.microsoft.com/office/drawing/2010/main" val="0"/>
+              </a:ext>
+            </a:extLst>
+          </a:blip>
+          <a:srcRect/>
+          <a:stretch>
+            <a:fillRect/>
+          </a:stretch>
+        </p:blipFill>
+        <p:spPr bwMode="auto">
+          <a:xfrm>
+            <a:off x="411480" y="3959283"/>
+            <a:ext cx="535782" cy="533400"/>
+          </a:xfrm>
+          <a:prstGeom prst="rect">
+            <a:avLst/>
+          </a:prstGeom>
+          <a:noFill/>
+          <a:extLst>
+            <a:ext uri="{909E8E84-426E-40DD-AFC4-6F175D3DCCD1}">
+              <a14:hiddenFill xmlns:a14="http://schemas.microsoft.com/office/drawing/2010/main">
+                <a:solidFill>
+                  <a:srgbClr val="FFFFFF"/>
+                </a:solidFill>
+              </a14:hiddenFill>
+            </a:ext>
+          </a:extLst>
+        </p:spPr>
+      </p:pic>
+      <p:pic>
+        <p:nvPicPr>
+          <p:cNvPr id="4106" name="Picture 10" descr="Microsoft Copilot - Wikipedia">
+            <a:extLst>
+              <a:ext uri="{FF2B5EF4-FFF2-40B4-BE49-F238E27FC236}">
+                <a16:creationId xmlns:a16="http://schemas.microsoft.com/office/drawing/2014/main" id="{C2E462CD-4473-665A-2597-82EDFD49A939}"/>
+              </a:ext>
+            </a:extLst>
+          </p:cNvPr>
+          <p:cNvPicPr>
+            <a:picLocks noChangeAspect="1" noChangeArrowheads="1"/>
+          </p:cNvPicPr>
+          <p:nvPr/>
+        </p:nvPicPr>
+        <p:blipFill>
+          <a:blip r:embed="rId5">
+            <a:extLst>
+              <a:ext uri="{28A0092B-C50C-407E-A947-70E740481C1C}">
+                <a14:useLocalDpi xmlns:a14="http://schemas.microsoft.com/office/drawing/2010/main" val="0"/>
+              </a:ext>
+            </a:extLst>
+          </a:blip>
+          <a:srcRect/>
+          <a:stretch>
+            <a:fillRect/>
+          </a:stretch>
+        </p:blipFill>
+        <p:spPr bwMode="auto">
+          <a:xfrm>
+            <a:off x="1175924" y="3961592"/>
+            <a:ext cx="533400" cy="533400"/>
+          </a:xfrm>
+          <a:prstGeom prst="rect">
+            <a:avLst/>
+          </a:prstGeom>
+          <a:noFill/>
+          <a:extLst>
+            <a:ext uri="{909E8E84-426E-40DD-AFC4-6F175D3DCCD1}">
+              <a14:hiddenFill xmlns:a14="http://schemas.microsoft.com/office/drawing/2010/main">
+                <a:solidFill>
+                  <a:srgbClr val="FFFFFF"/>
+                </a:solidFill>
+              </a14:hiddenFill>
+            </a:ext>
+          </a:extLst>
+        </p:spPr>
+      </p:pic>
+      <p:pic>
+        <p:nvPicPr>
+          <p:cNvPr id="4108" name="Picture 12" descr="Canva – AI-Assisted Design &amp; Image ...">
+            <a:extLst>
+              <a:ext uri="{FF2B5EF4-FFF2-40B4-BE49-F238E27FC236}">
+                <a16:creationId xmlns:a16="http://schemas.microsoft.com/office/drawing/2014/main" id="{495CEEC5-E19F-9D3F-9142-8091B4F0014D}"/>
+              </a:ext>
+            </a:extLst>
+          </p:cNvPr>
+          <p:cNvPicPr>
+            <a:picLocks noChangeAspect="1" noChangeArrowheads="1"/>
+          </p:cNvPicPr>
+          <p:nvPr/>
+        </p:nvPicPr>
+        <p:blipFill>
+          <a:blip r:embed="rId6">
+            <a:extLst>
+              <a:ext uri="{28A0092B-C50C-407E-A947-70E740481C1C}">
+                <a14:useLocalDpi xmlns:a14="http://schemas.microsoft.com/office/drawing/2010/main" val="0"/>
+              </a:ext>
+            </a:extLst>
+          </a:blip>
+          <a:srcRect/>
+          <a:stretch>
+            <a:fillRect/>
+          </a:stretch>
+        </p:blipFill>
+        <p:spPr bwMode="auto">
+          <a:xfrm>
+            <a:off x="2665668" y="3977390"/>
+            <a:ext cx="533400" cy="533400"/>
+          </a:xfrm>
+          <a:prstGeom prst="rect">
+            <a:avLst/>
+          </a:prstGeom>
+          <a:noFill/>
+          <a:extLst>
+            <a:ext uri="{909E8E84-426E-40DD-AFC4-6F175D3DCCD1}">
+              <a14:hiddenFill xmlns:a14="http://schemas.microsoft.com/office/drawing/2010/main">
+                <a:solidFill>
+                  <a:srgbClr val="FFFFFF"/>
+                </a:solidFill>
+              </a14:hiddenFill>
+            </a:ext>
+          </a:extLst>
+        </p:spPr>
+      </p:pic>
+      <p:pic>
+        <p:nvPicPr>
+          <p:cNvPr id="4110" name="Picture 14" descr="Adobe Firefly (@AdobeFirefly) / Posts / X">
+            <a:extLst>
+              <a:ext uri="{FF2B5EF4-FFF2-40B4-BE49-F238E27FC236}">
+                <a16:creationId xmlns:a16="http://schemas.microsoft.com/office/drawing/2014/main" id="{D0DEB726-C0C2-C66C-CFBC-6EB2218A5E09}"/>
+              </a:ext>
+            </a:extLst>
+          </p:cNvPr>
+          <p:cNvPicPr>
+            <a:picLocks noChangeAspect="1" noChangeArrowheads="1"/>
+          </p:cNvPicPr>
+          <p:nvPr/>
+        </p:nvPicPr>
+        <p:blipFill>
+          <a:blip r:embed="rId7">
+            <a:extLst>
+              <a:ext uri="{28A0092B-C50C-407E-A947-70E740481C1C}">
+                <a14:useLocalDpi xmlns:a14="http://schemas.microsoft.com/office/drawing/2010/main" val="0"/>
+              </a:ext>
+            </a:extLst>
+          </a:blip>
+          <a:srcRect/>
+          <a:stretch>
+            <a:fillRect/>
+          </a:stretch>
+        </p:blipFill>
+        <p:spPr bwMode="auto">
+          <a:xfrm>
+            <a:off x="1937986" y="3969845"/>
+            <a:ext cx="516850" cy="516850"/>
+          </a:xfrm>
+          <a:prstGeom prst="rect">
+            <a:avLst/>
+          </a:prstGeom>
+          <a:noFill/>
+          <a:extLst>
+            <a:ext uri="{909E8E84-426E-40DD-AFC4-6F175D3DCCD1}">
+              <a14:hiddenFill xmlns:a14="http://schemas.microsoft.com/office/drawing/2010/main">
+                <a:solidFill>
+                  <a:srgbClr val="FFFFFF"/>
+                </a:solidFill>
+              </a14:hiddenFill>
+            </a:ext>
+          </a:extLst>
+        </p:spPr>
+      </p:pic>
+      <p:pic>
+        <p:nvPicPr>
+          <p:cNvPr id="4112" name="Picture 16" descr="Google ImageFX: A Simple Tool for Fast AI Image Design">
+            <a:extLst>
+              <a:ext uri="{FF2B5EF4-FFF2-40B4-BE49-F238E27FC236}">
+                <a16:creationId xmlns:a16="http://schemas.microsoft.com/office/drawing/2014/main" id="{5A3EF6AF-129E-84B0-F3FA-AF2A93A33CA8}"/>
+              </a:ext>
+            </a:extLst>
+          </p:cNvPr>
+          <p:cNvPicPr>
+            <a:picLocks noChangeAspect="1" noChangeArrowheads="1"/>
+          </p:cNvPicPr>
+          <p:nvPr/>
+        </p:nvPicPr>
+        <p:blipFill>
+          <a:blip r:embed="rId8">
+            <a:extLst>
+              <a:ext uri="{28A0092B-C50C-407E-A947-70E740481C1C}">
+                <a14:useLocalDpi xmlns:a14="http://schemas.microsoft.com/office/drawing/2010/main" val="0"/>
+              </a:ext>
+            </a:extLst>
+          </a:blip>
+          <a:srcRect/>
+          <a:stretch>
+            <a:fillRect/>
+          </a:stretch>
+        </p:blipFill>
+        <p:spPr bwMode="auto">
+          <a:xfrm>
+            <a:off x="3288964" y="4016300"/>
+            <a:ext cx="917488" cy="494490"/>
+          </a:xfrm>
+          <a:prstGeom prst="rect">
+            <a:avLst/>
+          </a:prstGeom>
+          <a:noFill/>
+          <a:extLst>
+            <a:ext uri="{909E8E84-426E-40DD-AFC4-6F175D3DCCD1}">
+              <a14:hiddenFill xmlns:a14="http://schemas.microsoft.com/office/drawing/2010/main">
+                <a:solidFill>
+                  <a:srgbClr val="FFFFFF"/>
+                </a:solidFill>
+              </a14:hiddenFill>
+            </a:ext>
+          </a:extLst>
+        </p:spPr>
+      </p:pic>
     </p:spTree>
   </p:cSld>
   <p:clrMapOvr>
@@ -4739,6 +5926,648 @@
 </file>
 
 <file path=ppt/slides/slide14.xml><?xml version="1.0" encoding="utf-8"?>
+<p:sld xmlns:a="http://schemas.openxmlformats.org/drawingml/2006/main" xmlns:r="http://schemas.openxmlformats.org/officeDocument/2006/relationships" xmlns:p="http://schemas.openxmlformats.org/presentationml/2006/main">
+  <p:cSld>
+    <p:bg>
+      <p:bgPr>
+        <a:solidFill>
+          <a:schemeClr val="bg1"/>
+        </a:solidFill>
+        <a:effectLst/>
+      </p:bgPr>
+    </p:bg>
+    <p:spTree>
+      <p:nvGrpSpPr>
+        <p:cNvPr id="1" name=""/>
+        <p:cNvGrpSpPr/>
+        <p:nvPr/>
+      </p:nvGrpSpPr>
+      <p:grpSpPr>
+        <a:xfrm>
+          <a:off x="0" y="0"/>
+          <a:ext cx="0" cy="0"/>
+          <a:chOff x="0" y="0"/>
+          <a:chExt cx="0" cy="0"/>
+        </a:xfrm>
+      </p:grpSpPr>
+      <p:pic>
+        <p:nvPicPr>
+          <p:cNvPr id="15" name="Picture 14">
+            <a:extLst>
+              <a:ext uri="{FF2B5EF4-FFF2-40B4-BE49-F238E27FC236}">
+                <a16:creationId xmlns:a16="http://schemas.microsoft.com/office/drawing/2014/main" id="{EC7BC579-8264-E655-B944-D15831DA3683}"/>
+              </a:ext>
+            </a:extLst>
+          </p:cNvPr>
+          <p:cNvPicPr>
+            <a:picLocks noChangeAspect="1"/>
+          </p:cNvPicPr>
+          <p:nvPr/>
+        </p:nvPicPr>
+        <p:blipFill>
+          <a:blip r:embed="rId2"/>
+          <a:stretch>
+            <a:fillRect/>
+          </a:stretch>
+        </p:blipFill>
+        <p:spPr>
+          <a:xfrm>
+            <a:off x="2482849" y="482599"/>
+            <a:ext cx="4178300" cy="4178300"/>
+          </a:xfrm>
+          <a:prstGeom prst="rect">
+            <a:avLst/>
+          </a:prstGeom>
+        </p:spPr>
+      </p:pic>
+    </p:spTree>
+    <p:extLst>
+      <p:ext uri="{BB962C8B-B14F-4D97-AF65-F5344CB8AC3E}">
+        <p14:creationId xmlns:p14="http://schemas.microsoft.com/office/powerpoint/2010/main" val="3467616428"/>
+      </p:ext>
+    </p:extLst>
+  </p:cSld>
+  <p:clrMapOvr>
+    <a:masterClrMapping/>
+  </p:clrMapOvr>
+</p:sld>
+</file>
+
+<file path=ppt/slides/slide15.xml><?xml version="1.0" encoding="utf-8"?>
+<p:sld xmlns:a="http://schemas.openxmlformats.org/drawingml/2006/main" xmlns:r="http://schemas.openxmlformats.org/officeDocument/2006/relationships" xmlns:p="http://schemas.openxmlformats.org/presentationml/2006/main">
+  <p:cSld>
+    <p:spTree>
+      <p:nvGrpSpPr>
+        <p:cNvPr id="1" name="">
+          <a:extLst>
+            <a:ext uri="{FF2B5EF4-FFF2-40B4-BE49-F238E27FC236}">
+              <a16:creationId xmlns:a16="http://schemas.microsoft.com/office/drawing/2014/main" id="{684940AD-FFB0-0B7E-045B-367A1AC295CA}"/>
+            </a:ext>
+          </a:extLst>
+        </p:cNvPr>
+        <p:cNvGrpSpPr/>
+        <p:nvPr/>
+      </p:nvGrpSpPr>
+      <p:grpSpPr>
+        <a:xfrm>
+          <a:off x="0" y="0"/>
+          <a:ext cx="0" cy="0"/>
+          <a:chOff x="0" y="0"/>
+          <a:chExt cx="0" cy="0"/>
+        </a:xfrm>
+      </p:grpSpPr>
+      <p:sp>
+        <p:nvSpPr>
+          <p:cNvPr id="2" name="Shape 0">
+            <a:extLst>
+              <a:ext uri="{FF2B5EF4-FFF2-40B4-BE49-F238E27FC236}">
+                <a16:creationId xmlns:a16="http://schemas.microsoft.com/office/drawing/2014/main" id="{05C3AEBA-2663-E1F3-3AC8-F164FE32604C}"/>
+              </a:ext>
+            </a:extLst>
+          </p:cNvPr>
+          <p:cNvSpPr/>
+          <p:nvPr/>
+        </p:nvSpPr>
+        <p:spPr>
+          <a:xfrm>
+            <a:off x="0" y="0"/>
+            <a:ext cx="9144000" cy="658368"/>
+          </a:xfrm>
+          <a:prstGeom prst="rect">
+            <a:avLst/>
+          </a:prstGeom>
+          <a:solidFill>
+            <a:srgbClr val="CC0000"/>
+          </a:solidFill>
+          <a:ln w="12700">
+            <a:solidFill>
+              <a:srgbClr val="CC0000"/>
+            </a:solidFill>
+            <a:prstDash val="solid"/>
+          </a:ln>
+        </p:spPr>
+        <p:txBody>
+          <a:bodyPr/>
+          <a:lstStyle/>
+          <a:p>
+            <a:endParaRPr lang="en-US"/>
+          </a:p>
+        </p:txBody>
+      </p:sp>
+      <p:sp>
+        <p:nvSpPr>
+          <p:cNvPr id="3" name="Text 1">
+            <a:extLst>
+              <a:ext uri="{FF2B5EF4-FFF2-40B4-BE49-F238E27FC236}">
+                <a16:creationId xmlns:a16="http://schemas.microsoft.com/office/drawing/2014/main" id="{AAF54C17-38C5-4672-8744-A2BD497903C2}"/>
+              </a:ext>
+            </a:extLst>
+          </p:cNvPr>
+          <p:cNvSpPr/>
+          <p:nvPr/>
+        </p:nvSpPr>
+        <p:spPr>
+          <a:xfrm>
+            <a:off x="320040" y="0"/>
+            <a:ext cx="8503920" cy="658368"/>
+          </a:xfrm>
+          <a:prstGeom prst="rect">
+            <a:avLst/>
+          </a:prstGeom>
+          <a:noFill/>
+          <a:ln/>
+        </p:spPr>
+        <p:txBody>
+          <a:bodyPr wrap="square" lIns="0" tIns="0" rIns="0" bIns="0" rtlCol="0" anchor="ctr"/>
+          <a:lstStyle/>
+          <a:p>
+            <a:pPr marL="0" indent="0">
+              <a:buNone/>
+            </a:pPr>
+            <a:r>
+              <a:rPr lang="en-US" sz="2000" b="1" dirty="0">
+                <a:solidFill>
+                  <a:srgbClr val="FFFFFF"/>
+                </a:solidFill>
+              </a:rPr>
+              <a:t>Generiranje slika: kad AI crta i fotografira</a:t>
+            </a:r>
+            <a:endParaRPr lang="en-US" sz="2000" dirty="0"/>
+          </a:p>
+        </p:txBody>
+      </p:sp>
+      <p:sp>
+        <p:nvSpPr>
+          <p:cNvPr id="4" name="Shape 2">
+            <a:extLst>
+              <a:ext uri="{FF2B5EF4-FFF2-40B4-BE49-F238E27FC236}">
+                <a16:creationId xmlns:a16="http://schemas.microsoft.com/office/drawing/2014/main" id="{489ECB54-EC38-D01F-D027-BD52CC8FB82F}"/>
+              </a:ext>
+            </a:extLst>
+          </p:cNvPr>
+          <p:cNvSpPr/>
+          <p:nvPr/>
+        </p:nvSpPr>
+        <p:spPr>
+          <a:xfrm>
+            <a:off x="274320" y="804672"/>
+            <a:ext cx="4023360" cy="4114800"/>
+          </a:xfrm>
+          <a:prstGeom prst="rect">
+            <a:avLst/>
+          </a:prstGeom>
+          <a:solidFill>
+            <a:srgbClr val="FFFFFF"/>
+          </a:solidFill>
+          <a:ln/>
+          <a:effectLst>
+            <a:outerShdw blurRad="101600" dist="25400" dir="8100000" algn="bl" rotWithShape="0">
+              <a:srgbClr val="000000">
+                <a:alpha val="10000"/>
+              </a:srgbClr>
+            </a:outerShdw>
+          </a:effectLst>
+        </p:spPr>
+        <p:txBody>
+          <a:bodyPr/>
+          <a:lstStyle/>
+          <a:p>
+            <a:endParaRPr lang="en-US"/>
+          </a:p>
+        </p:txBody>
+      </p:sp>
+      <p:sp>
+        <p:nvSpPr>
+          <p:cNvPr id="5" name="Shape 3">
+            <a:extLst>
+              <a:ext uri="{FF2B5EF4-FFF2-40B4-BE49-F238E27FC236}">
+                <a16:creationId xmlns:a16="http://schemas.microsoft.com/office/drawing/2014/main" id="{77D0FAA7-31F2-4F1C-B23D-C7539EEAC18B}"/>
+              </a:ext>
+            </a:extLst>
+          </p:cNvPr>
+          <p:cNvSpPr/>
+          <p:nvPr/>
+        </p:nvSpPr>
+        <p:spPr>
+          <a:xfrm>
+            <a:off x="274320" y="804672"/>
+            <a:ext cx="4023360" cy="384048"/>
+          </a:xfrm>
+          <a:prstGeom prst="rect">
+            <a:avLst/>
+          </a:prstGeom>
+          <a:solidFill>
+            <a:srgbClr val="1A1A1A"/>
+          </a:solidFill>
+          <a:ln w="12700">
+            <a:solidFill>
+              <a:srgbClr val="1A1A1A"/>
+            </a:solidFill>
+            <a:prstDash val="solid"/>
+          </a:ln>
+        </p:spPr>
+        <p:txBody>
+          <a:bodyPr/>
+          <a:lstStyle/>
+          <a:p>
+            <a:endParaRPr lang="en-US"/>
+          </a:p>
+        </p:txBody>
+      </p:sp>
+      <p:sp>
+        <p:nvSpPr>
+          <p:cNvPr id="6" name="Text 4">
+            <a:extLst>
+              <a:ext uri="{FF2B5EF4-FFF2-40B4-BE49-F238E27FC236}">
+                <a16:creationId xmlns:a16="http://schemas.microsoft.com/office/drawing/2014/main" id="{C0E236F9-40C6-D0D3-74A6-52E82F96CC50}"/>
+              </a:ext>
+            </a:extLst>
+          </p:cNvPr>
+          <p:cNvSpPr/>
+          <p:nvPr/>
+        </p:nvSpPr>
+        <p:spPr>
+          <a:xfrm>
+            <a:off x="274320" y="804672"/>
+            <a:ext cx="4023360" cy="384048"/>
+          </a:xfrm>
+          <a:prstGeom prst="rect">
+            <a:avLst/>
+          </a:prstGeom>
+          <a:noFill/>
+          <a:ln/>
+        </p:spPr>
+        <p:txBody>
+          <a:bodyPr wrap="square" lIns="0" tIns="0" rIns="0" bIns="0" rtlCol="0" anchor="ctr"/>
+          <a:lstStyle/>
+          <a:p>
+            <a:pPr marL="0" indent="0" algn="ctr">
+              <a:buNone/>
+            </a:pPr>
+            <a:r>
+              <a:rPr lang="en-US" sz="1300" b="1" dirty="0">
+                <a:solidFill>
+                  <a:srgbClr val="FFFFFF"/>
+                </a:solidFill>
+              </a:rPr>
+              <a:t>Koji alati generiraju slike?</a:t>
+            </a:r>
+            <a:endParaRPr lang="en-US" sz="1300" dirty="0"/>
+          </a:p>
+        </p:txBody>
+      </p:sp>
+      <p:sp>
+        <p:nvSpPr>
+          <p:cNvPr id="7" name="Text 5">
+            <a:extLst>
+              <a:ext uri="{FF2B5EF4-FFF2-40B4-BE49-F238E27FC236}">
+                <a16:creationId xmlns:a16="http://schemas.microsoft.com/office/drawing/2014/main" id="{2957EA67-6FF1-05B6-5A18-D97C65B03292}"/>
+              </a:ext>
+            </a:extLst>
+          </p:cNvPr>
+          <p:cNvSpPr/>
+          <p:nvPr/>
+        </p:nvSpPr>
+        <p:spPr>
+          <a:xfrm>
+            <a:off x="411480" y="1261872"/>
+            <a:ext cx="3749040" cy="3566160"/>
+          </a:xfrm>
+          <a:prstGeom prst="rect">
+            <a:avLst/>
+          </a:prstGeom>
+          <a:noFill/>
+          <a:ln/>
+        </p:spPr>
+        <p:txBody>
+          <a:bodyPr wrap="square" rtlCol="0" anchor="t"/>
+          <a:lstStyle/>
+          <a:p>
+            <a:pPr marL="342900" indent="-342900">
+              <a:spcAft>
+                <a:spcPts val="700"/>
+              </a:spcAft>
+              <a:buSzPct val="100000"/>
+              <a:buChar char="•"/>
+            </a:pPr>
+            <a:r>
+              <a:rPr lang="en-US" sz="1300" dirty="0">
+                <a:solidFill>
+                  <a:srgbClr val="444444"/>
+                </a:solidFill>
+              </a:rPr>
+              <a:t>ChatGPT (besplatno) — DALL-E model, ograničen broj dnevno</a:t>
+            </a:r>
+            <a:endParaRPr lang="en-US" sz="1300" dirty="0"/>
+          </a:p>
+          <a:p>
+            <a:pPr marL="342900" indent="-342900">
+              <a:spcAft>
+                <a:spcPts val="700"/>
+              </a:spcAft>
+              <a:buSzPct val="100000"/>
+              <a:buChar char="•"/>
+            </a:pPr>
+            <a:r>
+              <a:rPr lang="en-US" sz="1300" dirty="0">
+                <a:solidFill>
+                  <a:srgbClr val="444444"/>
+                </a:solidFill>
+              </a:rPr>
+              <a:t>Microsoft Copilot (besplatno!) — DALL-E 3, bez plaćanja</a:t>
+            </a:r>
+            <a:endParaRPr lang="en-US" sz="1300" dirty="0"/>
+          </a:p>
+          <a:p>
+            <a:pPr marL="342900" indent="-342900">
+              <a:spcAft>
+                <a:spcPts val="700"/>
+              </a:spcAft>
+              <a:buSzPct val="100000"/>
+              <a:buChar char="•"/>
+            </a:pPr>
+            <a:r>
+              <a:rPr lang="en-US" sz="1300" dirty="0">
+                <a:solidFill>
+                  <a:srgbClr val="444444"/>
+                </a:solidFill>
+              </a:rPr>
+              <a:t>Canva AI — Text to Image, idealno za čestitke i postere</a:t>
+            </a:r>
+            <a:endParaRPr lang="en-US" sz="1300" dirty="0"/>
+          </a:p>
+          <a:p>
+            <a:pPr marL="342900" indent="-342900">
+              <a:spcAft>
+                <a:spcPts val="700"/>
+              </a:spcAft>
+              <a:buSzPct val="100000"/>
+              <a:buChar char="•"/>
+            </a:pPr>
+            <a:r>
+              <a:rPr lang="en-US" sz="1300" dirty="0">
+                <a:solidFill>
+                  <a:srgbClr val="444444"/>
+                </a:solidFill>
+              </a:rPr>
+              <a:t>Adobe Firefly — firefly.adobe.com, visoka kvaliteta</a:t>
+            </a:r>
+            <a:endParaRPr lang="en-US" sz="1300" dirty="0"/>
+          </a:p>
+          <a:p>
+            <a:pPr marL="342900" indent="-342900">
+              <a:spcAft>
+                <a:spcPts val="700"/>
+              </a:spcAft>
+              <a:buSzPct val="100000"/>
+              <a:buChar char="•"/>
+            </a:pPr>
+            <a:r>
+              <a:rPr lang="en-US" sz="1300" dirty="0">
+                <a:solidFill>
+                  <a:srgbClr val="444444"/>
+                </a:solidFill>
+              </a:rPr>
+              <a:t>Google ImageFX — labs.google/experiments/imagefx</a:t>
+            </a:r>
+            <a:endParaRPr lang="en-US" sz="1300" dirty="0"/>
+          </a:p>
+        </p:txBody>
+      </p:sp>
+      <p:sp>
+        <p:nvSpPr>
+          <p:cNvPr id="8" name="Shape 6">
+            <a:extLst>
+              <a:ext uri="{FF2B5EF4-FFF2-40B4-BE49-F238E27FC236}">
+                <a16:creationId xmlns:a16="http://schemas.microsoft.com/office/drawing/2014/main" id="{44B82E03-3771-F19B-E8CA-6CC66589804C}"/>
+              </a:ext>
+            </a:extLst>
+          </p:cNvPr>
+          <p:cNvSpPr/>
+          <p:nvPr/>
+        </p:nvSpPr>
+        <p:spPr>
+          <a:xfrm>
+            <a:off x="4846320" y="804672"/>
+            <a:ext cx="4023360" cy="4114800"/>
+          </a:xfrm>
+          <a:prstGeom prst="rect">
+            <a:avLst/>
+          </a:prstGeom>
+          <a:solidFill>
+            <a:srgbClr val="FFFFFF"/>
+          </a:solidFill>
+          <a:ln/>
+          <a:effectLst>
+            <a:outerShdw blurRad="101600" dist="25400" dir="8100000" algn="bl" rotWithShape="0">
+              <a:srgbClr val="000000">
+                <a:alpha val="10000"/>
+              </a:srgbClr>
+            </a:outerShdw>
+          </a:effectLst>
+        </p:spPr>
+        <p:txBody>
+          <a:bodyPr/>
+          <a:lstStyle/>
+          <a:p>
+            <a:endParaRPr lang="en-US"/>
+          </a:p>
+        </p:txBody>
+      </p:sp>
+      <p:sp>
+        <p:nvSpPr>
+          <p:cNvPr id="9" name="Shape 7">
+            <a:extLst>
+              <a:ext uri="{FF2B5EF4-FFF2-40B4-BE49-F238E27FC236}">
+                <a16:creationId xmlns:a16="http://schemas.microsoft.com/office/drawing/2014/main" id="{232CF555-2AE1-85AE-FB98-9BC8FDD87C5A}"/>
+              </a:ext>
+            </a:extLst>
+          </p:cNvPr>
+          <p:cNvSpPr/>
+          <p:nvPr/>
+        </p:nvSpPr>
+        <p:spPr>
+          <a:xfrm>
+            <a:off x="4846320" y="804672"/>
+            <a:ext cx="4023360" cy="384048"/>
+          </a:xfrm>
+          <a:prstGeom prst="rect">
+            <a:avLst/>
+          </a:prstGeom>
+          <a:solidFill>
+            <a:srgbClr val="CC0000"/>
+          </a:solidFill>
+          <a:ln w="12700">
+            <a:solidFill>
+              <a:srgbClr val="CC0000"/>
+            </a:solidFill>
+            <a:prstDash val="solid"/>
+          </a:ln>
+        </p:spPr>
+        <p:txBody>
+          <a:bodyPr/>
+          <a:lstStyle/>
+          <a:p>
+            <a:endParaRPr lang="en-US"/>
+          </a:p>
+        </p:txBody>
+      </p:sp>
+      <p:sp>
+        <p:nvSpPr>
+          <p:cNvPr id="10" name="Text 8">
+            <a:extLst>
+              <a:ext uri="{FF2B5EF4-FFF2-40B4-BE49-F238E27FC236}">
+                <a16:creationId xmlns:a16="http://schemas.microsoft.com/office/drawing/2014/main" id="{A3DDC4E6-124F-E83A-AC48-874B60D74F8E}"/>
+              </a:ext>
+            </a:extLst>
+          </p:cNvPr>
+          <p:cNvSpPr/>
+          <p:nvPr/>
+        </p:nvSpPr>
+        <p:spPr>
+          <a:xfrm>
+            <a:off x="4846320" y="804672"/>
+            <a:ext cx="4023360" cy="384048"/>
+          </a:xfrm>
+          <a:prstGeom prst="rect">
+            <a:avLst/>
+          </a:prstGeom>
+          <a:noFill/>
+          <a:ln/>
+        </p:spPr>
+        <p:txBody>
+          <a:bodyPr wrap="square" lIns="0" tIns="0" rIns="0" bIns="0" rtlCol="0" anchor="ctr"/>
+          <a:lstStyle/>
+          <a:p>
+            <a:pPr marL="0" indent="0" algn="ctr">
+              <a:buNone/>
+            </a:pPr>
+            <a:r>
+              <a:rPr lang="en-US" sz="1300" b="1" dirty="0">
+                <a:solidFill>
+                  <a:srgbClr val="FFFFFF"/>
+                </a:solidFill>
+              </a:rPr>
+              <a:t>Formula za dobru sliku</a:t>
+            </a:r>
+            <a:endParaRPr lang="en-US" sz="1300" dirty="0"/>
+          </a:p>
+        </p:txBody>
+      </p:sp>
+      <p:sp>
+        <p:nvSpPr>
+          <p:cNvPr id="11" name="Text 9">
+            <a:extLst>
+              <a:ext uri="{FF2B5EF4-FFF2-40B4-BE49-F238E27FC236}">
+                <a16:creationId xmlns:a16="http://schemas.microsoft.com/office/drawing/2014/main" id="{043B551B-B533-0C62-7898-658717137C84}"/>
+              </a:ext>
+            </a:extLst>
+          </p:cNvPr>
+          <p:cNvSpPr/>
+          <p:nvPr/>
+        </p:nvSpPr>
+        <p:spPr>
+          <a:xfrm>
+            <a:off x="4983480" y="1261872"/>
+            <a:ext cx="3749040" cy="3566160"/>
+          </a:xfrm>
+          <a:prstGeom prst="rect">
+            <a:avLst/>
+          </a:prstGeom>
+          <a:noFill/>
+          <a:ln/>
+        </p:spPr>
+        <p:txBody>
+          <a:bodyPr wrap="square" rtlCol="0" anchor="t"/>
+          <a:lstStyle/>
+          <a:p>
+            <a:pPr marL="342900" indent="-342900">
+              <a:spcAft>
+                <a:spcPts val="800"/>
+              </a:spcAft>
+              <a:buSzPct val="100000"/>
+              <a:buChar char="•"/>
+            </a:pPr>
+            <a:r>
+              <a:rPr lang="en-US" sz="1300" dirty="0">
+                <a:solidFill>
+                  <a:srgbClr val="444444"/>
+                </a:solidFill>
+              </a:rPr>
+              <a:t>FORMULA: [Što prikazuje] + [Stil] + [Boje] + [Raspoloženje]</a:t>
+            </a:r>
+            <a:endParaRPr lang="en-US" sz="1300" dirty="0"/>
+          </a:p>
+          <a:p>
+            <a:pPr marL="342900" indent="-342900">
+              <a:spcAft>
+                <a:spcPts val="800"/>
+              </a:spcAft>
+              <a:buSzPct val="100000"/>
+              <a:buChar char="•"/>
+            </a:pPr>
+            <a:r>
+              <a:rPr lang="en-US" sz="1300" dirty="0">
+                <a:solidFill>
+                  <a:srgbClr val="444444"/>
+                </a:solidFill>
+              </a:rPr>
+              <a:t>❌ Loše: 'Stara žena na moru'</a:t>
+            </a:r>
+            <a:endParaRPr lang="en-US" sz="1300" dirty="0"/>
+          </a:p>
+          <a:p>
+            <a:pPr marL="342900" indent="-342900">
+              <a:spcAft>
+                <a:spcPts val="800"/>
+              </a:spcAft>
+              <a:buSzPct val="100000"/>
+              <a:buChar char="•"/>
+            </a:pPr>
+            <a:r>
+              <a:rPr lang="en-US" sz="1300" dirty="0">
+                <a:solidFill>
+                  <a:srgbClr val="444444"/>
+                </a:solidFill>
+              </a:rPr>
+              <a:t>✓ Dobro: 'Elegantna starica u bijeloj haljini na kamenom zidu kraj mora u Dalmaciji, zalazak sunca, realistično, mirno raspoloženje'</a:t>
+            </a:r>
+            <a:endParaRPr lang="en-US" sz="1300" dirty="0"/>
+          </a:p>
+          <a:p>
+            <a:pPr marL="342900" indent="-342900">
+              <a:spcAft>
+                <a:spcPts val="800"/>
+              </a:spcAft>
+              <a:buSzPct val="100000"/>
+              <a:buChar char="•"/>
+            </a:pPr>
+            <a:r>
+              <a:rPr lang="en-US" sz="1300" dirty="0">
+                <a:solidFill>
+                  <a:srgbClr val="444444"/>
+                </a:solidFill>
+              </a:rPr>
+              <a:t>Primjena: čestitke, pozivnice, Facebook objave, slike za ispis!</a:t>
+            </a:r>
+            <a:endParaRPr lang="en-US" sz="1300" dirty="0"/>
+          </a:p>
+        </p:txBody>
+      </p:sp>
+    </p:spTree>
+    <p:extLst>
+      <p:ext uri="{BB962C8B-B14F-4D97-AF65-F5344CB8AC3E}">
+        <p14:creationId xmlns:p14="http://schemas.microsoft.com/office/powerpoint/2010/main" val="2934224081"/>
+      </p:ext>
+    </p:extLst>
+  </p:cSld>
+  <p:clrMapOvr>
+    <a:masterClrMapping/>
+  </p:clrMapOvr>
+</p:sld>
+</file>
+
+<file path=ppt/slides/slide16.xml><?xml version="1.0" encoding="utf-8"?>
 <p:sld xmlns:a="http://schemas.openxmlformats.org/drawingml/2006/main" xmlns:r="http://schemas.openxmlformats.org/officeDocument/2006/relationships" xmlns:p="http://schemas.openxmlformats.org/presentationml/2006/main">
   <p:cSld name="Slide 10">
     <p:bg>
@@ -5615,7 +7444,7 @@
 </p:sld>
 </file>
 
-<file path=ppt/slides/slide15.xml><?xml version="1.0" encoding="utf-8"?>
+<file path=ppt/slides/slide17.xml><?xml version="1.0" encoding="utf-8"?>
 <p:sld xmlns:a="http://schemas.openxmlformats.org/drawingml/2006/main" xmlns:r="http://schemas.openxmlformats.org/officeDocument/2006/relationships" xmlns:p="http://schemas.openxmlformats.org/presentationml/2006/main">
   <p:cSld name="Slide 11">
     <p:bg>
@@ -6532,7 +8361,7 @@
 </p:sld>
 </file>
 
-<file path=ppt/slides/slide16.xml><?xml version="1.0" encoding="utf-8"?>
+<file path=ppt/slides/slide18.xml><?xml version="1.0" encoding="utf-8"?>
 <p:sld xmlns:a="http://schemas.openxmlformats.org/drawingml/2006/main" xmlns:r="http://schemas.openxmlformats.org/officeDocument/2006/relationships" xmlns:p="http://schemas.openxmlformats.org/presentationml/2006/main">
   <p:cSld name="Slide 12">
     <p:bg>
@@ -7071,6 +8900,36 @@
           </a:p>
         </p:txBody>
       </p:sp>
+      <p:pic>
+        <p:nvPicPr>
+          <p:cNvPr id="21" name="Picture 20">
+            <a:extLst>
+              <a:ext uri="{FF2B5EF4-FFF2-40B4-BE49-F238E27FC236}">
+                <a16:creationId xmlns:a16="http://schemas.microsoft.com/office/drawing/2014/main" id="{54E4A3F0-C490-81C4-F2DC-83C74C768796}"/>
+              </a:ext>
+            </a:extLst>
+          </p:cNvPr>
+          <p:cNvPicPr>
+            <a:picLocks noChangeAspect="1"/>
+          </p:cNvPicPr>
+          <p:nvPr/>
+        </p:nvPicPr>
+        <p:blipFill>
+          <a:blip r:embed="rId3"/>
+          <a:stretch>
+            <a:fillRect/>
+          </a:stretch>
+        </p:blipFill>
+        <p:spPr>
+          <a:xfrm>
+            <a:off x="3264404" y="4018401"/>
+            <a:ext cx="757954" cy="640854"/>
+          </a:xfrm>
+          <a:prstGeom prst="rect">
+            <a:avLst/>
+          </a:prstGeom>
+        </p:spPr>
+      </p:pic>
     </p:spTree>
   </p:cSld>
   <p:clrMapOvr>
@@ -7079,7 +8938,7 @@
 </p:sld>
 </file>
 
-<file path=ppt/slides/slide17.xml><?xml version="1.0" encoding="utf-8"?>
+<file path=ppt/slides/slide19.xml><?xml version="1.0" encoding="utf-8"?>
 <p:sld xmlns:a="http://schemas.openxmlformats.org/drawingml/2006/main" xmlns:r="http://schemas.openxmlformats.org/officeDocument/2006/relationships" xmlns:p="http://schemas.openxmlformats.org/presentationml/2006/main">
   <p:cSld name="Slide 13">
     <p:bg>
@@ -7188,7 +9047,7 @@
         </p:nvGraphicFramePr>
         <p:xfrm>
           <a:off x="274320" y="804672"/>
-          <a:ext cx="8595360" cy="914400"/>
+          <a:ext cx="8595360" cy="3840480"/>
         </p:xfrm>
         <a:graphic>
           <a:graphicData uri="http://schemas.openxmlformats.org/drawingml/2006/table">
@@ -8559,618 +10418,6 @@
 </p:sld>
 </file>
 
-<file path=ppt/slides/slide18.xml><?xml version="1.0" encoding="utf-8"?>
-<p:sld xmlns:a="http://schemas.openxmlformats.org/drawingml/2006/main" xmlns:r="http://schemas.openxmlformats.org/officeDocument/2006/relationships" xmlns:p="http://schemas.openxmlformats.org/presentationml/2006/main">
-  <p:cSld name="Slide 14">
-    <p:bg>
-      <p:bgPr>
-        <a:solidFill>
-          <a:srgbClr val="F5F5F5"/>
-        </a:solidFill>
-        <a:effectLst/>
-      </p:bgPr>
-    </p:bg>
-    <p:spTree>
-      <p:nvGrpSpPr>
-        <p:cNvPr id="1" name=""/>
-        <p:cNvGrpSpPr/>
-        <p:nvPr/>
-      </p:nvGrpSpPr>
-      <p:grpSpPr>
-        <a:xfrm>
-          <a:off x="0" y="0"/>
-          <a:ext cx="0" cy="0"/>
-          <a:chOff x="0" y="0"/>
-          <a:chExt cx="0" cy="0"/>
-        </a:xfrm>
-      </p:grpSpPr>
-      <p:sp>
-        <p:nvSpPr>
-          <p:cNvPr id="2" name="Shape 0"/>
-          <p:cNvSpPr/>
-          <p:nvPr/>
-        </p:nvSpPr>
-        <p:spPr>
-          <a:xfrm>
-            <a:off x="0" y="0"/>
-            <a:ext cx="9144000" cy="658368"/>
-          </a:xfrm>
-          <a:prstGeom prst="rect">
-            <a:avLst/>
-          </a:prstGeom>
-          <a:solidFill>
-            <a:srgbClr val="CC0000"/>
-          </a:solidFill>
-          <a:ln w="12700">
-            <a:solidFill>
-              <a:srgbClr val="CC0000"/>
-            </a:solidFill>
-            <a:prstDash val="solid"/>
-          </a:ln>
-        </p:spPr>
-        <p:txBody>
-          <a:bodyPr/>
-          <a:lstStyle/>
-          <a:p>
-            <a:endParaRPr lang="en-US"/>
-          </a:p>
-        </p:txBody>
-      </p:sp>
-      <p:sp>
-        <p:nvSpPr>
-          <p:cNvPr id="3" name="Text 1"/>
-          <p:cNvSpPr/>
-          <p:nvPr/>
-        </p:nvSpPr>
-        <p:spPr>
-          <a:xfrm>
-            <a:off x="320040" y="0"/>
-            <a:ext cx="8503920" cy="658368"/>
-          </a:xfrm>
-          <a:prstGeom prst="rect">
-            <a:avLst/>
-          </a:prstGeom>
-          <a:noFill/>
-          <a:ln/>
-        </p:spPr>
-        <p:txBody>
-          <a:bodyPr wrap="square" lIns="0" tIns="0" rIns="0" bIns="0" rtlCol="0" anchor="ctr"/>
-          <a:lstStyle/>
-          <a:p>
-            <a:pPr marL="0" indent="0">
-              <a:buNone/>
-            </a:pPr>
-            <a:r>
-              <a:rPr lang="en-US" sz="2000" b="1" dirty="0">
-                <a:solidFill>
-                  <a:srgbClr val="FFFFFF"/>
-                </a:solidFill>
-              </a:rPr>
-              <a:t>Moj prvi tjedan s AI alatima — Checklista</a:t>
-            </a:r>
-            <a:endParaRPr lang="en-US" sz="2000" dirty="0"/>
-          </a:p>
-        </p:txBody>
-      </p:sp>
-      <p:sp>
-        <p:nvSpPr>
-          <p:cNvPr id="4" name="Text 2"/>
-          <p:cNvSpPr/>
-          <p:nvPr/>
-        </p:nvSpPr>
-        <p:spPr>
-          <a:xfrm>
-            <a:off x="411480" y="804672"/>
-            <a:ext cx="8321040" cy="4114800"/>
-          </a:xfrm>
-          <a:prstGeom prst="rect">
-            <a:avLst/>
-          </a:prstGeom>
-          <a:noFill/>
-          <a:ln/>
-        </p:spPr>
-        <p:txBody>
-          <a:bodyPr wrap="square" rtlCol="0" anchor="t"/>
-          <a:lstStyle/>
-          <a:p>
-            <a:pPr marL="342900" indent="-342900">
-              <a:spcAft>
-                <a:spcPts val="900"/>
-              </a:spcAft>
-              <a:buSzPct val="100000"/>
-              <a:buChar char="•"/>
-            </a:pPr>
-            <a:r>
-              <a:rPr lang="en-US" sz="1600" dirty="0">
-                <a:solidFill>
-                  <a:srgbClr val="444444"/>
-                </a:solidFill>
-              </a:rPr>
-              <a:t>☐  Kreirao/la sam besplatan ChatGPT račun na chatgpt.com</a:t>
-            </a:r>
-            <a:endParaRPr lang="en-US" sz="1600" dirty="0"/>
-          </a:p>
-          <a:p>
-            <a:pPr marL="342900" indent="-342900">
-              <a:spcAft>
-                <a:spcPts val="900"/>
-              </a:spcAft>
-              <a:buSzPct val="100000"/>
-              <a:buChar char="•"/>
-            </a:pPr>
-            <a:r>
-              <a:rPr lang="en-US" sz="1600" dirty="0">
-                <a:solidFill>
-                  <a:srgbClr val="444444"/>
-                </a:solidFill>
-              </a:rPr>
-              <a:t>☐  Instalirao/la sam ChatGPT ili Gemini aplikaciju na mobitel</a:t>
-            </a:r>
-            <a:endParaRPr lang="en-US" sz="1600" dirty="0"/>
-          </a:p>
-          <a:p>
-            <a:pPr marL="342900" indent="-342900">
-              <a:spcAft>
-                <a:spcPts val="900"/>
-              </a:spcAft>
-              <a:buSzPct val="100000"/>
-              <a:buChar char="•"/>
-            </a:pPr>
-            <a:r>
-              <a:rPr lang="en-US" sz="1600" dirty="0">
-                <a:solidFill>
-                  <a:srgbClr val="444444"/>
-                </a:solidFill>
-              </a:rPr>
-              <a:t>☐  Poslao/la sam prvi prompt ChatGPT-u i dobio/la odgovor</a:t>
-            </a:r>
-            <a:endParaRPr lang="en-US" sz="1600" dirty="0"/>
-          </a:p>
-          <a:p>
-            <a:pPr marL="342900" indent="-342900">
-              <a:spcAft>
-                <a:spcPts val="900"/>
-              </a:spcAft>
-              <a:buSzPct val="100000"/>
-              <a:buChar char="•"/>
-            </a:pPr>
-            <a:r>
-              <a:rPr lang="en-US" sz="1600" dirty="0">
-                <a:solidFill>
-                  <a:srgbClr val="444444"/>
-                </a:solidFill>
-              </a:rPr>
-              <a:t>☐  Isprobao/la sam glasovni unos (mikrofon u aplikaciji)</a:t>
-            </a:r>
-            <a:endParaRPr lang="en-US" sz="1600" dirty="0"/>
-          </a:p>
-          <a:p>
-            <a:pPr marL="342900" indent="-342900">
-              <a:spcAft>
-                <a:spcPts val="900"/>
-              </a:spcAft>
-              <a:buSzPct val="100000"/>
-              <a:buChar char="•"/>
-            </a:pPr>
-            <a:r>
-              <a:rPr lang="en-US" sz="1600" dirty="0">
-                <a:solidFill>
-                  <a:srgbClr val="444444"/>
-                </a:solidFill>
-              </a:rPr>
-              <a:t>☐  Učitao/la fotografiju u ChatGPT i postavio/la pitanje o njoj</a:t>
-            </a:r>
-            <a:endParaRPr lang="en-US" sz="1600" dirty="0"/>
-          </a:p>
-          <a:p>
-            <a:pPr marL="342900" indent="-342900">
-              <a:spcAft>
-                <a:spcPts val="900"/>
-              </a:spcAft>
-              <a:buSzPct val="100000"/>
-              <a:buChar char="•"/>
-            </a:pPr>
-            <a:r>
-              <a:rPr lang="en-US" sz="1600" dirty="0">
-                <a:solidFill>
-                  <a:srgbClr val="444444"/>
-                </a:solidFill>
-              </a:rPr>
-              <a:t>☐  Otvorio/la Canva.com i pregledao/la predloške čestitaka</a:t>
-            </a:r>
-            <a:endParaRPr lang="en-US" sz="1600" dirty="0"/>
-          </a:p>
-          <a:p>
-            <a:pPr marL="342900" indent="-342900">
-              <a:spcAft>
-                <a:spcPts val="900"/>
-              </a:spcAft>
-              <a:buSzPct val="100000"/>
-              <a:buChar char="•"/>
-            </a:pPr>
-            <a:r>
-              <a:rPr lang="en-US" sz="1600" dirty="0">
-                <a:solidFill>
-                  <a:srgbClr val="444444"/>
-                </a:solidFill>
-              </a:rPr>
-              <a:t>☐  Isprobao/la generiranje slike u Copilot-u ili ChatGPT-u</a:t>
-            </a:r>
-            <a:endParaRPr lang="en-US" sz="1600" dirty="0"/>
-          </a:p>
-          <a:p>
-            <a:pPr marL="342900" indent="-342900">
-              <a:spcAft>
-                <a:spcPts val="900"/>
-              </a:spcAft>
-              <a:buSzPct val="100000"/>
-              <a:buChar char="•"/>
-            </a:pPr>
-            <a:r>
-              <a:rPr lang="en-US" sz="1600" dirty="0">
-                <a:solidFill>
-                  <a:srgbClr val="444444"/>
-                </a:solidFill>
-              </a:rPr>
-              <a:t>☐  Osjetljive podatke (PIN, OIB, lozinka) NIKAD ne unosim u AI</a:t>
-            </a:r>
-            <a:endParaRPr lang="en-US" sz="1600" dirty="0"/>
-          </a:p>
-        </p:txBody>
-      </p:sp>
-    </p:spTree>
-  </p:cSld>
-  <p:clrMapOvr>
-    <a:masterClrMapping/>
-  </p:clrMapOvr>
-</p:sld>
-</file>
-
-<file path=ppt/slides/slide19.xml><?xml version="1.0" encoding="utf-8"?>
-<p:sld xmlns:a="http://schemas.openxmlformats.org/drawingml/2006/main" xmlns:r="http://schemas.openxmlformats.org/officeDocument/2006/relationships" xmlns:p="http://schemas.openxmlformats.org/presentationml/2006/main">
-  <p:cSld name="Slide 15">
-    <p:bg>
-      <p:bgPr>
-        <a:solidFill>
-          <a:srgbClr val="1A1A1A"/>
-        </a:solidFill>
-        <a:effectLst/>
-      </p:bgPr>
-    </p:bg>
-    <p:spTree>
-      <p:nvGrpSpPr>
-        <p:cNvPr id="1" name=""/>
-        <p:cNvGrpSpPr/>
-        <p:nvPr/>
-      </p:nvGrpSpPr>
-      <p:grpSpPr>
-        <a:xfrm>
-          <a:off x="0" y="0"/>
-          <a:ext cx="0" cy="0"/>
-          <a:chOff x="0" y="0"/>
-          <a:chExt cx="0" cy="0"/>
-        </a:xfrm>
-      </p:grpSpPr>
-      <p:sp>
-        <p:nvSpPr>
-          <p:cNvPr id="2" name="Shape 0"/>
-          <p:cNvSpPr/>
-          <p:nvPr/>
-        </p:nvSpPr>
-        <p:spPr>
-          <a:xfrm>
-            <a:off x="0" y="0"/>
-            <a:ext cx="146304" cy="5143500"/>
-          </a:xfrm>
-          <a:prstGeom prst="rect">
-            <a:avLst/>
-          </a:prstGeom>
-          <a:solidFill>
-            <a:srgbClr val="CC0000"/>
-          </a:solidFill>
-          <a:ln w="12700">
-            <a:solidFill>
-              <a:srgbClr val="CC0000"/>
-            </a:solidFill>
-            <a:prstDash val="solid"/>
-          </a:ln>
-        </p:spPr>
-        <p:txBody>
-          <a:bodyPr/>
-          <a:lstStyle/>
-          <a:p>
-            <a:endParaRPr lang="en-US"/>
-          </a:p>
-        </p:txBody>
-      </p:sp>
-      <p:sp>
-        <p:nvSpPr>
-          <p:cNvPr id="3" name="Text 1"/>
-          <p:cNvSpPr/>
-          <p:nvPr/>
-        </p:nvSpPr>
-        <p:spPr>
-          <a:xfrm>
-            <a:off x="457200" y="411480"/>
-            <a:ext cx="8229600" cy="594360"/>
-          </a:xfrm>
-          <a:prstGeom prst="rect">
-            <a:avLst/>
-          </a:prstGeom>
-          <a:noFill/>
-          <a:ln/>
-        </p:spPr>
-        <p:txBody>
-          <a:bodyPr wrap="square" rtlCol="0" anchor="ctr"/>
-          <a:lstStyle/>
-          <a:p>
-            <a:pPr marL="0" indent="0">
-              <a:buNone/>
-            </a:pPr>
-            <a:r>
-              <a:rPr lang="en-US" sz="2800" b="1" dirty="0">
-                <a:solidFill>
-                  <a:srgbClr val="CC0000"/>
-                </a:solidFill>
-              </a:rPr>
-              <a:t>Zaključak</a:t>
-            </a:r>
-            <a:endParaRPr lang="en-US" sz="2800" dirty="0"/>
-          </a:p>
-        </p:txBody>
-      </p:sp>
-      <p:sp>
-        <p:nvSpPr>
-          <p:cNvPr id="4" name="Text 2"/>
-          <p:cNvSpPr/>
-          <p:nvPr/>
-        </p:nvSpPr>
-        <p:spPr>
-          <a:xfrm>
-            <a:off x="457200" y="1170432"/>
-            <a:ext cx="6583680" cy="3200400"/>
-          </a:xfrm>
-          <a:prstGeom prst="rect">
-            <a:avLst/>
-          </a:prstGeom>
-          <a:noFill/>
-          <a:ln/>
-        </p:spPr>
-        <p:txBody>
-          <a:bodyPr wrap="square" rtlCol="0" anchor="t"/>
-          <a:lstStyle/>
-          <a:p>
-            <a:pPr marL="342900" indent="-342900">
-              <a:spcAft>
-                <a:spcPts val="1000"/>
-              </a:spcAft>
-              <a:buSzPct val="100000"/>
-              <a:buChar char="•"/>
-            </a:pPr>
-            <a:r>
-              <a:rPr lang="en-US" sz="1500" dirty="0">
-                <a:solidFill>
-                  <a:srgbClr val="DDDDDD"/>
-                </a:solidFill>
-              </a:rPr>
-              <a:t>AI nije opasan ni zastrašujuć — to je alat poput mobitela. Uči se upotrebom.</a:t>
-            </a:r>
-            <a:endParaRPr lang="en-US" sz="1500" dirty="0"/>
-          </a:p>
-          <a:p>
-            <a:pPr marL="342900" indent="-342900">
-              <a:spcAft>
-                <a:spcPts val="1000"/>
-              </a:spcAft>
-              <a:buSzPct val="100000"/>
-              <a:buChar char="•"/>
-            </a:pPr>
-            <a:r>
-              <a:rPr lang="en-US" sz="1500" dirty="0">
-                <a:solidFill>
-                  <a:srgbClr val="DDDDDD"/>
-                </a:solidFill>
-              </a:rPr>
-              <a:t>Besplatno je dovoljno: ChatGPT, Gemini, Copilot i Canva zadovoljavaju 90% potreba.</a:t>
-            </a:r>
-            <a:endParaRPr lang="en-US" sz="1500" dirty="0"/>
-          </a:p>
-          <a:p>
-            <a:pPr marL="342900" indent="-342900">
-              <a:spcAft>
-                <a:spcPts val="1000"/>
-              </a:spcAft>
-              <a:buSzPct val="100000"/>
-              <a:buChar char="•"/>
-            </a:pPr>
-            <a:r>
-              <a:rPr lang="en-US" sz="1500" dirty="0">
-                <a:solidFill>
-                  <a:srgbClr val="DDDDDD"/>
-                </a:solidFill>
-              </a:rPr>
-              <a:t>AI griješi — provjera informacija ostaje naša odgovornost.</a:t>
-            </a:r>
-            <a:endParaRPr lang="en-US" sz="1500" dirty="0"/>
-          </a:p>
-          <a:p>
-            <a:pPr marL="342900" indent="-342900">
-              <a:spcAft>
-                <a:spcPts val="1000"/>
-              </a:spcAft>
-              <a:buSzPct val="100000"/>
-              <a:buChar char="•"/>
-            </a:pPr>
-            <a:r>
-              <a:rPr lang="en-US" sz="1500" dirty="0">
-                <a:solidFill>
-                  <a:srgbClr val="DDDDDD"/>
-                </a:solidFill>
-              </a:rPr>
-              <a:t>Osobni podaci = tabu: PIN, OIB, lozinka, broj kartice nikad ne idu u chatbot.</a:t>
-            </a:r>
-            <a:endParaRPr lang="en-US" sz="1500" dirty="0"/>
-          </a:p>
-          <a:p>
-            <a:pPr marL="342900" indent="-342900">
-              <a:spcAft>
-                <a:spcPts val="1000"/>
-              </a:spcAft>
-              <a:buSzPct val="100000"/>
-              <a:buChar char="•"/>
-            </a:pPr>
-            <a:r>
-              <a:rPr lang="en-US" sz="1500" dirty="0">
-                <a:solidFill>
-                  <a:srgbClr val="DDDDDD"/>
-                </a:solidFill>
-              </a:rPr>
-              <a:t>Počnite malo — jedan prompt dnevno je dovoljan start. Za tjedan dana imat ćete naviku.</a:t>
-            </a:r>
-            <a:endParaRPr lang="en-US" sz="1500" dirty="0"/>
-          </a:p>
-        </p:txBody>
-      </p:sp>
-      <p:sp>
-        <p:nvSpPr>
-          <p:cNvPr id="5" name="Text 3"/>
-          <p:cNvSpPr/>
-          <p:nvPr/>
-        </p:nvSpPr>
-        <p:spPr>
-          <a:xfrm>
-            <a:off x="457200" y="4407408"/>
-            <a:ext cx="6400800" cy="411480"/>
-          </a:xfrm>
-          <a:prstGeom prst="rect">
-            <a:avLst/>
-          </a:prstGeom>
-          <a:noFill/>
-          <a:ln/>
-        </p:spPr>
-        <p:txBody>
-          <a:bodyPr wrap="square" rtlCol="0" anchor="ctr"/>
-          <a:lstStyle/>
-          <a:p>
-            <a:pPr marL="0" indent="0">
-              <a:buNone/>
-            </a:pPr>
-            <a:r>
-              <a:rPr lang="en-US" sz="1300" i="1" dirty="0">
-                <a:solidFill>
-                  <a:srgbClr val="888888"/>
-                </a:solidFill>
-              </a:rPr>
-              <a:t>AI je alat. Vi ste mozak koji ga koristi.</a:t>
-            </a:r>
-            <a:endParaRPr lang="en-US" sz="1300" dirty="0"/>
-          </a:p>
-        </p:txBody>
-      </p:sp>
-      <p:sp>
-        <p:nvSpPr>
-          <p:cNvPr id="6" name="Text 4"/>
-          <p:cNvSpPr/>
-          <p:nvPr/>
-        </p:nvSpPr>
-        <p:spPr>
-          <a:xfrm>
-            <a:off x="457200" y="4782312"/>
-            <a:ext cx="8229600" cy="274320"/>
-          </a:xfrm>
-          <a:prstGeom prst="rect">
-            <a:avLst/>
-          </a:prstGeom>
-          <a:noFill/>
-          <a:ln/>
-        </p:spPr>
-        <p:txBody>
-          <a:bodyPr wrap="square" rtlCol="0" anchor="ctr"/>
-          <a:lstStyle/>
-          <a:p>
-            <a:pPr marL="0" indent="0">
-              <a:buNone/>
-            </a:pPr>
-            <a:r>
-              <a:rPr lang="en-US" sz="900" dirty="0">
-                <a:solidFill>
-                  <a:srgbClr val="666666"/>
-                </a:solidFill>
-              </a:rPr>
-              <a:t>chatgpt.com  ·  gemini.google.com  ·  canva.com  ·  perplexity.ai  ·  notebooklm.google.com</a:t>
-            </a:r>
-            <a:endParaRPr lang="en-US" sz="900" dirty="0"/>
-          </a:p>
-        </p:txBody>
-      </p:sp>
-      <p:pic>
-        <p:nvPicPr>
-          <p:cNvPr id="7" name="Image 0" descr="preencoded.png"/>
-          <p:cNvPicPr>
-            <a:picLocks noChangeAspect="1"/>
-          </p:cNvPicPr>
-          <p:nvPr/>
-        </p:nvPicPr>
-        <p:blipFill>
-          <a:blip r:embed="rId3"/>
-          <a:stretch>
-            <a:fillRect/>
-          </a:stretch>
-        </p:blipFill>
-        <p:spPr>
-          <a:xfrm>
-            <a:off x="7132320" y="685800"/>
-            <a:ext cx="1828800" cy="1828800"/>
-          </a:xfrm>
-          <a:prstGeom prst="rect">
-            <a:avLst/>
-          </a:prstGeom>
-        </p:spPr>
-      </p:pic>
-      <p:sp>
-        <p:nvSpPr>
-          <p:cNvPr id="8" name="Text 5"/>
-          <p:cNvSpPr/>
-          <p:nvPr/>
-        </p:nvSpPr>
-        <p:spPr>
-          <a:xfrm>
-            <a:off x="6766560" y="2697480"/>
-            <a:ext cx="2194560" cy="822960"/>
-          </a:xfrm>
-          <a:prstGeom prst="rect">
-            <a:avLst/>
-          </a:prstGeom>
-          <a:noFill/>
-          <a:ln/>
-        </p:spPr>
-        <p:txBody>
-          <a:bodyPr wrap="square" rtlCol="0" anchor="ctr"/>
-          <a:lstStyle/>
-          <a:p>
-            <a:pPr marL="0" indent="0" algn="ctr">
-              <a:buNone/>
-            </a:pPr>
-            <a:r>
-              <a:rPr lang="en-US" sz="2800" b="1" dirty="0">
-                <a:solidFill>
-                  <a:srgbClr val="FFFFFF"/>
-                </a:solidFill>
-              </a:rPr>
-              <a:t>Pitanja?</a:t>
-            </a:r>
-            <a:endParaRPr lang="en-US" sz="2800" dirty="0"/>
-          </a:p>
-        </p:txBody>
-      </p:sp>
-    </p:spTree>
-  </p:cSld>
-  <p:clrMapOvr>
-    <a:masterClrMapping/>
-  </p:clrMapOvr>
-</p:sld>
-</file>
-
 <file path=ppt/slides/slide2.xml><?xml version="1.0" encoding="utf-8"?>
 <p:sld xmlns:a="http://schemas.openxmlformats.org/drawingml/2006/main" xmlns:r="http://schemas.openxmlformats.org/officeDocument/2006/relationships" xmlns:p="http://schemas.openxmlformats.org/presentationml/2006/main">
   <p:cSld name="Slide 2">
@@ -9474,9 +10721,17 @@
 </p:sld>
 </file>
 
-<file path=ppt/slides/slide3.xml><?xml version="1.0" encoding="utf-8"?>
+<file path=ppt/slides/slide20.xml><?xml version="1.0" encoding="utf-8"?>
 <p:sld xmlns:a="http://schemas.openxmlformats.org/drawingml/2006/main" xmlns:r="http://schemas.openxmlformats.org/officeDocument/2006/relationships" xmlns:p="http://schemas.openxmlformats.org/presentationml/2006/main">
-  <p:cSld>
+  <p:cSld name="Slide 14">
+    <p:bg>
+      <p:bgPr>
+        <a:solidFill>
+          <a:srgbClr val="F5F5F5"/>
+        </a:solidFill>
+        <a:effectLst/>
+      </p:bgPr>
+    </p:bg>
     <p:spTree>
       <p:nvGrpSpPr>
         <p:cNvPr id="1" name=""/>
@@ -9491,42 +10746,241 @@
           <a:chExt cx="0" cy="0"/>
         </a:xfrm>
       </p:grpSpPr>
-      <p:pic>
-        <p:nvPicPr>
-          <p:cNvPr id="5" name="Picture 4">
-            <a:extLst>
-              <a:ext uri="{FF2B5EF4-FFF2-40B4-BE49-F238E27FC236}">
-                <a16:creationId xmlns:a16="http://schemas.microsoft.com/office/drawing/2014/main" id="{F2C24FEC-0565-DA65-6D87-19D9CAE5873A}"/>
-              </a:ext>
-            </a:extLst>
-          </p:cNvPr>
-          <p:cNvPicPr>
-            <a:picLocks noChangeAspect="1"/>
-          </p:cNvPicPr>
-          <p:nvPr/>
-        </p:nvPicPr>
-        <p:blipFill>
-          <a:blip r:embed="rId2"/>
-          <a:stretch>
-            <a:fillRect/>
-          </a:stretch>
-        </p:blipFill>
-        <p:spPr>
-          <a:xfrm>
-            <a:off x="615618" y="0"/>
-            <a:ext cx="7912764" cy="5143500"/>
-          </a:xfrm>
-          <a:prstGeom prst="rect">
-            <a:avLst/>
-          </a:prstGeom>
-        </p:spPr>
-      </p:pic>
+      <p:sp>
+        <p:nvSpPr>
+          <p:cNvPr id="2" name="Shape 0"/>
+          <p:cNvSpPr/>
+          <p:nvPr/>
+        </p:nvSpPr>
+        <p:spPr>
+          <a:xfrm>
+            <a:off x="0" y="0"/>
+            <a:ext cx="9144000" cy="658368"/>
+          </a:xfrm>
+          <a:prstGeom prst="rect">
+            <a:avLst/>
+          </a:prstGeom>
+          <a:solidFill>
+            <a:srgbClr val="CC0000"/>
+          </a:solidFill>
+          <a:ln w="12700">
+            <a:solidFill>
+              <a:srgbClr val="CC0000"/>
+            </a:solidFill>
+            <a:prstDash val="solid"/>
+          </a:ln>
+        </p:spPr>
+        <p:txBody>
+          <a:bodyPr/>
+          <a:lstStyle/>
+          <a:p>
+            <a:endParaRPr lang="en-US"/>
+          </a:p>
+        </p:txBody>
+      </p:sp>
+      <p:sp>
+        <p:nvSpPr>
+          <p:cNvPr id="3" name="Text 1"/>
+          <p:cNvSpPr/>
+          <p:nvPr/>
+        </p:nvSpPr>
+        <p:spPr>
+          <a:xfrm>
+            <a:off x="320040" y="0"/>
+            <a:ext cx="8503920" cy="658368"/>
+          </a:xfrm>
+          <a:prstGeom prst="rect">
+            <a:avLst/>
+          </a:prstGeom>
+          <a:noFill/>
+          <a:ln/>
+        </p:spPr>
+        <p:txBody>
+          <a:bodyPr wrap="square" lIns="0" tIns="0" rIns="0" bIns="0" rtlCol="0" anchor="ctr"/>
+          <a:lstStyle/>
+          <a:p>
+            <a:pPr marL="0" indent="0">
+              <a:buNone/>
+            </a:pPr>
+            <a:r>
+              <a:rPr lang="en-US" sz="2000" b="1" dirty="0">
+                <a:solidFill>
+                  <a:srgbClr val="FFFFFF"/>
+                </a:solidFill>
+              </a:rPr>
+              <a:t>Moj prvi tjedan s AI alatima — Checklista</a:t>
+            </a:r>
+            <a:endParaRPr lang="en-US" sz="2000" dirty="0"/>
+          </a:p>
+        </p:txBody>
+      </p:sp>
+      <p:sp>
+        <p:nvSpPr>
+          <p:cNvPr id="4" name="Text 2"/>
+          <p:cNvSpPr/>
+          <p:nvPr/>
+        </p:nvSpPr>
+        <p:spPr>
+          <a:xfrm>
+            <a:off x="411480" y="804672"/>
+            <a:ext cx="8321040" cy="4114800"/>
+          </a:xfrm>
+          <a:prstGeom prst="rect">
+            <a:avLst/>
+          </a:prstGeom>
+          <a:noFill/>
+          <a:ln/>
+        </p:spPr>
+        <p:txBody>
+          <a:bodyPr wrap="square" rtlCol="0" anchor="t"/>
+          <a:lstStyle/>
+          <a:p>
+            <a:pPr marL="342900" indent="-342900">
+              <a:spcAft>
+                <a:spcPts val="900"/>
+              </a:spcAft>
+              <a:buSzPct val="100000"/>
+              <a:buChar char="•"/>
+            </a:pPr>
+            <a:r>
+              <a:rPr lang="en-US" sz="1600" dirty="0">
+                <a:solidFill>
+                  <a:srgbClr val="444444"/>
+                </a:solidFill>
+              </a:rPr>
+              <a:t>☐  Kreirao/la sam besplatan ChatGPT račun na chatgpt.com</a:t>
+            </a:r>
+            <a:endParaRPr lang="en-US" sz="1600" dirty="0"/>
+          </a:p>
+          <a:p>
+            <a:pPr marL="342900" indent="-342900">
+              <a:spcAft>
+                <a:spcPts val="900"/>
+              </a:spcAft>
+              <a:buSzPct val="100000"/>
+              <a:buChar char="•"/>
+            </a:pPr>
+            <a:r>
+              <a:rPr lang="en-US" sz="1600" dirty="0">
+                <a:solidFill>
+                  <a:srgbClr val="444444"/>
+                </a:solidFill>
+              </a:rPr>
+              <a:t>☐  Instalirao/la sam ChatGPT ili Gemini aplikaciju na mobitel</a:t>
+            </a:r>
+            <a:endParaRPr lang="en-US" sz="1600" dirty="0"/>
+          </a:p>
+          <a:p>
+            <a:pPr marL="342900" indent="-342900">
+              <a:spcAft>
+                <a:spcPts val="900"/>
+              </a:spcAft>
+              <a:buSzPct val="100000"/>
+              <a:buChar char="•"/>
+            </a:pPr>
+            <a:r>
+              <a:rPr lang="en-US" sz="1600" dirty="0">
+                <a:solidFill>
+                  <a:srgbClr val="444444"/>
+                </a:solidFill>
+              </a:rPr>
+              <a:t>☐  Poslao/la sam prvi prompt ChatGPT-u i dobio/la odgovor</a:t>
+            </a:r>
+            <a:endParaRPr lang="en-US" sz="1600" dirty="0"/>
+          </a:p>
+          <a:p>
+            <a:pPr marL="342900" indent="-342900">
+              <a:spcAft>
+                <a:spcPts val="900"/>
+              </a:spcAft>
+              <a:buSzPct val="100000"/>
+              <a:buChar char="•"/>
+            </a:pPr>
+            <a:r>
+              <a:rPr lang="en-US" sz="1600" dirty="0">
+                <a:solidFill>
+                  <a:srgbClr val="444444"/>
+                </a:solidFill>
+              </a:rPr>
+              <a:t>☐  Isprobao/la sam glasovni unos (mikrofon u aplikaciji)</a:t>
+            </a:r>
+            <a:endParaRPr lang="en-US" sz="1600" dirty="0"/>
+          </a:p>
+          <a:p>
+            <a:pPr marL="342900" indent="-342900">
+              <a:spcAft>
+                <a:spcPts val="900"/>
+              </a:spcAft>
+              <a:buSzPct val="100000"/>
+              <a:buChar char="•"/>
+            </a:pPr>
+            <a:r>
+              <a:rPr lang="en-US" sz="1600" dirty="0">
+                <a:solidFill>
+                  <a:srgbClr val="444444"/>
+                </a:solidFill>
+              </a:rPr>
+              <a:t>☐  Učitao/la fotografiju u ChatGPT i postavio/la pitanje o njoj</a:t>
+            </a:r>
+            <a:endParaRPr lang="en-US" sz="1600" dirty="0"/>
+          </a:p>
+          <a:p>
+            <a:pPr marL="342900" indent="-342900">
+              <a:spcAft>
+                <a:spcPts val="900"/>
+              </a:spcAft>
+              <a:buSzPct val="100000"/>
+              <a:buChar char="•"/>
+            </a:pPr>
+            <a:r>
+              <a:rPr lang="en-US" sz="1600" dirty="0">
+                <a:solidFill>
+                  <a:srgbClr val="444444"/>
+                </a:solidFill>
+              </a:rPr>
+              <a:t>☐  Otvorio/la Canva.com i pregledao/la predloške čestitaka</a:t>
+            </a:r>
+            <a:endParaRPr lang="en-US" sz="1600" dirty="0"/>
+          </a:p>
+          <a:p>
+            <a:pPr marL="342900" indent="-342900">
+              <a:spcAft>
+                <a:spcPts val="900"/>
+              </a:spcAft>
+              <a:buSzPct val="100000"/>
+              <a:buChar char="•"/>
+            </a:pPr>
+            <a:r>
+              <a:rPr lang="en-US" sz="1600" dirty="0">
+                <a:solidFill>
+                  <a:srgbClr val="444444"/>
+                </a:solidFill>
+              </a:rPr>
+              <a:t>☐  Isprobao/la generiranje slike u Copilot-u ili ChatGPT-u</a:t>
+            </a:r>
+            <a:endParaRPr lang="en-US" sz="1600" dirty="0"/>
+          </a:p>
+          <a:p>
+            <a:pPr marL="342900" indent="-342900">
+              <a:spcAft>
+                <a:spcPts val="900"/>
+              </a:spcAft>
+              <a:buSzPct val="100000"/>
+              <a:buChar char="•"/>
+            </a:pPr>
+            <a:r>
+              <a:rPr lang="en-US" sz="1600" dirty="0">
+                <a:solidFill>
+                  <a:srgbClr val="444444"/>
+                </a:solidFill>
+              </a:rPr>
+              <a:t>☐  Osjetljive podatke (PIN, OIB, lozinka) NIKAD ne unosim u AI</a:t>
+            </a:r>
+            <a:endParaRPr lang="en-US" sz="1600" dirty="0"/>
+          </a:p>
+        </p:txBody>
+      </p:sp>
     </p:spTree>
-    <p:extLst>
-      <p:ext uri="{BB962C8B-B14F-4D97-AF65-F5344CB8AC3E}">
-        <p14:creationId xmlns:p14="http://schemas.microsoft.com/office/powerpoint/2010/main" val="2518332111"/>
-      </p:ext>
-    </p:extLst>
   </p:cSld>
   <p:clrMapOvr>
     <a:masterClrMapping/>
@@ -9534,7 +10988,352 @@
 </p:sld>
 </file>
 
-<file path=ppt/slides/slide4.xml><?xml version="1.0" encoding="utf-8"?>
+<file path=ppt/slides/slide21.xml><?xml version="1.0" encoding="utf-8"?>
+<p:sld xmlns:a="http://schemas.openxmlformats.org/drawingml/2006/main" xmlns:r="http://schemas.openxmlformats.org/officeDocument/2006/relationships" xmlns:p="http://schemas.openxmlformats.org/presentationml/2006/main">
+  <p:cSld name="Slide 15">
+    <p:bg>
+      <p:bgPr>
+        <a:solidFill>
+          <a:srgbClr val="1A1A1A"/>
+        </a:solidFill>
+        <a:effectLst/>
+      </p:bgPr>
+    </p:bg>
+    <p:spTree>
+      <p:nvGrpSpPr>
+        <p:cNvPr id="1" name=""/>
+        <p:cNvGrpSpPr/>
+        <p:nvPr/>
+      </p:nvGrpSpPr>
+      <p:grpSpPr>
+        <a:xfrm>
+          <a:off x="0" y="0"/>
+          <a:ext cx="0" cy="0"/>
+          <a:chOff x="0" y="0"/>
+          <a:chExt cx="0" cy="0"/>
+        </a:xfrm>
+      </p:grpSpPr>
+      <p:sp>
+        <p:nvSpPr>
+          <p:cNvPr id="2" name="Shape 0"/>
+          <p:cNvSpPr/>
+          <p:nvPr/>
+        </p:nvSpPr>
+        <p:spPr>
+          <a:xfrm>
+            <a:off x="0" y="0"/>
+            <a:ext cx="146304" cy="5143500"/>
+          </a:xfrm>
+          <a:prstGeom prst="rect">
+            <a:avLst/>
+          </a:prstGeom>
+          <a:solidFill>
+            <a:srgbClr val="CC0000"/>
+          </a:solidFill>
+          <a:ln w="12700">
+            <a:solidFill>
+              <a:srgbClr val="CC0000"/>
+            </a:solidFill>
+            <a:prstDash val="solid"/>
+          </a:ln>
+        </p:spPr>
+        <p:txBody>
+          <a:bodyPr/>
+          <a:lstStyle/>
+          <a:p>
+            <a:endParaRPr lang="en-US"/>
+          </a:p>
+        </p:txBody>
+      </p:sp>
+      <p:sp>
+        <p:nvSpPr>
+          <p:cNvPr id="3" name="Text 1"/>
+          <p:cNvSpPr/>
+          <p:nvPr/>
+        </p:nvSpPr>
+        <p:spPr>
+          <a:xfrm>
+            <a:off x="457200" y="411480"/>
+            <a:ext cx="8229600" cy="594360"/>
+          </a:xfrm>
+          <a:prstGeom prst="rect">
+            <a:avLst/>
+          </a:prstGeom>
+          <a:noFill/>
+          <a:ln/>
+        </p:spPr>
+        <p:txBody>
+          <a:bodyPr wrap="square" rtlCol="0" anchor="ctr"/>
+          <a:lstStyle/>
+          <a:p>
+            <a:pPr marL="0" indent="0">
+              <a:buNone/>
+            </a:pPr>
+            <a:r>
+              <a:rPr lang="en-US" sz="2800" b="1" dirty="0">
+                <a:solidFill>
+                  <a:srgbClr val="CC0000"/>
+                </a:solidFill>
+              </a:rPr>
+              <a:t>Zaključak</a:t>
+            </a:r>
+            <a:endParaRPr lang="en-US" sz="2800" dirty="0"/>
+          </a:p>
+        </p:txBody>
+      </p:sp>
+      <p:sp>
+        <p:nvSpPr>
+          <p:cNvPr id="4" name="Text 2"/>
+          <p:cNvSpPr/>
+          <p:nvPr/>
+        </p:nvSpPr>
+        <p:spPr>
+          <a:xfrm>
+            <a:off x="457200" y="1170432"/>
+            <a:ext cx="6583680" cy="3200400"/>
+          </a:xfrm>
+          <a:prstGeom prst="rect">
+            <a:avLst/>
+          </a:prstGeom>
+          <a:noFill/>
+          <a:ln/>
+        </p:spPr>
+        <p:txBody>
+          <a:bodyPr wrap="square" rtlCol="0" anchor="t"/>
+          <a:lstStyle/>
+          <a:p>
+            <a:pPr marL="342900" indent="-342900">
+              <a:spcAft>
+                <a:spcPts val="1000"/>
+              </a:spcAft>
+              <a:buSzPct val="100000"/>
+              <a:buChar char="•"/>
+            </a:pPr>
+            <a:r>
+              <a:rPr lang="en-US" sz="1500" dirty="0">
+                <a:solidFill>
+                  <a:srgbClr val="DDDDDD"/>
+                </a:solidFill>
+              </a:rPr>
+              <a:t>AI nije opasan ni zastrašujuć — to je alat poput mobitela. Uči se upotrebom.</a:t>
+            </a:r>
+            <a:endParaRPr lang="en-US" sz="1500" dirty="0"/>
+          </a:p>
+          <a:p>
+            <a:pPr marL="342900" indent="-342900">
+              <a:spcAft>
+                <a:spcPts val="1000"/>
+              </a:spcAft>
+              <a:buSzPct val="100000"/>
+              <a:buChar char="•"/>
+            </a:pPr>
+            <a:r>
+              <a:rPr lang="en-US" sz="1500" dirty="0">
+                <a:solidFill>
+                  <a:srgbClr val="DDDDDD"/>
+                </a:solidFill>
+              </a:rPr>
+              <a:t>Besplatno je dovoljno: ChatGPT, Gemini, Copilot i Canva zadovoljavaju 90% potreba.</a:t>
+            </a:r>
+            <a:endParaRPr lang="en-US" sz="1500" dirty="0"/>
+          </a:p>
+          <a:p>
+            <a:pPr marL="342900" indent="-342900">
+              <a:spcAft>
+                <a:spcPts val="1000"/>
+              </a:spcAft>
+              <a:buSzPct val="100000"/>
+              <a:buChar char="•"/>
+            </a:pPr>
+            <a:r>
+              <a:rPr lang="en-US" sz="1500" dirty="0">
+                <a:solidFill>
+                  <a:srgbClr val="DDDDDD"/>
+                </a:solidFill>
+              </a:rPr>
+              <a:t>AI griješi — provjera informacija ostaje naša odgovornost.</a:t>
+            </a:r>
+            <a:endParaRPr lang="en-US" sz="1500" dirty="0"/>
+          </a:p>
+          <a:p>
+            <a:pPr marL="342900" indent="-342900">
+              <a:spcAft>
+                <a:spcPts val="1000"/>
+              </a:spcAft>
+              <a:buSzPct val="100000"/>
+              <a:buChar char="•"/>
+            </a:pPr>
+            <a:r>
+              <a:rPr lang="en-US" sz="1500" dirty="0">
+                <a:solidFill>
+                  <a:srgbClr val="DDDDDD"/>
+                </a:solidFill>
+              </a:rPr>
+              <a:t>Osobni podaci = tabu: PIN, OIB, lozinka, broj kartice nikad ne idu u chatbot.</a:t>
+            </a:r>
+            <a:endParaRPr lang="en-US" sz="1500" dirty="0"/>
+          </a:p>
+          <a:p>
+            <a:pPr marL="342900" indent="-342900">
+              <a:spcAft>
+                <a:spcPts val="1000"/>
+              </a:spcAft>
+              <a:buSzPct val="100000"/>
+              <a:buChar char="•"/>
+            </a:pPr>
+            <a:r>
+              <a:rPr lang="en-US" sz="1500" dirty="0">
+                <a:solidFill>
+                  <a:srgbClr val="DDDDDD"/>
+                </a:solidFill>
+              </a:rPr>
+              <a:t>Počnite malo — jedan prompt dnevno je dovoljan start. Za tjedan dana imat ćete naviku.</a:t>
+            </a:r>
+            <a:endParaRPr lang="en-US" sz="1500" dirty="0"/>
+          </a:p>
+        </p:txBody>
+      </p:sp>
+      <p:sp>
+        <p:nvSpPr>
+          <p:cNvPr id="5" name="Text 3"/>
+          <p:cNvSpPr/>
+          <p:nvPr/>
+        </p:nvSpPr>
+        <p:spPr>
+          <a:xfrm>
+            <a:off x="457200" y="4407408"/>
+            <a:ext cx="6400800" cy="411480"/>
+          </a:xfrm>
+          <a:prstGeom prst="rect">
+            <a:avLst/>
+          </a:prstGeom>
+          <a:noFill/>
+          <a:ln/>
+        </p:spPr>
+        <p:txBody>
+          <a:bodyPr wrap="square" rtlCol="0" anchor="ctr"/>
+          <a:lstStyle/>
+          <a:p>
+            <a:pPr marL="0" indent="0">
+              <a:buNone/>
+            </a:pPr>
+            <a:r>
+              <a:rPr lang="en-US" sz="1300" i="1" dirty="0">
+                <a:solidFill>
+                  <a:srgbClr val="888888"/>
+                </a:solidFill>
+              </a:rPr>
+              <a:t>AI je alat. Vi ste mozak koji ga koristi.</a:t>
+            </a:r>
+            <a:endParaRPr lang="en-US" sz="1300" dirty="0"/>
+          </a:p>
+        </p:txBody>
+      </p:sp>
+      <p:sp>
+        <p:nvSpPr>
+          <p:cNvPr id="6" name="Text 4"/>
+          <p:cNvSpPr/>
+          <p:nvPr/>
+        </p:nvSpPr>
+        <p:spPr>
+          <a:xfrm>
+            <a:off x="457200" y="4782312"/>
+            <a:ext cx="8229600" cy="274320"/>
+          </a:xfrm>
+          <a:prstGeom prst="rect">
+            <a:avLst/>
+          </a:prstGeom>
+          <a:noFill/>
+          <a:ln/>
+        </p:spPr>
+        <p:txBody>
+          <a:bodyPr wrap="square" rtlCol="0" anchor="ctr"/>
+          <a:lstStyle/>
+          <a:p>
+            <a:pPr marL="0" indent="0">
+              <a:buNone/>
+            </a:pPr>
+            <a:r>
+              <a:rPr lang="en-US" sz="900" dirty="0">
+                <a:solidFill>
+                  <a:srgbClr val="666666"/>
+                </a:solidFill>
+              </a:rPr>
+              <a:t>chatgpt.com  ·  gemini.google.com  ·  canva.com  ·  perplexity.ai  ·  notebooklm.google.com</a:t>
+            </a:r>
+            <a:endParaRPr lang="en-US" sz="900" dirty="0"/>
+          </a:p>
+        </p:txBody>
+      </p:sp>
+      <p:pic>
+        <p:nvPicPr>
+          <p:cNvPr id="7" name="Image 0" descr="preencoded.png"/>
+          <p:cNvPicPr>
+            <a:picLocks noChangeAspect="1"/>
+          </p:cNvPicPr>
+          <p:nvPr/>
+        </p:nvPicPr>
+        <p:blipFill>
+          <a:blip r:embed="rId3"/>
+          <a:stretch>
+            <a:fillRect/>
+          </a:stretch>
+        </p:blipFill>
+        <p:spPr>
+          <a:xfrm>
+            <a:off x="7132320" y="685800"/>
+            <a:ext cx="1828800" cy="1828800"/>
+          </a:xfrm>
+          <a:prstGeom prst="rect">
+            <a:avLst/>
+          </a:prstGeom>
+        </p:spPr>
+      </p:pic>
+      <p:sp>
+        <p:nvSpPr>
+          <p:cNvPr id="8" name="Text 5"/>
+          <p:cNvSpPr/>
+          <p:nvPr/>
+        </p:nvSpPr>
+        <p:spPr>
+          <a:xfrm>
+            <a:off x="6766560" y="2697480"/>
+            <a:ext cx="2194560" cy="822960"/>
+          </a:xfrm>
+          <a:prstGeom prst="rect">
+            <a:avLst/>
+          </a:prstGeom>
+          <a:noFill/>
+          <a:ln/>
+        </p:spPr>
+        <p:txBody>
+          <a:bodyPr wrap="square" rtlCol="0" anchor="ctr"/>
+          <a:lstStyle/>
+          <a:p>
+            <a:pPr marL="0" indent="0" algn="ctr">
+              <a:buNone/>
+            </a:pPr>
+            <a:r>
+              <a:rPr lang="en-US" sz="2800" b="1" dirty="0">
+                <a:solidFill>
+                  <a:srgbClr val="FFFFFF"/>
+                </a:solidFill>
+              </a:rPr>
+              <a:t>Pitanja?</a:t>
+            </a:r>
+            <a:endParaRPr lang="en-US" sz="2800" dirty="0"/>
+          </a:p>
+        </p:txBody>
+      </p:sp>
+    </p:spTree>
+  </p:cSld>
+  <p:clrMapOvr>
+    <a:masterClrMapping/>
+  </p:clrMapOvr>
+</p:sld>
+</file>
+
+<file path=ppt/slides/slide3.xml><?xml version="1.0" encoding="utf-8"?>
 <p:sld xmlns:a="http://schemas.openxmlformats.org/drawingml/2006/main" xmlns:r="http://schemas.openxmlformats.org/officeDocument/2006/relationships" xmlns:p="http://schemas.openxmlformats.org/presentationml/2006/main">
   <p:cSld>
     <p:spTree>
@@ -9712,12 +11511,48 @@
           </a:p>
         </p:txBody>
       </p:sp>
-      <p:sp>
-        <p:nvSpPr>
-          <p:cNvPr id="4" name="Rectangle 3">
+      <p:pic>
+        <p:nvPicPr>
+          <p:cNvPr id="8" name="Graphic 7" descr="Wave Gesture outline">
             <a:extLst>
               <a:ext uri="{FF2B5EF4-FFF2-40B4-BE49-F238E27FC236}">
-                <a16:creationId xmlns:a16="http://schemas.microsoft.com/office/drawing/2014/main" id="{009B60AD-0DD4-6C83-6391-4357B6E52343}"/>
+                <a16:creationId xmlns:a16="http://schemas.microsoft.com/office/drawing/2014/main" id="{B0BF7C46-CDE7-D9E7-D2C7-860B6DC09648}"/>
+              </a:ext>
+            </a:extLst>
+          </p:cNvPr>
+          <p:cNvPicPr>
+            <a:picLocks noChangeAspect="1"/>
+          </p:cNvPicPr>
+          <p:nvPr/>
+        </p:nvPicPr>
+        <p:blipFill>
+          <a:blip>
+            <a:extLst>
+              <a:ext uri="{96DAC541-7B7A-43D3-8B79-37D633B846F1}">
+                <asvg:svgBlip xmlns:asvg="http://schemas.microsoft.com/office/drawing/2016/SVG/main" r:embed="rId3"/>
+              </a:ext>
+            </a:extLst>
+          </a:blip>
+          <a:stretch>
+            <a:fillRect/>
+          </a:stretch>
+        </p:blipFill>
+        <p:spPr>
+          <a:xfrm rot="1548987" flipH="1">
+            <a:off x="5537805" y="2480996"/>
+            <a:ext cx="862355" cy="914400"/>
+          </a:xfrm>
+          <a:prstGeom prst="rect">
+            <a:avLst/>
+          </a:prstGeom>
+        </p:spPr>
+      </p:pic>
+      <p:sp>
+        <p:nvSpPr>
+          <p:cNvPr id="9" name="Rectangle 8">
+            <a:extLst>
+              <a:ext uri="{FF2B5EF4-FFF2-40B4-BE49-F238E27FC236}">
+                <a16:creationId xmlns:a16="http://schemas.microsoft.com/office/drawing/2014/main" id="{F40E0E36-7052-3952-8B8F-0A1AE5C90944}"/>
               </a:ext>
             </a:extLst>
           </p:cNvPr>
@@ -9725,9 +11560,9 @@
           <p:nvPr/>
         </p:nvSpPr>
         <p:spPr>
-          <a:xfrm rot="21222773">
-            <a:off x="4060390" y="2050828"/>
-            <a:ext cx="391235" cy="2900817"/>
+          <a:xfrm rot="6076246">
+            <a:off x="4949082" y="2307806"/>
+            <a:ext cx="174674" cy="1418851"/>
           </a:xfrm>
           <a:prstGeom prst="rect">
             <a:avLst/>
@@ -9769,48 +11604,100 @@
           </a:p>
         </p:txBody>
       </p:sp>
-      <p:pic>
-        <p:nvPicPr>
-          <p:cNvPr id="8" name="Graphic 7" descr="Wave Gesture outline">
+      <p:sp>
+        <p:nvSpPr>
+          <p:cNvPr id="6" name="TextBox 5">
             <a:extLst>
               <a:ext uri="{FF2B5EF4-FFF2-40B4-BE49-F238E27FC236}">
-                <a16:creationId xmlns:a16="http://schemas.microsoft.com/office/drawing/2014/main" id="{B0BF7C46-CDE7-D9E7-D2C7-860B6DC09648}"/>
+                <a16:creationId xmlns:a16="http://schemas.microsoft.com/office/drawing/2014/main" id="{1B5F1636-2C34-ABEF-3225-EFB5272DA51F}"/>
               </a:ext>
             </a:extLst>
           </p:cNvPr>
-          <p:cNvPicPr>
-            <a:picLocks noChangeAspect="1"/>
-          </p:cNvPicPr>
-          <p:nvPr/>
-        </p:nvPicPr>
-        <p:blipFill>
-          <a:blip>
+          <p:cNvSpPr txBox="1"/>
+          <p:nvPr/>
+        </p:nvSpPr>
+        <p:spPr>
+          <a:xfrm>
+            <a:off x="5805334" y="4159553"/>
+            <a:ext cx="2026517" cy="338554"/>
+          </a:xfrm>
+          <a:prstGeom prst="rect">
+            <a:avLst/>
+          </a:prstGeom>
+          <a:noFill/>
+        </p:spPr>
+        <p:txBody>
+          <a:bodyPr wrap="none" rtlCol="0">
+            <a:spAutoFit/>
+          </a:bodyPr>
+          <a:lstStyle/>
+          <a:p>
+            <a:r>
+              <a:rPr lang="en-US" sz="1600" i="1" dirty="0">
+                <a:solidFill>
+                  <a:schemeClr val="tx1">
+                    <a:lumMod val="65000"/>
+                    <a:lumOff val="35000"/>
+                  </a:schemeClr>
+                </a:solidFill>
+                <a:ea typeface="ADLaM Display" panose="020F0502020204030204" pitchFamily="2" charset="0"/>
+                <a:cs typeface="ADLaM Display" panose="020F0502020204030204" pitchFamily="2" charset="0"/>
+              </a:rPr>
+              <a:t>CHAT GPT RAZGOVOR</a:t>
+            </a:r>
+          </a:p>
+        </p:txBody>
+      </p:sp>
+      <p:sp>
+        <p:nvSpPr>
+          <p:cNvPr id="10" name="TextBox 9">
             <a:extLst>
-              <a:ext uri="{96DAC541-7B7A-43D3-8B79-37D633B846F1}">
-                <asvg:svgBlip xmlns:asvg="http://schemas.microsoft.com/office/drawing/2016/SVG/main" r:embed="rId3"/>
+              <a:ext uri="{FF2B5EF4-FFF2-40B4-BE49-F238E27FC236}">
+                <a16:creationId xmlns:a16="http://schemas.microsoft.com/office/drawing/2014/main" id="{DBA7CD51-8D71-EA5B-7EA5-4A95AC11DD56}"/>
               </a:ext>
             </a:extLst>
-          </a:blip>
-          <a:stretch>
-            <a:fillRect/>
-          </a:stretch>
-        </p:blipFill>
-        <p:spPr>
-          <a:xfrm rot="1548987" flipH="1">
-            <a:off x="5537805" y="2480996"/>
-            <a:ext cx="862355" cy="914400"/>
-          </a:xfrm>
-          <a:prstGeom prst="rect">
-            <a:avLst/>
-          </a:prstGeom>
-        </p:spPr>
-      </p:pic>
-      <p:sp>
-        <p:nvSpPr>
-          <p:cNvPr id="9" name="Rectangle 8">
+          </p:cNvPr>
+          <p:cNvSpPr txBox="1"/>
+          <p:nvPr/>
+        </p:nvSpPr>
+        <p:spPr>
+          <a:xfrm>
+            <a:off x="6471414" y="4498107"/>
+            <a:ext cx="1199303" cy="307777"/>
+          </a:xfrm>
+          <a:prstGeom prst="rect">
+            <a:avLst/>
+          </a:prstGeom>
+          <a:noFill/>
+        </p:spPr>
+        <p:txBody>
+          <a:bodyPr wrap="none" rtlCol="0">
+            <a:spAutoFit/>
+          </a:bodyPr>
+          <a:lstStyle/>
+          <a:p>
+            <a:r>
+              <a:rPr lang="en-US" sz="1400" i="1" dirty="0">
+                <a:solidFill>
+                  <a:schemeClr val="tx1">
+                    <a:lumMod val="65000"/>
+                    <a:lumOff val="35000"/>
+                  </a:schemeClr>
+                </a:solidFill>
+                <a:ea typeface="ADLaM Display" panose="020F0502020204030204" pitchFamily="2" charset="0"/>
+                <a:cs typeface="ADLaM Display" panose="020F0502020204030204" pitchFamily="2" charset="0"/>
+              </a:rPr>
+              <a:t>KAO ČOVJEK…</a:t>
+            </a:r>
+          </a:p>
+        </p:txBody>
+      </p:sp>
+      <p:sp>
+        <p:nvSpPr>
+          <p:cNvPr id="4" name="Rectangle 3">
             <a:extLst>
               <a:ext uri="{FF2B5EF4-FFF2-40B4-BE49-F238E27FC236}">
-                <a16:creationId xmlns:a16="http://schemas.microsoft.com/office/drawing/2014/main" id="{F40E0E36-7052-3952-8B8F-0A1AE5C90944}"/>
+                <a16:creationId xmlns:a16="http://schemas.microsoft.com/office/drawing/2014/main" id="{009B60AD-0DD4-6C83-6391-4357B6E52343}"/>
               </a:ext>
             </a:extLst>
           </p:cNvPr>
@@ -9818,9 +11705,9 @@
           <p:nvPr/>
         </p:nvSpPr>
         <p:spPr>
-          <a:xfrm rot="6076246">
-            <a:off x="4949082" y="2307806"/>
-            <a:ext cx="174674" cy="1418851"/>
+          <a:xfrm rot="21222773">
+            <a:off x="4087749" y="2049325"/>
+            <a:ext cx="391235" cy="3400487"/>
           </a:xfrm>
           <a:prstGeom prst="rect">
             <a:avLst/>
@@ -9862,12 +11749,42 @@
           </a:p>
         </p:txBody>
       </p:sp>
-      <p:sp>
-        <p:nvSpPr>
-          <p:cNvPr id="6" name="TextBox 5">
+    </p:spTree>
+    <p:extLst>
+      <p:ext uri="{BB962C8B-B14F-4D97-AF65-F5344CB8AC3E}">
+        <p14:creationId xmlns:p14="http://schemas.microsoft.com/office/powerpoint/2010/main" val="1169597192"/>
+      </p:ext>
+    </p:extLst>
+  </p:cSld>
+  <p:clrMapOvr>
+    <a:masterClrMapping/>
+  </p:clrMapOvr>
+</p:sld>
+</file>
+
+<file path=ppt/slides/slide4.xml><?xml version="1.0" encoding="utf-8"?>
+<p:sld xmlns:a="http://schemas.openxmlformats.org/drawingml/2006/main" xmlns:r="http://schemas.openxmlformats.org/officeDocument/2006/relationships" xmlns:p="http://schemas.openxmlformats.org/presentationml/2006/main">
+  <p:cSld>
+    <p:spTree>
+      <p:nvGrpSpPr>
+        <p:cNvPr id="1" name=""/>
+        <p:cNvGrpSpPr/>
+        <p:nvPr/>
+      </p:nvGrpSpPr>
+      <p:grpSpPr>
+        <a:xfrm>
+          <a:off x="0" y="0"/>
+          <a:ext cx="0" cy="0"/>
+          <a:chOff x="0" y="0"/>
+          <a:chExt cx="0" cy="0"/>
+        </a:xfrm>
+      </p:grpSpPr>
+      <p:sp>
+        <p:nvSpPr>
+          <p:cNvPr id="3" name="TextBox 2">
             <a:extLst>
               <a:ext uri="{FF2B5EF4-FFF2-40B4-BE49-F238E27FC236}">
-                <a16:creationId xmlns:a16="http://schemas.microsoft.com/office/drawing/2014/main" id="{1B5F1636-2C34-ABEF-3225-EFB5272DA51F}"/>
+                <a16:creationId xmlns:a16="http://schemas.microsoft.com/office/drawing/2014/main" id="{424BF6AE-432F-7425-469A-D74658C83F1A}"/>
               </a:ext>
             </a:extLst>
           </p:cNvPr>
@@ -9876,8 +11793,8 @@
         </p:nvSpPr>
         <p:spPr>
           <a:xfrm>
-            <a:off x="5805334" y="4159553"/>
-            <a:ext cx="2026517" cy="338554"/>
+            <a:off x="622259" y="443312"/>
+            <a:ext cx="7899481" cy="1569660"/>
           </a:xfrm>
           <a:prstGeom prst="rect">
             <a:avLst/>
@@ -9885,33 +11802,681 @@
           <a:noFill/>
         </p:spPr>
         <p:txBody>
-          <a:bodyPr wrap="none" rtlCol="0">
+          <a:bodyPr wrap="square" rtlCol="0">
             <a:spAutoFit/>
           </a:bodyPr>
           <a:lstStyle/>
           <a:p>
-            <a:r>
-              <a:rPr lang="en-US" sz="1600" i="1" dirty="0">
+            <a:pPr algn="ctr"/>
+            <a:r>
+              <a:rPr lang="en-US" sz="2400" i="1" dirty="0" err="1">
                 <a:solidFill>
                   <a:schemeClr val="tx1">
                     <a:lumMod val="65000"/>
                     <a:lumOff val="35000"/>
                   </a:schemeClr>
                 </a:solidFill>
-                <a:ea typeface="ADLaM Display" panose="020F0502020204030204" pitchFamily="2" charset="0"/>
-                <a:cs typeface="ADLaM Display" panose="020F0502020204030204" pitchFamily="2" charset="0"/>
-              </a:rPr>
-              <a:t>CHAT GPT RAZGOVOR</a:t>
-            </a:r>
-          </a:p>
-        </p:txBody>
-      </p:sp>
-      <p:sp>
-        <p:nvSpPr>
-          <p:cNvPr id="10" name="TextBox 9">
+              </a:rPr>
+              <a:t>treba</a:t>
+            </a:r>
+            <a:r>
+              <a:rPr lang="en-US" sz="2400" i="1" dirty="0">
+                <a:solidFill>
+                  <a:schemeClr val="tx1">
+                    <a:lumMod val="65000"/>
+                    <a:lumOff val="35000"/>
+                  </a:schemeClr>
+                </a:solidFill>
+              </a:rPr>
+              <a:t> mi </a:t>
+            </a:r>
+            <a:r>
+              <a:rPr lang="en-US" sz="2400" i="1" dirty="0" err="1">
+                <a:solidFill>
+                  <a:schemeClr val="tx1">
+                    <a:lumMod val="65000"/>
+                    <a:lumOff val="35000"/>
+                  </a:schemeClr>
+                </a:solidFill>
+              </a:rPr>
+              <a:t>preporuka</a:t>
+            </a:r>
+            <a:r>
+              <a:rPr lang="en-US" sz="2400" i="1" dirty="0">
+                <a:solidFill>
+                  <a:schemeClr val="tx1">
+                    <a:lumMod val="65000"/>
+                    <a:lumOff val="35000"/>
+                  </a:schemeClr>
+                </a:solidFill>
+              </a:rPr>
+              <a:t> za novi </a:t>
+            </a:r>
+            <a:r>
+              <a:rPr lang="en-US" sz="2400" i="1" dirty="0" err="1">
+                <a:solidFill>
+                  <a:schemeClr val="tx1">
+                    <a:lumMod val="65000"/>
+                    <a:lumOff val="35000"/>
+                  </a:schemeClr>
+                </a:solidFill>
+              </a:rPr>
+              <a:t>mobitel</a:t>
+            </a:r>
+            <a:r>
+              <a:rPr lang="en-US" sz="2400" i="1" dirty="0">
+                <a:solidFill>
+                  <a:schemeClr val="tx1">
+                    <a:lumMod val="65000"/>
+                    <a:lumOff val="35000"/>
+                  </a:schemeClr>
+                </a:solidFill>
+              </a:rPr>
+              <a:t>, </a:t>
+            </a:r>
+            <a:r>
+              <a:rPr lang="en-US" sz="2400" i="1" dirty="0" err="1">
+                <a:solidFill>
+                  <a:schemeClr val="tx1">
+                    <a:lumMod val="65000"/>
+                    <a:lumOff val="35000"/>
+                  </a:schemeClr>
+                </a:solidFill>
+              </a:rPr>
+              <a:t>koristit</a:t>
+            </a:r>
+            <a:r>
+              <a:rPr lang="en-US" sz="2400" i="1" dirty="0">
+                <a:solidFill>
+                  <a:schemeClr val="tx1">
+                    <a:lumMod val="65000"/>
+                    <a:lumOff val="35000"/>
+                  </a:schemeClr>
+                </a:solidFill>
+              </a:rPr>
+              <a:t> </a:t>
+            </a:r>
+            <a:r>
+              <a:rPr lang="en-US" sz="2400" i="1" dirty="0" err="1">
+                <a:solidFill>
+                  <a:schemeClr val="tx1">
+                    <a:lumMod val="65000"/>
+                    <a:lumOff val="35000"/>
+                  </a:schemeClr>
+                </a:solidFill>
+              </a:rPr>
+              <a:t>ću</a:t>
+            </a:r>
+            <a:r>
+              <a:rPr lang="en-US" sz="2400" i="1" dirty="0">
+                <a:solidFill>
+                  <a:schemeClr val="tx1">
+                    <a:lumMod val="65000"/>
+                    <a:lumOff val="35000"/>
+                  </a:schemeClr>
+                </a:solidFill>
+              </a:rPr>
+              <a:t> ga za video </a:t>
+            </a:r>
+            <a:r>
+              <a:rPr lang="en-US" sz="2400" i="1" dirty="0" err="1">
+                <a:solidFill>
+                  <a:schemeClr val="tx1">
+                    <a:lumMod val="65000"/>
+                    <a:lumOff val="35000"/>
+                  </a:schemeClr>
+                </a:solidFill>
+              </a:rPr>
+              <a:t>pozive</a:t>
+            </a:r>
+            <a:r>
+              <a:rPr lang="en-US" sz="2400" i="1" dirty="0">
+                <a:solidFill>
+                  <a:schemeClr val="tx1">
+                    <a:lumMod val="65000"/>
+                    <a:lumOff val="35000"/>
+                  </a:schemeClr>
+                </a:solidFill>
+              </a:rPr>
+              <a:t> s </a:t>
+            </a:r>
+            <a:r>
+              <a:rPr lang="en-US" sz="2400" i="1" dirty="0" err="1">
+                <a:solidFill>
+                  <a:schemeClr val="tx1">
+                    <a:lumMod val="65000"/>
+                    <a:lumOff val="35000"/>
+                  </a:schemeClr>
+                </a:solidFill>
+              </a:rPr>
+              <a:t>obitelji</a:t>
+            </a:r>
+            <a:r>
+              <a:rPr lang="en-US" sz="2400" i="1" dirty="0">
+                <a:solidFill>
+                  <a:schemeClr val="tx1">
+                    <a:lumMod val="65000"/>
+                    <a:lumOff val="35000"/>
+                  </a:schemeClr>
+                </a:solidFill>
+              </a:rPr>
+              <a:t>, </a:t>
+            </a:r>
+            <a:r>
+              <a:rPr lang="en-US" sz="2400" i="1" dirty="0" err="1">
+                <a:solidFill>
+                  <a:schemeClr val="tx1">
+                    <a:lumMod val="65000"/>
+                    <a:lumOff val="35000"/>
+                  </a:schemeClr>
+                </a:solidFill>
+              </a:rPr>
+              <a:t>društvene</a:t>
+            </a:r>
+            <a:r>
+              <a:rPr lang="en-US" sz="2400" i="1" dirty="0">
+                <a:solidFill>
+                  <a:schemeClr val="tx1">
+                    <a:lumMod val="65000"/>
+                    <a:lumOff val="35000"/>
+                  </a:schemeClr>
+                </a:solidFill>
+              </a:rPr>
+              <a:t> </a:t>
+            </a:r>
+            <a:r>
+              <a:rPr lang="en-US" sz="2400" i="1" dirty="0" err="1">
+                <a:solidFill>
+                  <a:schemeClr val="tx1">
+                    <a:lumMod val="65000"/>
+                    <a:lumOff val="35000"/>
+                  </a:schemeClr>
+                </a:solidFill>
+              </a:rPr>
+              <a:t>mreže</a:t>
+            </a:r>
+            <a:r>
+              <a:rPr lang="en-US" sz="2400" i="1" dirty="0">
+                <a:solidFill>
+                  <a:schemeClr val="tx1">
+                    <a:lumMod val="65000"/>
+                    <a:lumOff val="35000"/>
+                  </a:schemeClr>
+                </a:solidFill>
+              </a:rPr>
+              <a:t> </a:t>
+            </a:r>
+            <a:r>
+              <a:rPr lang="en-US" sz="2400" i="1" dirty="0" err="1">
+                <a:solidFill>
+                  <a:schemeClr val="tx1">
+                    <a:lumMod val="65000"/>
+                    <a:lumOff val="35000"/>
+                  </a:schemeClr>
+                </a:solidFill>
+              </a:rPr>
+              <a:t>te</a:t>
+            </a:r>
+            <a:r>
+              <a:rPr lang="en-US" sz="2400" i="1" dirty="0">
+                <a:solidFill>
+                  <a:schemeClr val="tx1">
+                    <a:lumMod val="65000"/>
+                    <a:lumOff val="35000"/>
+                  </a:schemeClr>
+                </a:solidFill>
+              </a:rPr>
+              <a:t> </a:t>
+            </a:r>
+            <a:r>
+              <a:rPr lang="en-US" sz="2400" i="1" dirty="0" err="1">
+                <a:solidFill>
+                  <a:schemeClr val="tx1">
+                    <a:lumMod val="65000"/>
+                    <a:lumOff val="35000"/>
+                  </a:schemeClr>
+                </a:solidFill>
+              </a:rPr>
+              <a:t>čitanje</a:t>
+            </a:r>
+            <a:r>
+              <a:rPr lang="en-US" sz="2400" i="1" dirty="0">
+                <a:solidFill>
+                  <a:schemeClr val="tx1">
+                    <a:lumMod val="65000"/>
+                    <a:lumOff val="35000"/>
+                  </a:schemeClr>
+                </a:solidFill>
+              </a:rPr>
+              <a:t> </a:t>
+            </a:r>
+            <a:r>
+              <a:rPr lang="en-US" sz="2400" i="1" dirty="0" err="1">
+                <a:solidFill>
+                  <a:schemeClr val="tx1">
+                    <a:lumMod val="65000"/>
+                    <a:lumOff val="35000"/>
+                  </a:schemeClr>
+                </a:solidFill>
+              </a:rPr>
+              <a:t>vijesti</a:t>
+            </a:r>
+            <a:r>
+              <a:rPr lang="en-US" sz="2400" i="1" dirty="0">
+                <a:solidFill>
+                  <a:schemeClr val="tx1">
+                    <a:lumMod val="65000"/>
+                    <a:lumOff val="35000"/>
+                  </a:schemeClr>
+                </a:solidFill>
+              </a:rPr>
+              <a:t>. </a:t>
+            </a:r>
+            <a:r>
+              <a:rPr lang="en-US" sz="2400" i="1" dirty="0" err="1">
+                <a:solidFill>
+                  <a:schemeClr val="tx1">
+                    <a:lumMod val="65000"/>
+                    <a:lumOff val="35000"/>
+                  </a:schemeClr>
+                </a:solidFill>
+              </a:rPr>
+              <a:t>preporuči</a:t>
+            </a:r>
+            <a:r>
+              <a:rPr lang="en-US" sz="2400" i="1" dirty="0">
+                <a:solidFill>
+                  <a:schemeClr val="tx1">
+                    <a:lumMod val="65000"/>
+                    <a:lumOff val="35000"/>
+                  </a:schemeClr>
+                </a:solidFill>
+              </a:rPr>
+              <a:t> mi </a:t>
+            </a:r>
+            <a:r>
+              <a:rPr lang="en-US" sz="2400" i="1" dirty="0" err="1">
+                <a:solidFill>
+                  <a:schemeClr val="tx1">
+                    <a:lumMod val="65000"/>
+                    <a:lumOff val="35000"/>
+                  </a:schemeClr>
+                </a:solidFill>
+              </a:rPr>
+              <a:t>i</a:t>
+            </a:r>
+            <a:r>
+              <a:rPr lang="en-US" sz="2400" i="1" dirty="0">
+                <a:solidFill>
+                  <a:schemeClr val="tx1">
+                    <a:lumMod val="65000"/>
+                    <a:lumOff val="35000"/>
+                  </a:schemeClr>
+                </a:solidFill>
+              </a:rPr>
+              <a:t> </a:t>
+            </a:r>
+            <a:r>
+              <a:rPr lang="en-US" sz="2400" i="1" dirty="0" err="1">
+                <a:solidFill>
+                  <a:schemeClr val="tx1">
+                    <a:lumMod val="65000"/>
+                    <a:lumOff val="35000"/>
+                  </a:schemeClr>
+                </a:solidFill>
+              </a:rPr>
+              <a:t>aplikacije</a:t>
+            </a:r>
+            <a:r>
+              <a:rPr lang="en-US" sz="2400" i="1" dirty="0">
+                <a:solidFill>
+                  <a:schemeClr val="tx1">
+                    <a:lumMod val="65000"/>
+                    <a:lumOff val="35000"/>
+                  </a:schemeClr>
+                </a:solidFill>
+              </a:rPr>
+              <a:t> </a:t>
+            </a:r>
+            <a:r>
+              <a:rPr lang="en-US" sz="2400" i="1" dirty="0" err="1">
+                <a:solidFill>
+                  <a:schemeClr val="tx1">
+                    <a:lumMod val="65000"/>
+                    <a:lumOff val="35000"/>
+                  </a:schemeClr>
+                </a:solidFill>
+              </a:rPr>
+              <a:t>koje</a:t>
+            </a:r>
+            <a:r>
+              <a:rPr lang="en-US" sz="2400" i="1" dirty="0">
+                <a:solidFill>
+                  <a:schemeClr val="tx1">
+                    <a:lumMod val="65000"/>
+                    <a:lumOff val="35000"/>
+                  </a:schemeClr>
+                </a:solidFill>
+              </a:rPr>
+              <a:t> da </a:t>
+            </a:r>
+            <a:r>
+              <a:rPr lang="en-US" sz="2400" i="1" dirty="0" err="1">
+                <a:solidFill>
+                  <a:schemeClr val="tx1">
+                    <a:lumMod val="65000"/>
+                    <a:lumOff val="35000"/>
+                  </a:schemeClr>
+                </a:solidFill>
+              </a:rPr>
+              <a:t>preuzmem</a:t>
+            </a:r>
+            <a:r>
+              <a:rPr lang="en-US" sz="2400" i="1" dirty="0">
+                <a:solidFill>
+                  <a:schemeClr val="tx1">
+                    <a:lumMod val="65000"/>
+                    <a:lumOff val="35000"/>
+                  </a:schemeClr>
+                </a:solidFill>
+              </a:rPr>
+              <a:t> u </a:t>
+            </a:r>
+            <a:r>
+              <a:rPr lang="en-US" sz="2400" i="1" dirty="0" err="1">
+                <a:solidFill>
+                  <a:schemeClr val="tx1">
+                    <a:lumMod val="65000"/>
+                    <a:lumOff val="35000"/>
+                  </a:schemeClr>
+                </a:solidFill>
+              </a:rPr>
+              <a:t>trgovini</a:t>
+            </a:r>
+            <a:r>
+              <a:rPr lang="en-US" sz="2400" i="1" dirty="0">
+                <a:solidFill>
+                  <a:schemeClr val="tx1">
+                    <a:lumMod val="65000"/>
+                    <a:lumOff val="35000"/>
+                  </a:schemeClr>
+                </a:solidFill>
+              </a:rPr>
+              <a:t>. </a:t>
+            </a:r>
+            <a:r>
+              <a:rPr lang="en-US" sz="2400" i="1" dirty="0" err="1">
+                <a:solidFill>
+                  <a:schemeClr val="tx1">
+                    <a:lumMod val="65000"/>
+                    <a:lumOff val="35000"/>
+                  </a:schemeClr>
+                </a:solidFill>
+              </a:rPr>
+              <a:t>mobitel</a:t>
+            </a:r>
+            <a:r>
+              <a:rPr lang="en-US" sz="2400" i="1" dirty="0">
+                <a:solidFill>
+                  <a:schemeClr val="tx1">
+                    <a:lumMod val="65000"/>
+                    <a:lumOff val="35000"/>
+                  </a:schemeClr>
+                </a:solidFill>
+              </a:rPr>
+              <a:t> </a:t>
+            </a:r>
+            <a:r>
+              <a:rPr lang="en-US" sz="2400" i="1" dirty="0" err="1">
+                <a:solidFill>
+                  <a:schemeClr val="tx1">
+                    <a:lumMod val="65000"/>
+                    <a:lumOff val="35000"/>
+                  </a:schemeClr>
+                </a:solidFill>
+              </a:rPr>
+              <a:t>treba</a:t>
+            </a:r>
+            <a:r>
+              <a:rPr lang="en-US" sz="2400" i="1" dirty="0">
+                <a:solidFill>
+                  <a:schemeClr val="tx1">
+                    <a:lumMod val="65000"/>
+                    <a:lumOff val="35000"/>
+                  </a:schemeClr>
+                </a:solidFill>
+              </a:rPr>
+              <a:t> </a:t>
+            </a:r>
+            <a:r>
+              <a:rPr lang="en-US" sz="2400" i="1" dirty="0" err="1">
+                <a:solidFill>
+                  <a:schemeClr val="tx1">
+                    <a:lumMod val="65000"/>
+                    <a:lumOff val="35000"/>
+                  </a:schemeClr>
+                </a:solidFill>
+              </a:rPr>
+              <a:t>biti</a:t>
+            </a:r>
+            <a:r>
+              <a:rPr lang="en-US" sz="2400" i="1" dirty="0">
+                <a:solidFill>
+                  <a:schemeClr val="tx1">
+                    <a:lumMod val="65000"/>
+                    <a:lumOff val="35000"/>
+                  </a:schemeClr>
+                </a:solidFill>
+              </a:rPr>
+              <a:t> </a:t>
+            </a:r>
+            <a:r>
+              <a:rPr lang="en-US" sz="2400" i="1" dirty="0" err="1">
+                <a:solidFill>
+                  <a:schemeClr val="tx1">
+                    <a:lumMod val="65000"/>
+                    <a:lumOff val="35000"/>
+                  </a:schemeClr>
+                </a:solidFill>
+              </a:rPr>
+              <a:t>povoljan</a:t>
+            </a:r>
+            <a:r>
+              <a:rPr lang="en-US" sz="2400" i="1" dirty="0">
+                <a:solidFill>
+                  <a:schemeClr val="tx1">
+                    <a:lumMod val="65000"/>
+                    <a:lumOff val="35000"/>
+                  </a:schemeClr>
+                </a:solidFill>
+              </a:rPr>
+              <a:t>. </a:t>
+            </a:r>
+            <a:r>
+              <a:rPr lang="en-US" sz="2400" i="1" dirty="0" err="1">
+                <a:solidFill>
+                  <a:schemeClr val="tx1">
+                    <a:lumMod val="65000"/>
+                    <a:lumOff val="35000"/>
+                  </a:schemeClr>
+                </a:solidFill>
+              </a:rPr>
+              <a:t>starije</a:t>
+            </a:r>
+            <a:r>
+              <a:rPr lang="en-US" sz="2400" i="1" dirty="0">
+                <a:solidFill>
+                  <a:schemeClr val="tx1">
+                    <a:lumMod val="65000"/>
+                    <a:lumOff val="35000"/>
+                  </a:schemeClr>
+                </a:solidFill>
+              </a:rPr>
+              <a:t> </a:t>
+            </a:r>
+            <a:r>
+              <a:rPr lang="en-US" sz="2400" i="1" dirty="0" err="1">
+                <a:solidFill>
+                  <a:schemeClr val="tx1">
+                    <a:lumMod val="65000"/>
+                    <a:lumOff val="35000"/>
+                  </a:schemeClr>
+                </a:solidFill>
+              </a:rPr>
+              <a:t>sam</a:t>
+            </a:r>
+            <a:r>
+              <a:rPr lang="en-US" sz="2400" i="1" dirty="0">
+                <a:solidFill>
+                  <a:schemeClr val="tx1">
+                    <a:lumMod val="65000"/>
+                    <a:lumOff val="35000"/>
+                  </a:schemeClr>
+                </a:solidFill>
+              </a:rPr>
+              <a:t> </a:t>
+            </a:r>
+            <a:r>
+              <a:rPr lang="en-US" sz="2400" i="1" dirty="0" err="1">
+                <a:solidFill>
+                  <a:schemeClr val="tx1">
+                    <a:lumMod val="65000"/>
+                    <a:lumOff val="35000"/>
+                  </a:schemeClr>
+                </a:solidFill>
+              </a:rPr>
+              <a:t>životne</a:t>
+            </a:r>
+            <a:r>
+              <a:rPr lang="en-US" sz="2400" i="1" dirty="0">
+                <a:solidFill>
+                  <a:schemeClr val="tx1">
+                    <a:lumMod val="65000"/>
+                    <a:lumOff val="35000"/>
+                  </a:schemeClr>
+                </a:solidFill>
+              </a:rPr>
+              <a:t> </a:t>
+            </a:r>
+            <a:r>
+              <a:rPr lang="en-US" sz="2400" i="1" dirty="0" err="1">
+                <a:solidFill>
+                  <a:schemeClr val="tx1">
+                    <a:lumMod val="65000"/>
+                    <a:lumOff val="35000"/>
+                  </a:schemeClr>
+                </a:solidFill>
+              </a:rPr>
+              <a:t>dobi</a:t>
+            </a:r>
+            <a:r>
+              <a:rPr lang="en-US" sz="2400" i="1" dirty="0">
+                <a:solidFill>
+                  <a:schemeClr val="tx1">
+                    <a:lumMod val="65000"/>
+                    <a:lumOff val="35000"/>
+                  </a:schemeClr>
+                </a:solidFill>
+              </a:rPr>
+              <a:t> </a:t>
+            </a:r>
+            <a:r>
+              <a:rPr lang="en-US" sz="2400" i="1" dirty="0" err="1">
+                <a:solidFill>
+                  <a:schemeClr val="tx1">
+                    <a:lumMod val="65000"/>
+                    <a:lumOff val="35000"/>
+                  </a:schemeClr>
+                </a:solidFill>
+              </a:rPr>
+              <a:t>i</a:t>
+            </a:r>
+            <a:r>
+              <a:rPr lang="en-US" sz="2400" i="1" dirty="0">
+                <a:solidFill>
+                  <a:schemeClr val="tx1">
+                    <a:lumMod val="65000"/>
+                    <a:lumOff val="35000"/>
+                  </a:schemeClr>
+                </a:solidFill>
+              </a:rPr>
+              <a:t> </a:t>
+            </a:r>
+            <a:r>
+              <a:rPr lang="en-US" sz="2400" i="1" dirty="0" err="1">
+                <a:solidFill>
+                  <a:schemeClr val="tx1">
+                    <a:lumMod val="65000"/>
+                    <a:lumOff val="35000"/>
+                  </a:schemeClr>
+                </a:solidFill>
+              </a:rPr>
+              <a:t>neću</a:t>
+            </a:r>
+            <a:r>
+              <a:rPr lang="en-US" sz="2400" i="1" dirty="0">
+                <a:solidFill>
+                  <a:schemeClr val="tx1">
+                    <a:lumMod val="65000"/>
+                    <a:lumOff val="35000"/>
+                  </a:schemeClr>
+                </a:solidFill>
+              </a:rPr>
+              <a:t> ga </a:t>
+            </a:r>
+            <a:r>
+              <a:rPr lang="en-US" sz="2400" i="1" dirty="0" err="1">
+                <a:solidFill>
+                  <a:schemeClr val="tx1">
+                    <a:lumMod val="65000"/>
+                    <a:lumOff val="35000"/>
+                  </a:schemeClr>
+                </a:solidFill>
+              </a:rPr>
+              <a:t>puno</a:t>
+            </a:r>
+            <a:r>
+              <a:rPr lang="en-US" sz="2400" i="1" dirty="0">
+                <a:solidFill>
+                  <a:schemeClr val="tx1">
+                    <a:lumMod val="65000"/>
+                    <a:lumOff val="35000"/>
+                  </a:schemeClr>
+                </a:solidFill>
+              </a:rPr>
+              <a:t> </a:t>
+            </a:r>
+            <a:r>
+              <a:rPr lang="en-US" sz="2400" i="1" dirty="0" err="1">
+                <a:solidFill>
+                  <a:schemeClr val="tx1">
+                    <a:lumMod val="65000"/>
+                    <a:lumOff val="35000"/>
+                  </a:schemeClr>
+                </a:solidFill>
+              </a:rPr>
+              <a:t>koristiti</a:t>
+            </a:r>
+            <a:r>
+              <a:rPr lang="en-US" sz="2400" i="1" dirty="0">
+                <a:solidFill>
+                  <a:schemeClr val="tx1">
+                    <a:lumMod val="65000"/>
+                    <a:lumOff val="35000"/>
+                  </a:schemeClr>
+                </a:solidFill>
+              </a:rPr>
+              <a:t>.</a:t>
+            </a:r>
+          </a:p>
+        </p:txBody>
+      </p:sp>
+      <p:sp>
+        <p:nvSpPr>
+          <p:cNvPr id="6" name="TextBox 5">
             <a:extLst>
               <a:ext uri="{FF2B5EF4-FFF2-40B4-BE49-F238E27FC236}">
-                <a16:creationId xmlns:a16="http://schemas.microsoft.com/office/drawing/2014/main" id="{DBA7CD51-8D71-EA5B-7EA5-4A95AC11DD56}"/>
+                <a16:creationId xmlns:a16="http://schemas.microsoft.com/office/drawing/2014/main" id="{C6A8B4F8-B99F-2E17-E03B-A78685C7EA2E}"/>
               </a:ext>
             </a:extLst>
           </p:cNvPr>
@@ -9920,8 +12485,8 @@
         </p:nvSpPr>
         <p:spPr>
           <a:xfrm>
-            <a:off x="6471414" y="4498107"/>
-            <a:ext cx="1199303" cy="307777"/>
+            <a:off x="311129" y="2012972"/>
+            <a:ext cx="8521740" cy="1200329"/>
           </a:xfrm>
           <a:prstGeom prst="rect">
             <a:avLst/>
@@ -9929,23 +12494,339 @@
           <a:noFill/>
         </p:spPr>
         <p:txBody>
-          <a:bodyPr wrap="none" rtlCol="0">
+          <a:bodyPr wrap="square" rtlCol="0">
             <a:spAutoFit/>
           </a:bodyPr>
           <a:lstStyle/>
           <a:p>
-            <a:r>
-              <a:rPr lang="en-US" sz="1400" i="1" dirty="0">
-                <a:solidFill>
-                  <a:schemeClr val="tx1">
-                    <a:lumMod val="65000"/>
-                    <a:lumOff val="35000"/>
-                  </a:schemeClr>
-                </a:solidFill>
-                <a:ea typeface="ADLaM Display" panose="020F0502020204030204" pitchFamily="2" charset="0"/>
-                <a:cs typeface="ADLaM Display" panose="020F0502020204030204" pitchFamily="2" charset="0"/>
-              </a:rPr>
-              <a:t>KAO ČOVJEK…</a:t>
+            <a:pPr algn="ctr"/>
+            <a:r>
+              <a:rPr lang="en-US" sz="2400" i="1" dirty="0">
+                <a:solidFill>
+                  <a:schemeClr val="accent1"/>
+                </a:solidFill>
+              </a:rPr>
+              <a:t>Za </a:t>
+            </a:r>
+            <a:r>
+              <a:rPr lang="en-US" sz="2400" i="1" dirty="0" err="1">
+                <a:solidFill>
+                  <a:schemeClr val="accent1"/>
+                </a:solidFill>
+              </a:rPr>
+              <a:t>Vaše</a:t>
+            </a:r>
+            <a:r>
+              <a:rPr lang="en-US" sz="2400" i="1" dirty="0">
+                <a:solidFill>
+                  <a:schemeClr val="accent1"/>
+                </a:solidFill>
+              </a:rPr>
+              <a:t> </a:t>
+            </a:r>
+            <a:r>
+              <a:rPr lang="en-US" sz="2400" i="1" dirty="0" err="1">
+                <a:solidFill>
+                  <a:schemeClr val="accent1"/>
+                </a:solidFill>
+              </a:rPr>
+              <a:t>potrebe</a:t>
+            </a:r>
+            <a:r>
+              <a:rPr lang="en-US" sz="2400" i="1" dirty="0">
+                <a:solidFill>
+                  <a:schemeClr val="accent1"/>
+                </a:solidFill>
+              </a:rPr>
+              <a:t> (video </a:t>
+            </a:r>
+            <a:r>
+              <a:rPr lang="en-US" sz="2400" i="1" dirty="0" err="1">
+                <a:solidFill>
+                  <a:schemeClr val="accent1"/>
+                </a:solidFill>
+              </a:rPr>
+              <a:t>pozivi</a:t>
+            </a:r>
+            <a:r>
+              <a:rPr lang="en-US" sz="2400" i="1" dirty="0">
+                <a:solidFill>
+                  <a:schemeClr val="accent1"/>
+                </a:solidFill>
+              </a:rPr>
+              <a:t>, </a:t>
+            </a:r>
+            <a:r>
+              <a:rPr lang="en-US" sz="2400" i="1" dirty="0" err="1">
+                <a:solidFill>
+                  <a:schemeClr val="accent1"/>
+                </a:solidFill>
+              </a:rPr>
+              <a:t>društvene</a:t>
+            </a:r>
+            <a:r>
+              <a:rPr lang="en-US" sz="2400" i="1" dirty="0">
+                <a:solidFill>
+                  <a:schemeClr val="accent1"/>
+                </a:solidFill>
+              </a:rPr>
+              <a:t> </a:t>
+            </a:r>
+            <a:r>
+              <a:rPr lang="en-US" sz="2400" i="1" dirty="0" err="1">
+                <a:solidFill>
+                  <a:schemeClr val="accent1"/>
+                </a:solidFill>
+              </a:rPr>
+              <a:t>mreže</a:t>
+            </a:r>
+            <a:r>
+              <a:rPr lang="en-US" sz="2400" i="1" dirty="0">
+                <a:solidFill>
+                  <a:schemeClr val="accent1"/>
+                </a:solidFill>
+              </a:rPr>
+              <a:t>, </a:t>
+            </a:r>
+            <a:r>
+              <a:rPr lang="en-US" sz="2400" i="1" dirty="0" err="1">
+                <a:solidFill>
+                  <a:schemeClr val="accent1"/>
+                </a:solidFill>
+              </a:rPr>
+              <a:t>vijesti</a:t>
+            </a:r>
+            <a:r>
+              <a:rPr lang="en-US" sz="2400" i="1" dirty="0">
+                <a:solidFill>
+                  <a:schemeClr val="accent1"/>
+                </a:solidFill>
+              </a:rPr>
+              <a:t>) </a:t>
+            </a:r>
+            <a:r>
+              <a:rPr lang="en-US" sz="2400" i="1" dirty="0" err="1">
+                <a:solidFill>
+                  <a:schemeClr val="accent1"/>
+                </a:solidFill>
+              </a:rPr>
+              <a:t>najvažnije</a:t>
+            </a:r>
+            <a:r>
+              <a:rPr lang="en-US" sz="2400" i="1" dirty="0">
+                <a:solidFill>
+                  <a:schemeClr val="accent1"/>
+                </a:solidFill>
+              </a:rPr>
+              <a:t> je da </a:t>
+            </a:r>
+            <a:r>
+              <a:rPr lang="en-US" sz="2400" i="1" dirty="0" err="1">
+                <a:solidFill>
+                  <a:schemeClr val="accent1"/>
+                </a:solidFill>
+              </a:rPr>
+              <a:t>mobitel</a:t>
+            </a:r>
+            <a:r>
+              <a:rPr lang="en-US" sz="2400" i="1" dirty="0">
+                <a:solidFill>
+                  <a:schemeClr val="accent1"/>
+                </a:solidFill>
+              </a:rPr>
+              <a:t> </a:t>
+            </a:r>
+            <a:r>
+              <a:rPr lang="en-US" sz="2400" i="1" dirty="0" err="1">
+                <a:solidFill>
+                  <a:schemeClr val="accent1"/>
+                </a:solidFill>
+              </a:rPr>
+              <a:t>bude</a:t>
+            </a:r>
+            <a:r>
+              <a:rPr lang="en-US" sz="2400" i="1" dirty="0">
+                <a:solidFill>
+                  <a:schemeClr val="accent1"/>
+                </a:solidFill>
+              </a:rPr>
+              <a:t> </a:t>
+            </a:r>
+            <a:r>
+              <a:rPr lang="en-US" sz="2400" i="1" dirty="0" err="1">
+                <a:solidFill>
+                  <a:schemeClr val="accent1"/>
+                </a:solidFill>
+              </a:rPr>
+              <a:t>jednostavan</a:t>
+            </a:r>
+            <a:r>
+              <a:rPr lang="en-US" sz="2400" i="1" dirty="0">
+                <a:solidFill>
+                  <a:schemeClr val="accent1"/>
+                </a:solidFill>
+              </a:rPr>
+              <a:t> za </a:t>
+            </a:r>
+            <a:r>
+              <a:rPr lang="en-US" sz="2400" i="1" dirty="0" err="1">
+                <a:solidFill>
+                  <a:schemeClr val="accent1"/>
+                </a:solidFill>
+              </a:rPr>
+              <a:t>korištenje</a:t>
+            </a:r>
+            <a:r>
+              <a:rPr lang="en-US" sz="2400" i="1" dirty="0">
+                <a:solidFill>
+                  <a:schemeClr val="accent1"/>
+                </a:solidFill>
+              </a:rPr>
+              <a:t>, </a:t>
+            </a:r>
+            <a:r>
+              <a:rPr lang="en-US" sz="2400" i="1" dirty="0" err="1">
+                <a:solidFill>
+                  <a:schemeClr val="accent1"/>
+                </a:solidFill>
+              </a:rPr>
+              <a:t>ima</a:t>
+            </a:r>
+            <a:r>
+              <a:rPr lang="en-US" sz="2400" i="1" dirty="0">
+                <a:solidFill>
+                  <a:schemeClr val="accent1"/>
+                </a:solidFill>
+              </a:rPr>
+              <a:t> </a:t>
+            </a:r>
+            <a:r>
+              <a:rPr lang="en-US" sz="2400" i="1" dirty="0" err="1">
+                <a:solidFill>
+                  <a:schemeClr val="accent1"/>
+                </a:solidFill>
+              </a:rPr>
+              <a:t>dobru</a:t>
+            </a:r>
+            <a:r>
+              <a:rPr lang="en-US" sz="2400" i="1" dirty="0">
+                <a:solidFill>
+                  <a:schemeClr val="accent1"/>
+                </a:solidFill>
+              </a:rPr>
+              <a:t> </a:t>
+            </a:r>
+            <a:r>
+              <a:rPr lang="en-US" sz="2400" i="1" dirty="0" err="1">
+                <a:solidFill>
+                  <a:schemeClr val="accent1"/>
+                </a:solidFill>
+              </a:rPr>
+              <a:t>bateriju</a:t>
+            </a:r>
+            <a:r>
+              <a:rPr lang="en-US" sz="2400" i="1" dirty="0">
+                <a:solidFill>
+                  <a:schemeClr val="accent1"/>
+                </a:solidFill>
+              </a:rPr>
+              <a:t> </a:t>
+            </a:r>
+            <a:r>
+              <a:rPr lang="en-US" sz="2400" i="1" dirty="0" err="1">
+                <a:solidFill>
+                  <a:schemeClr val="accent1"/>
+                </a:solidFill>
+              </a:rPr>
+              <a:t>i</a:t>
+            </a:r>
+            <a:r>
+              <a:rPr lang="en-US" sz="2400" i="1" dirty="0">
+                <a:solidFill>
+                  <a:schemeClr val="accent1"/>
+                </a:solidFill>
+              </a:rPr>
+              <a:t> </a:t>
+            </a:r>
+            <a:r>
+              <a:rPr lang="en-US" sz="2400" i="1" dirty="0" err="1">
+                <a:solidFill>
+                  <a:schemeClr val="accent1"/>
+                </a:solidFill>
+              </a:rPr>
+              <a:t>velik</a:t>
+            </a:r>
+            <a:r>
+              <a:rPr lang="en-US" sz="2400" i="1" dirty="0">
+                <a:solidFill>
+                  <a:schemeClr val="accent1"/>
+                </a:solidFill>
+              </a:rPr>
+              <a:t> </a:t>
+            </a:r>
+            <a:r>
+              <a:rPr lang="en-US" sz="2400" i="1" dirty="0" err="1">
+                <a:solidFill>
+                  <a:schemeClr val="accent1"/>
+                </a:solidFill>
+              </a:rPr>
+              <a:t>ekran</a:t>
+            </a:r>
+            <a:r>
+              <a:rPr lang="en-US" sz="2400" i="1" dirty="0">
+                <a:solidFill>
+                  <a:schemeClr val="accent1"/>
+                </a:solidFill>
+              </a:rPr>
+              <a:t> – ne </a:t>
+            </a:r>
+            <a:r>
+              <a:rPr lang="en-US" sz="2400" i="1" dirty="0" err="1">
+                <a:solidFill>
+                  <a:schemeClr val="accent1"/>
+                </a:solidFill>
+              </a:rPr>
+              <a:t>treba</a:t>
+            </a:r>
+            <a:r>
+              <a:rPr lang="en-US" sz="2400" i="1" dirty="0">
+                <a:solidFill>
+                  <a:schemeClr val="accent1"/>
+                </a:solidFill>
+              </a:rPr>
+              <a:t> Vam </a:t>
+            </a:r>
+            <a:r>
+              <a:rPr lang="en-US" sz="2400" i="1" dirty="0" err="1">
+                <a:solidFill>
+                  <a:schemeClr val="accent1"/>
+                </a:solidFill>
+              </a:rPr>
+              <a:t>skup</a:t>
+            </a:r>
+            <a:r>
+              <a:rPr lang="en-US" sz="2400" i="1" dirty="0">
+                <a:solidFill>
+                  <a:schemeClr val="accent1"/>
+                </a:solidFill>
+              </a:rPr>
+              <a:t> model. Evo </a:t>
+            </a:r>
+            <a:r>
+              <a:rPr lang="en-US" sz="2400" i="1" dirty="0" err="1">
+                <a:solidFill>
+                  <a:schemeClr val="accent1"/>
+                </a:solidFill>
+              </a:rPr>
+              <a:t>prijedloga</a:t>
+            </a:r>
+            <a:r>
+              <a:rPr lang="en-US" sz="2400" i="1" dirty="0">
+                <a:solidFill>
+                  <a:schemeClr val="accent1"/>
+                </a:solidFill>
+              </a:rPr>
+              <a:t>:</a:t>
             </a:r>
           </a:p>
         </p:txBody>
@@ -9953,7 +12834,7 @@
     </p:spTree>
     <p:extLst>
       <p:ext uri="{BB962C8B-B14F-4D97-AF65-F5344CB8AC3E}">
-        <p14:creationId xmlns:p14="http://schemas.microsoft.com/office/powerpoint/2010/main" val="1169597192"/>
+        <p14:creationId xmlns:p14="http://schemas.microsoft.com/office/powerpoint/2010/main" val="3398304053"/>
       </p:ext>
     </p:extLst>
   </p:cSld>
@@ -9982,1088 +12863,6 @@
       </p:grpSpPr>
       <p:sp>
         <p:nvSpPr>
-          <p:cNvPr id="3" name="TextBox 2">
-            <a:extLst>
-              <a:ext uri="{FF2B5EF4-FFF2-40B4-BE49-F238E27FC236}">
-                <a16:creationId xmlns:a16="http://schemas.microsoft.com/office/drawing/2014/main" id="{424BF6AE-432F-7425-469A-D74658C83F1A}"/>
-              </a:ext>
-            </a:extLst>
-          </p:cNvPr>
-          <p:cNvSpPr txBox="1"/>
-          <p:nvPr/>
-        </p:nvSpPr>
-        <p:spPr>
-          <a:xfrm>
-            <a:off x="622259" y="443312"/>
-            <a:ext cx="7899481" cy="1569660"/>
-          </a:xfrm>
-          <a:prstGeom prst="rect">
-            <a:avLst/>
-          </a:prstGeom>
-          <a:noFill/>
-        </p:spPr>
-        <p:txBody>
-          <a:bodyPr wrap="square" rtlCol="0">
-            <a:spAutoFit/>
-          </a:bodyPr>
-          <a:lstStyle/>
-          <a:p>
-            <a:pPr algn="ctr"/>
-            <a:r>
-              <a:rPr lang="en-US" sz="2400" i="1" dirty="0" err="1">
-                <a:solidFill>
-                  <a:schemeClr val="tx1">
-                    <a:lumMod val="65000"/>
-                    <a:lumOff val="35000"/>
-                  </a:schemeClr>
-                </a:solidFill>
-              </a:rPr>
-              <a:t>treba</a:t>
-            </a:r>
-            <a:r>
-              <a:rPr lang="en-US" sz="2400" i="1" dirty="0">
-                <a:solidFill>
-                  <a:schemeClr val="tx1">
-                    <a:lumMod val="65000"/>
-                    <a:lumOff val="35000"/>
-                  </a:schemeClr>
-                </a:solidFill>
-              </a:rPr>
-              <a:t> mi </a:t>
-            </a:r>
-            <a:r>
-              <a:rPr lang="en-US" sz="2400" i="1" dirty="0" err="1">
-                <a:solidFill>
-                  <a:schemeClr val="tx1">
-                    <a:lumMod val="65000"/>
-                    <a:lumOff val="35000"/>
-                  </a:schemeClr>
-                </a:solidFill>
-              </a:rPr>
-              <a:t>preporuka</a:t>
-            </a:r>
-            <a:r>
-              <a:rPr lang="en-US" sz="2400" i="1" dirty="0">
-                <a:solidFill>
-                  <a:schemeClr val="tx1">
-                    <a:lumMod val="65000"/>
-                    <a:lumOff val="35000"/>
-                  </a:schemeClr>
-                </a:solidFill>
-              </a:rPr>
-              <a:t> za novi </a:t>
-            </a:r>
-            <a:r>
-              <a:rPr lang="en-US" sz="2400" i="1" dirty="0" err="1">
-                <a:solidFill>
-                  <a:schemeClr val="tx1">
-                    <a:lumMod val="65000"/>
-                    <a:lumOff val="35000"/>
-                  </a:schemeClr>
-                </a:solidFill>
-              </a:rPr>
-              <a:t>mobitel</a:t>
-            </a:r>
-            <a:r>
-              <a:rPr lang="en-US" sz="2400" i="1" dirty="0">
-                <a:solidFill>
-                  <a:schemeClr val="tx1">
-                    <a:lumMod val="65000"/>
-                    <a:lumOff val="35000"/>
-                  </a:schemeClr>
-                </a:solidFill>
-              </a:rPr>
-              <a:t>, </a:t>
-            </a:r>
-            <a:r>
-              <a:rPr lang="en-US" sz="2400" i="1" dirty="0" err="1">
-                <a:solidFill>
-                  <a:schemeClr val="tx1">
-                    <a:lumMod val="65000"/>
-                    <a:lumOff val="35000"/>
-                  </a:schemeClr>
-                </a:solidFill>
-              </a:rPr>
-              <a:t>koristit</a:t>
-            </a:r>
-            <a:r>
-              <a:rPr lang="en-US" sz="2400" i="1" dirty="0">
-                <a:solidFill>
-                  <a:schemeClr val="tx1">
-                    <a:lumMod val="65000"/>
-                    <a:lumOff val="35000"/>
-                  </a:schemeClr>
-                </a:solidFill>
-              </a:rPr>
-              <a:t> </a:t>
-            </a:r>
-            <a:r>
-              <a:rPr lang="en-US" sz="2400" i="1" dirty="0" err="1">
-                <a:solidFill>
-                  <a:schemeClr val="tx1">
-                    <a:lumMod val="65000"/>
-                    <a:lumOff val="35000"/>
-                  </a:schemeClr>
-                </a:solidFill>
-              </a:rPr>
-              <a:t>ću</a:t>
-            </a:r>
-            <a:r>
-              <a:rPr lang="en-US" sz="2400" i="1" dirty="0">
-                <a:solidFill>
-                  <a:schemeClr val="tx1">
-                    <a:lumMod val="65000"/>
-                    <a:lumOff val="35000"/>
-                  </a:schemeClr>
-                </a:solidFill>
-              </a:rPr>
-              <a:t> ga za video </a:t>
-            </a:r>
-            <a:r>
-              <a:rPr lang="en-US" sz="2400" i="1" dirty="0" err="1">
-                <a:solidFill>
-                  <a:schemeClr val="tx1">
-                    <a:lumMod val="65000"/>
-                    <a:lumOff val="35000"/>
-                  </a:schemeClr>
-                </a:solidFill>
-              </a:rPr>
-              <a:t>pozive</a:t>
-            </a:r>
-            <a:r>
-              <a:rPr lang="en-US" sz="2400" i="1" dirty="0">
-                <a:solidFill>
-                  <a:schemeClr val="tx1">
-                    <a:lumMod val="65000"/>
-                    <a:lumOff val="35000"/>
-                  </a:schemeClr>
-                </a:solidFill>
-              </a:rPr>
-              <a:t> s </a:t>
-            </a:r>
-            <a:r>
-              <a:rPr lang="en-US" sz="2400" i="1" dirty="0" err="1">
-                <a:solidFill>
-                  <a:schemeClr val="tx1">
-                    <a:lumMod val="65000"/>
-                    <a:lumOff val="35000"/>
-                  </a:schemeClr>
-                </a:solidFill>
-              </a:rPr>
-              <a:t>obitelji</a:t>
-            </a:r>
-            <a:r>
-              <a:rPr lang="en-US" sz="2400" i="1" dirty="0">
-                <a:solidFill>
-                  <a:schemeClr val="tx1">
-                    <a:lumMod val="65000"/>
-                    <a:lumOff val="35000"/>
-                  </a:schemeClr>
-                </a:solidFill>
-              </a:rPr>
-              <a:t>, </a:t>
-            </a:r>
-            <a:r>
-              <a:rPr lang="en-US" sz="2400" i="1" dirty="0" err="1">
-                <a:solidFill>
-                  <a:schemeClr val="tx1">
-                    <a:lumMod val="65000"/>
-                    <a:lumOff val="35000"/>
-                  </a:schemeClr>
-                </a:solidFill>
-              </a:rPr>
-              <a:t>društvene</a:t>
-            </a:r>
-            <a:r>
-              <a:rPr lang="en-US" sz="2400" i="1" dirty="0">
-                <a:solidFill>
-                  <a:schemeClr val="tx1">
-                    <a:lumMod val="65000"/>
-                    <a:lumOff val="35000"/>
-                  </a:schemeClr>
-                </a:solidFill>
-              </a:rPr>
-              <a:t> </a:t>
-            </a:r>
-            <a:r>
-              <a:rPr lang="en-US" sz="2400" i="1" dirty="0" err="1">
-                <a:solidFill>
-                  <a:schemeClr val="tx1">
-                    <a:lumMod val="65000"/>
-                    <a:lumOff val="35000"/>
-                  </a:schemeClr>
-                </a:solidFill>
-              </a:rPr>
-              <a:t>mreže</a:t>
-            </a:r>
-            <a:r>
-              <a:rPr lang="en-US" sz="2400" i="1" dirty="0">
-                <a:solidFill>
-                  <a:schemeClr val="tx1">
-                    <a:lumMod val="65000"/>
-                    <a:lumOff val="35000"/>
-                  </a:schemeClr>
-                </a:solidFill>
-              </a:rPr>
-              <a:t> </a:t>
-            </a:r>
-            <a:r>
-              <a:rPr lang="en-US" sz="2400" i="1" dirty="0" err="1">
-                <a:solidFill>
-                  <a:schemeClr val="tx1">
-                    <a:lumMod val="65000"/>
-                    <a:lumOff val="35000"/>
-                  </a:schemeClr>
-                </a:solidFill>
-              </a:rPr>
-              <a:t>te</a:t>
-            </a:r>
-            <a:r>
-              <a:rPr lang="en-US" sz="2400" i="1" dirty="0">
-                <a:solidFill>
-                  <a:schemeClr val="tx1">
-                    <a:lumMod val="65000"/>
-                    <a:lumOff val="35000"/>
-                  </a:schemeClr>
-                </a:solidFill>
-              </a:rPr>
-              <a:t> </a:t>
-            </a:r>
-            <a:r>
-              <a:rPr lang="en-US" sz="2400" i="1" dirty="0" err="1">
-                <a:solidFill>
-                  <a:schemeClr val="tx1">
-                    <a:lumMod val="65000"/>
-                    <a:lumOff val="35000"/>
-                  </a:schemeClr>
-                </a:solidFill>
-              </a:rPr>
-              <a:t>čitanje</a:t>
-            </a:r>
-            <a:r>
-              <a:rPr lang="en-US" sz="2400" i="1" dirty="0">
-                <a:solidFill>
-                  <a:schemeClr val="tx1">
-                    <a:lumMod val="65000"/>
-                    <a:lumOff val="35000"/>
-                  </a:schemeClr>
-                </a:solidFill>
-              </a:rPr>
-              <a:t> </a:t>
-            </a:r>
-            <a:r>
-              <a:rPr lang="en-US" sz="2400" i="1" dirty="0" err="1">
-                <a:solidFill>
-                  <a:schemeClr val="tx1">
-                    <a:lumMod val="65000"/>
-                    <a:lumOff val="35000"/>
-                  </a:schemeClr>
-                </a:solidFill>
-              </a:rPr>
-              <a:t>vijesti</a:t>
-            </a:r>
-            <a:r>
-              <a:rPr lang="en-US" sz="2400" i="1" dirty="0">
-                <a:solidFill>
-                  <a:schemeClr val="tx1">
-                    <a:lumMod val="65000"/>
-                    <a:lumOff val="35000"/>
-                  </a:schemeClr>
-                </a:solidFill>
-              </a:rPr>
-              <a:t>. </a:t>
-            </a:r>
-            <a:r>
-              <a:rPr lang="en-US" sz="2400" i="1" dirty="0" err="1">
-                <a:solidFill>
-                  <a:schemeClr val="tx1">
-                    <a:lumMod val="65000"/>
-                    <a:lumOff val="35000"/>
-                  </a:schemeClr>
-                </a:solidFill>
-              </a:rPr>
-              <a:t>preporuči</a:t>
-            </a:r>
-            <a:r>
-              <a:rPr lang="en-US" sz="2400" i="1" dirty="0">
-                <a:solidFill>
-                  <a:schemeClr val="tx1">
-                    <a:lumMod val="65000"/>
-                    <a:lumOff val="35000"/>
-                  </a:schemeClr>
-                </a:solidFill>
-              </a:rPr>
-              <a:t> mi </a:t>
-            </a:r>
-            <a:r>
-              <a:rPr lang="en-US" sz="2400" i="1" dirty="0" err="1">
-                <a:solidFill>
-                  <a:schemeClr val="tx1">
-                    <a:lumMod val="65000"/>
-                    <a:lumOff val="35000"/>
-                  </a:schemeClr>
-                </a:solidFill>
-              </a:rPr>
-              <a:t>i</a:t>
-            </a:r>
-            <a:r>
-              <a:rPr lang="en-US" sz="2400" i="1" dirty="0">
-                <a:solidFill>
-                  <a:schemeClr val="tx1">
-                    <a:lumMod val="65000"/>
-                    <a:lumOff val="35000"/>
-                  </a:schemeClr>
-                </a:solidFill>
-              </a:rPr>
-              <a:t> </a:t>
-            </a:r>
-            <a:r>
-              <a:rPr lang="en-US" sz="2400" i="1" dirty="0" err="1">
-                <a:solidFill>
-                  <a:schemeClr val="tx1">
-                    <a:lumMod val="65000"/>
-                    <a:lumOff val="35000"/>
-                  </a:schemeClr>
-                </a:solidFill>
-              </a:rPr>
-              <a:t>aplikacije</a:t>
-            </a:r>
-            <a:r>
-              <a:rPr lang="en-US" sz="2400" i="1" dirty="0">
-                <a:solidFill>
-                  <a:schemeClr val="tx1">
-                    <a:lumMod val="65000"/>
-                    <a:lumOff val="35000"/>
-                  </a:schemeClr>
-                </a:solidFill>
-              </a:rPr>
-              <a:t> </a:t>
-            </a:r>
-            <a:r>
-              <a:rPr lang="en-US" sz="2400" i="1" dirty="0" err="1">
-                <a:solidFill>
-                  <a:schemeClr val="tx1">
-                    <a:lumMod val="65000"/>
-                    <a:lumOff val="35000"/>
-                  </a:schemeClr>
-                </a:solidFill>
-              </a:rPr>
-              <a:t>koje</a:t>
-            </a:r>
-            <a:r>
-              <a:rPr lang="en-US" sz="2400" i="1" dirty="0">
-                <a:solidFill>
-                  <a:schemeClr val="tx1">
-                    <a:lumMod val="65000"/>
-                    <a:lumOff val="35000"/>
-                  </a:schemeClr>
-                </a:solidFill>
-              </a:rPr>
-              <a:t> da </a:t>
-            </a:r>
-            <a:r>
-              <a:rPr lang="en-US" sz="2400" i="1" dirty="0" err="1">
-                <a:solidFill>
-                  <a:schemeClr val="tx1">
-                    <a:lumMod val="65000"/>
-                    <a:lumOff val="35000"/>
-                  </a:schemeClr>
-                </a:solidFill>
-              </a:rPr>
-              <a:t>preuzmem</a:t>
-            </a:r>
-            <a:r>
-              <a:rPr lang="en-US" sz="2400" i="1" dirty="0">
-                <a:solidFill>
-                  <a:schemeClr val="tx1">
-                    <a:lumMod val="65000"/>
-                    <a:lumOff val="35000"/>
-                  </a:schemeClr>
-                </a:solidFill>
-              </a:rPr>
-              <a:t> u </a:t>
-            </a:r>
-            <a:r>
-              <a:rPr lang="en-US" sz="2400" i="1" dirty="0" err="1">
-                <a:solidFill>
-                  <a:schemeClr val="tx1">
-                    <a:lumMod val="65000"/>
-                    <a:lumOff val="35000"/>
-                  </a:schemeClr>
-                </a:solidFill>
-              </a:rPr>
-              <a:t>trgovini</a:t>
-            </a:r>
-            <a:r>
-              <a:rPr lang="en-US" sz="2400" i="1" dirty="0">
-                <a:solidFill>
-                  <a:schemeClr val="tx1">
-                    <a:lumMod val="65000"/>
-                    <a:lumOff val="35000"/>
-                  </a:schemeClr>
-                </a:solidFill>
-              </a:rPr>
-              <a:t>. </a:t>
-            </a:r>
-            <a:r>
-              <a:rPr lang="en-US" sz="2400" i="1" dirty="0" err="1">
-                <a:solidFill>
-                  <a:schemeClr val="tx1">
-                    <a:lumMod val="65000"/>
-                    <a:lumOff val="35000"/>
-                  </a:schemeClr>
-                </a:solidFill>
-              </a:rPr>
-              <a:t>mobitel</a:t>
-            </a:r>
-            <a:r>
-              <a:rPr lang="en-US" sz="2400" i="1" dirty="0">
-                <a:solidFill>
-                  <a:schemeClr val="tx1">
-                    <a:lumMod val="65000"/>
-                    <a:lumOff val="35000"/>
-                  </a:schemeClr>
-                </a:solidFill>
-              </a:rPr>
-              <a:t> </a:t>
-            </a:r>
-            <a:r>
-              <a:rPr lang="en-US" sz="2400" i="1" dirty="0" err="1">
-                <a:solidFill>
-                  <a:schemeClr val="tx1">
-                    <a:lumMod val="65000"/>
-                    <a:lumOff val="35000"/>
-                  </a:schemeClr>
-                </a:solidFill>
-              </a:rPr>
-              <a:t>treba</a:t>
-            </a:r>
-            <a:r>
-              <a:rPr lang="en-US" sz="2400" i="1" dirty="0">
-                <a:solidFill>
-                  <a:schemeClr val="tx1">
-                    <a:lumMod val="65000"/>
-                    <a:lumOff val="35000"/>
-                  </a:schemeClr>
-                </a:solidFill>
-              </a:rPr>
-              <a:t> </a:t>
-            </a:r>
-            <a:r>
-              <a:rPr lang="en-US" sz="2400" i="1" dirty="0" err="1">
-                <a:solidFill>
-                  <a:schemeClr val="tx1">
-                    <a:lumMod val="65000"/>
-                    <a:lumOff val="35000"/>
-                  </a:schemeClr>
-                </a:solidFill>
-              </a:rPr>
-              <a:t>biti</a:t>
-            </a:r>
-            <a:r>
-              <a:rPr lang="en-US" sz="2400" i="1" dirty="0">
-                <a:solidFill>
-                  <a:schemeClr val="tx1">
-                    <a:lumMod val="65000"/>
-                    <a:lumOff val="35000"/>
-                  </a:schemeClr>
-                </a:solidFill>
-              </a:rPr>
-              <a:t> </a:t>
-            </a:r>
-            <a:r>
-              <a:rPr lang="en-US" sz="2400" i="1" dirty="0" err="1">
-                <a:solidFill>
-                  <a:schemeClr val="tx1">
-                    <a:lumMod val="65000"/>
-                    <a:lumOff val="35000"/>
-                  </a:schemeClr>
-                </a:solidFill>
-              </a:rPr>
-              <a:t>povoljan</a:t>
-            </a:r>
-            <a:r>
-              <a:rPr lang="en-US" sz="2400" i="1" dirty="0">
-                <a:solidFill>
-                  <a:schemeClr val="tx1">
-                    <a:lumMod val="65000"/>
-                    <a:lumOff val="35000"/>
-                  </a:schemeClr>
-                </a:solidFill>
-              </a:rPr>
-              <a:t>. </a:t>
-            </a:r>
-            <a:r>
-              <a:rPr lang="en-US" sz="2400" i="1" dirty="0" err="1">
-                <a:solidFill>
-                  <a:schemeClr val="tx1">
-                    <a:lumMod val="65000"/>
-                    <a:lumOff val="35000"/>
-                  </a:schemeClr>
-                </a:solidFill>
-              </a:rPr>
-              <a:t>starije</a:t>
-            </a:r>
-            <a:r>
-              <a:rPr lang="en-US" sz="2400" i="1" dirty="0">
-                <a:solidFill>
-                  <a:schemeClr val="tx1">
-                    <a:lumMod val="65000"/>
-                    <a:lumOff val="35000"/>
-                  </a:schemeClr>
-                </a:solidFill>
-              </a:rPr>
-              <a:t> </a:t>
-            </a:r>
-            <a:r>
-              <a:rPr lang="en-US" sz="2400" i="1" dirty="0" err="1">
-                <a:solidFill>
-                  <a:schemeClr val="tx1">
-                    <a:lumMod val="65000"/>
-                    <a:lumOff val="35000"/>
-                  </a:schemeClr>
-                </a:solidFill>
-              </a:rPr>
-              <a:t>sam</a:t>
-            </a:r>
-            <a:r>
-              <a:rPr lang="en-US" sz="2400" i="1" dirty="0">
-                <a:solidFill>
-                  <a:schemeClr val="tx1">
-                    <a:lumMod val="65000"/>
-                    <a:lumOff val="35000"/>
-                  </a:schemeClr>
-                </a:solidFill>
-              </a:rPr>
-              <a:t> </a:t>
-            </a:r>
-            <a:r>
-              <a:rPr lang="en-US" sz="2400" i="1" dirty="0" err="1">
-                <a:solidFill>
-                  <a:schemeClr val="tx1">
-                    <a:lumMod val="65000"/>
-                    <a:lumOff val="35000"/>
-                  </a:schemeClr>
-                </a:solidFill>
-              </a:rPr>
-              <a:t>životne</a:t>
-            </a:r>
-            <a:r>
-              <a:rPr lang="en-US" sz="2400" i="1" dirty="0">
-                <a:solidFill>
-                  <a:schemeClr val="tx1">
-                    <a:lumMod val="65000"/>
-                    <a:lumOff val="35000"/>
-                  </a:schemeClr>
-                </a:solidFill>
-              </a:rPr>
-              <a:t> </a:t>
-            </a:r>
-            <a:r>
-              <a:rPr lang="en-US" sz="2400" i="1" dirty="0" err="1">
-                <a:solidFill>
-                  <a:schemeClr val="tx1">
-                    <a:lumMod val="65000"/>
-                    <a:lumOff val="35000"/>
-                  </a:schemeClr>
-                </a:solidFill>
-              </a:rPr>
-              <a:t>dobi</a:t>
-            </a:r>
-            <a:r>
-              <a:rPr lang="en-US" sz="2400" i="1" dirty="0">
-                <a:solidFill>
-                  <a:schemeClr val="tx1">
-                    <a:lumMod val="65000"/>
-                    <a:lumOff val="35000"/>
-                  </a:schemeClr>
-                </a:solidFill>
-              </a:rPr>
-              <a:t> </a:t>
-            </a:r>
-            <a:r>
-              <a:rPr lang="en-US" sz="2400" i="1" dirty="0" err="1">
-                <a:solidFill>
-                  <a:schemeClr val="tx1">
-                    <a:lumMod val="65000"/>
-                    <a:lumOff val="35000"/>
-                  </a:schemeClr>
-                </a:solidFill>
-              </a:rPr>
-              <a:t>i</a:t>
-            </a:r>
-            <a:r>
-              <a:rPr lang="en-US" sz="2400" i="1" dirty="0">
-                <a:solidFill>
-                  <a:schemeClr val="tx1">
-                    <a:lumMod val="65000"/>
-                    <a:lumOff val="35000"/>
-                  </a:schemeClr>
-                </a:solidFill>
-              </a:rPr>
-              <a:t> </a:t>
-            </a:r>
-            <a:r>
-              <a:rPr lang="en-US" sz="2400" i="1" dirty="0" err="1">
-                <a:solidFill>
-                  <a:schemeClr val="tx1">
-                    <a:lumMod val="65000"/>
-                    <a:lumOff val="35000"/>
-                  </a:schemeClr>
-                </a:solidFill>
-              </a:rPr>
-              <a:t>neću</a:t>
-            </a:r>
-            <a:r>
-              <a:rPr lang="en-US" sz="2400" i="1" dirty="0">
-                <a:solidFill>
-                  <a:schemeClr val="tx1">
-                    <a:lumMod val="65000"/>
-                    <a:lumOff val="35000"/>
-                  </a:schemeClr>
-                </a:solidFill>
-              </a:rPr>
-              <a:t> ga </a:t>
-            </a:r>
-            <a:r>
-              <a:rPr lang="en-US" sz="2400" i="1" dirty="0" err="1">
-                <a:solidFill>
-                  <a:schemeClr val="tx1">
-                    <a:lumMod val="65000"/>
-                    <a:lumOff val="35000"/>
-                  </a:schemeClr>
-                </a:solidFill>
-              </a:rPr>
-              <a:t>puno</a:t>
-            </a:r>
-            <a:r>
-              <a:rPr lang="en-US" sz="2400" i="1" dirty="0">
-                <a:solidFill>
-                  <a:schemeClr val="tx1">
-                    <a:lumMod val="65000"/>
-                    <a:lumOff val="35000"/>
-                  </a:schemeClr>
-                </a:solidFill>
-              </a:rPr>
-              <a:t> </a:t>
-            </a:r>
-            <a:r>
-              <a:rPr lang="en-US" sz="2400" i="1" dirty="0" err="1">
-                <a:solidFill>
-                  <a:schemeClr val="tx1">
-                    <a:lumMod val="65000"/>
-                    <a:lumOff val="35000"/>
-                  </a:schemeClr>
-                </a:solidFill>
-              </a:rPr>
-              <a:t>koristiti</a:t>
-            </a:r>
-            <a:r>
-              <a:rPr lang="en-US" sz="2400" i="1" dirty="0">
-                <a:solidFill>
-                  <a:schemeClr val="tx1">
-                    <a:lumMod val="65000"/>
-                    <a:lumOff val="35000"/>
-                  </a:schemeClr>
-                </a:solidFill>
-              </a:rPr>
-              <a:t>.</a:t>
-            </a:r>
-          </a:p>
-        </p:txBody>
-      </p:sp>
-      <p:sp>
-        <p:nvSpPr>
-          <p:cNvPr id="6" name="TextBox 5">
-            <a:extLst>
-              <a:ext uri="{FF2B5EF4-FFF2-40B4-BE49-F238E27FC236}">
-                <a16:creationId xmlns:a16="http://schemas.microsoft.com/office/drawing/2014/main" id="{C6A8B4F8-B99F-2E17-E03B-A78685C7EA2E}"/>
-              </a:ext>
-            </a:extLst>
-          </p:cNvPr>
-          <p:cNvSpPr txBox="1"/>
-          <p:nvPr/>
-        </p:nvSpPr>
-        <p:spPr>
-          <a:xfrm>
-            <a:off x="311129" y="2012972"/>
-            <a:ext cx="8521740" cy="1200329"/>
-          </a:xfrm>
-          <a:prstGeom prst="rect">
-            <a:avLst/>
-          </a:prstGeom>
-          <a:noFill/>
-        </p:spPr>
-        <p:txBody>
-          <a:bodyPr wrap="square" rtlCol="0">
-            <a:spAutoFit/>
-          </a:bodyPr>
-          <a:lstStyle/>
-          <a:p>
-            <a:pPr algn="ctr"/>
-            <a:r>
-              <a:rPr lang="en-US" sz="2400" i="1" dirty="0">
-                <a:solidFill>
-                  <a:schemeClr val="accent1"/>
-                </a:solidFill>
-              </a:rPr>
-              <a:t>Za </a:t>
-            </a:r>
-            <a:r>
-              <a:rPr lang="en-US" sz="2400" i="1" dirty="0" err="1">
-                <a:solidFill>
-                  <a:schemeClr val="accent1"/>
-                </a:solidFill>
-              </a:rPr>
-              <a:t>Vaše</a:t>
-            </a:r>
-            <a:r>
-              <a:rPr lang="en-US" sz="2400" i="1" dirty="0">
-                <a:solidFill>
-                  <a:schemeClr val="accent1"/>
-                </a:solidFill>
-              </a:rPr>
-              <a:t> </a:t>
-            </a:r>
-            <a:r>
-              <a:rPr lang="en-US" sz="2400" i="1" dirty="0" err="1">
-                <a:solidFill>
-                  <a:schemeClr val="accent1"/>
-                </a:solidFill>
-              </a:rPr>
-              <a:t>potrebe</a:t>
-            </a:r>
-            <a:r>
-              <a:rPr lang="en-US" sz="2400" i="1" dirty="0">
-                <a:solidFill>
-                  <a:schemeClr val="accent1"/>
-                </a:solidFill>
-              </a:rPr>
-              <a:t> (video </a:t>
-            </a:r>
-            <a:r>
-              <a:rPr lang="en-US" sz="2400" i="1" dirty="0" err="1">
-                <a:solidFill>
-                  <a:schemeClr val="accent1"/>
-                </a:solidFill>
-              </a:rPr>
-              <a:t>pozivi</a:t>
-            </a:r>
-            <a:r>
-              <a:rPr lang="en-US" sz="2400" i="1" dirty="0">
-                <a:solidFill>
-                  <a:schemeClr val="accent1"/>
-                </a:solidFill>
-              </a:rPr>
-              <a:t>, </a:t>
-            </a:r>
-            <a:r>
-              <a:rPr lang="en-US" sz="2400" i="1" dirty="0" err="1">
-                <a:solidFill>
-                  <a:schemeClr val="accent1"/>
-                </a:solidFill>
-              </a:rPr>
-              <a:t>društvene</a:t>
-            </a:r>
-            <a:r>
-              <a:rPr lang="en-US" sz="2400" i="1" dirty="0">
-                <a:solidFill>
-                  <a:schemeClr val="accent1"/>
-                </a:solidFill>
-              </a:rPr>
-              <a:t> </a:t>
-            </a:r>
-            <a:r>
-              <a:rPr lang="en-US" sz="2400" i="1" dirty="0" err="1">
-                <a:solidFill>
-                  <a:schemeClr val="accent1"/>
-                </a:solidFill>
-              </a:rPr>
-              <a:t>mreže</a:t>
-            </a:r>
-            <a:r>
-              <a:rPr lang="en-US" sz="2400" i="1" dirty="0">
-                <a:solidFill>
-                  <a:schemeClr val="accent1"/>
-                </a:solidFill>
-              </a:rPr>
-              <a:t>, </a:t>
-            </a:r>
-            <a:r>
-              <a:rPr lang="en-US" sz="2400" i="1" dirty="0" err="1">
-                <a:solidFill>
-                  <a:schemeClr val="accent1"/>
-                </a:solidFill>
-              </a:rPr>
-              <a:t>vijesti</a:t>
-            </a:r>
-            <a:r>
-              <a:rPr lang="en-US" sz="2400" i="1" dirty="0">
-                <a:solidFill>
-                  <a:schemeClr val="accent1"/>
-                </a:solidFill>
-              </a:rPr>
-              <a:t>) </a:t>
-            </a:r>
-            <a:r>
-              <a:rPr lang="en-US" sz="2400" i="1" dirty="0" err="1">
-                <a:solidFill>
-                  <a:schemeClr val="accent1"/>
-                </a:solidFill>
-              </a:rPr>
-              <a:t>najvažnije</a:t>
-            </a:r>
-            <a:r>
-              <a:rPr lang="en-US" sz="2400" i="1" dirty="0">
-                <a:solidFill>
-                  <a:schemeClr val="accent1"/>
-                </a:solidFill>
-              </a:rPr>
-              <a:t> je da </a:t>
-            </a:r>
-            <a:r>
-              <a:rPr lang="en-US" sz="2400" i="1" dirty="0" err="1">
-                <a:solidFill>
-                  <a:schemeClr val="accent1"/>
-                </a:solidFill>
-              </a:rPr>
-              <a:t>mobitel</a:t>
-            </a:r>
-            <a:r>
-              <a:rPr lang="en-US" sz="2400" i="1" dirty="0">
-                <a:solidFill>
-                  <a:schemeClr val="accent1"/>
-                </a:solidFill>
-              </a:rPr>
-              <a:t> </a:t>
-            </a:r>
-            <a:r>
-              <a:rPr lang="en-US" sz="2400" i="1" dirty="0" err="1">
-                <a:solidFill>
-                  <a:schemeClr val="accent1"/>
-                </a:solidFill>
-              </a:rPr>
-              <a:t>bude</a:t>
-            </a:r>
-            <a:r>
-              <a:rPr lang="en-US" sz="2400" i="1" dirty="0">
-                <a:solidFill>
-                  <a:schemeClr val="accent1"/>
-                </a:solidFill>
-              </a:rPr>
-              <a:t> </a:t>
-            </a:r>
-            <a:r>
-              <a:rPr lang="en-US" sz="2400" i="1" dirty="0" err="1">
-                <a:solidFill>
-                  <a:schemeClr val="accent1"/>
-                </a:solidFill>
-              </a:rPr>
-              <a:t>jednostavan</a:t>
-            </a:r>
-            <a:r>
-              <a:rPr lang="en-US" sz="2400" i="1" dirty="0">
-                <a:solidFill>
-                  <a:schemeClr val="accent1"/>
-                </a:solidFill>
-              </a:rPr>
-              <a:t> za </a:t>
-            </a:r>
-            <a:r>
-              <a:rPr lang="en-US" sz="2400" i="1" dirty="0" err="1">
-                <a:solidFill>
-                  <a:schemeClr val="accent1"/>
-                </a:solidFill>
-              </a:rPr>
-              <a:t>korištenje</a:t>
-            </a:r>
-            <a:r>
-              <a:rPr lang="en-US" sz="2400" i="1" dirty="0">
-                <a:solidFill>
-                  <a:schemeClr val="accent1"/>
-                </a:solidFill>
-              </a:rPr>
-              <a:t>, </a:t>
-            </a:r>
-            <a:r>
-              <a:rPr lang="en-US" sz="2400" i="1" dirty="0" err="1">
-                <a:solidFill>
-                  <a:schemeClr val="accent1"/>
-                </a:solidFill>
-              </a:rPr>
-              <a:t>ima</a:t>
-            </a:r>
-            <a:r>
-              <a:rPr lang="en-US" sz="2400" i="1" dirty="0">
-                <a:solidFill>
-                  <a:schemeClr val="accent1"/>
-                </a:solidFill>
-              </a:rPr>
-              <a:t> </a:t>
-            </a:r>
-            <a:r>
-              <a:rPr lang="en-US" sz="2400" i="1" dirty="0" err="1">
-                <a:solidFill>
-                  <a:schemeClr val="accent1"/>
-                </a:solidFill>
-              </a:rPr>
-              <a:t>dobru</a:t>
-            </a:r>
-            <a:r>
-              <a:rPr lang="en-US" sz="2400" i="1" dirty="0">
-                <a:solidFill>
-                  <a:schemeClr val="accent1"/>
-                </a:solidFill>
-              </a:rPr>
-              <a:t> </a:t>
-            </a:r>
-            <a:r>
-              <a:rPr lang="en-US" sz="2400" i="1" dirty="0" err="1">
-                <a:solidFill>
-                  <a:schemeClr val="accent1"/>
-                </a:solidFill>
-              </a:rPr>
-              <a:t>bateriju</a:t>
-            </a:r>
-            <a:r>
-              <a:rPr lang="en-US" sz="2400" i="1" dirty="0">
-                <a:solidFill>
-                  <a:schemeClr val="accent1"/>
-                </a:solidFill>
-              </a:rPr>
-              <a:t> </a:t>
-            </a:r>
-            <a:r>
-              <a:rPr lang="en-US" sz="2400" i="1" dirty="0" err="1">
-                <a:solidFill>
-                  <a:schemeClr val="accent1"/>
-                </a:solidFill>
-              </a:rPr>
-              <a:t>i</a:t>
-            </a:r>
-            <a:r>
-              <a:rPr lang="en-US" sz="2400" i="1" dirty="0">
-                <a:solidFill>
-                  <a:schemeClr val="accent1"/>
-                </a:solidFill>
-              </a:rPr>
-              <a:t> </a:t>
-            </a:r>
-            <a:r>
-              <a:rPr lang="en-US" sz="2400" i="1" dirty="0" err="1">
-                <a:solidFill>
-                  <a:schemeClr val="accent1"/>
-                </a:solidFill>
-              </a:rPr>
-              <a:t>velik</a:t>
-            </a:r>
-            <a:r>
-              <a:rPr lang="en-US" sz="2400" i="1" dirty="0">
-                <a:solidFill>
-                  <a:schemeClr val="accent1"/>
-                </a:solidFill>
-              </a:rPr>
-              <a:t> </a:t>
-            </a:r>
-            <a:r>
-              <a:rPr lang="en-US" sz="2400" i="1" dirty="0" err="1">
-                <a:solidFill>
-                  <a:schemeClr val="accent1"/>
-                </a:solidFill>
-              </a:rPr>
-              <a:t>ekran</a:t>
-            </a:r>
-            <a:r>
-              <a:rPr lang="en-US" sz="2400" i="1" dirty="0">
-                <a:solidFill>
-                  <a:schemeClr val="accent1"/>
-                </a:solidFill>
-              </a:rPr>
-              <a:t> – ne </a:t>
-            </a:r>
-            <a:r>
-              <a:rPr lang="en-US" sz="2400" i="1" dirty="0" err="1">
-                <a:solidFill>
-                  <a:schemeClr val="accent1"/>
-                </a:solidFill>
-              </a:rPr>
-              <a:t>treba</a:t>
-            </a:r>
-            <a:r>
-              <a:rPr lang="en-US" sz="2400" i="1" dirty="0">
-                <a:solidFill>
-                  <a:schemeClr val="accent1"/>
-                </a:solidFill>
-              </a:rPr>
-              <a:t> Vam </a:t>
-            </a:r>
-            <a:r>
-              <a:rPr lang="en-US" sz="2400" i="1" dirty="0" err="1">
-                <a:solidFill>
-                  <a:schemeClr val="accent1"/>
-                </a:solidFill>
-              </a:rPr>
-              <a:t>skup</a:t>
-            </a:r>
-            <a:r>
-              <a:rPr lang="en-US" sz="2400" i="1" dirty="0">
-                <a:solidFill>
-                  <a:schemeClr val="accent1"/>
-                </a:solidFill>
-              </a:rPr>
-              <a:t> model. Evo </a:t>
-            </a:r>
-            <a:r>
-              <a:rPr lang="en-US" sz="2400" i="1" dirty="0" err="1">
-                <a:solidFill>
-                  <a:schemeClr val="accent1"/>
-                </a:solidFill>
-              </a:rPr>
-              <a:t>prijedloga</a:t>
-            </a:r>
-            <a:r>
-              <a:rPr lang="en-US" sz="2400" i="1" dirty="0">
-                <a:solidFill>
-                  <a:schemeClr val="accent1"/>
-                </a:solidFill>
-              </a:rPr>
-              <a:t>:</a:t>
-            </a:r>
-          </a:p>
-        </p:txBody>
-      </p:sp>
-    </p:spTree>
-    <p:extLst>
-      <p:ext uri="{BB962C8B-B14F-4D97-AF65-F5344CB8AC3E}">
-        <p14:creationId xmlns:p14="http://schemas.microsoft.com/office/powerpoint/2010/main" val="3398304053"/>
-      </p:ext>
-    </p:extLst>
-  </p:cSld>
-  <p:clrMapOvr>
-    <a:masterClrMapping/>
-  </p:clrMapOvr>
-</p:sld>
-</file>
-
-<file path=ppt/slides/slide6.xml><?xml version="1.0" encoding="utf-8"?>
-<p:sld xmlns:a="http://schemas.openxmlformats.org/drawingml/2006/main" xmlns:r="http://schemas.openxmlformats.org/officeDocument/2006/relationships" xmlns:p="http://schemas.openxmlformats.org/presentationml/2006/main">
-  <p:cSld>
-    <p:spTree>
-      <p:nvGrpSpPr>
-        <p:cNvPr id="1" name=""/>
-        <p:cNvGrpSpPr/>
-        <p:nvPr/>
-      </p:nvGrpSpPr>
-      <p:grpSpPr>
-        <a:xfrm>
-          <a:off x="0" y="0"/>
-          <a:ext cx="0" cy="0"/>
-          <a:chOff x="0" y="0"/>
-          <a:chExt cx="0" cy="0"/>
-        </a:xfrm>
-      </p:grpSpPr>
-      <p:sp>
-        <p:nvSpPr>
           <p:cNvPr id="2" name="TextBox 1">
             <a:extLst>
               <a:ext uri="{FF2B5EF4-FFF2-40B4-BE49-F238E27FC236}">
@@ -12092,7 +13891,7 @@
 </p:sld>
 </file>
 
-<file path=ppt/slides/slide7.xml><?xml version="1.0" encoding="utf-8"?>
+<file path=ppt/slides/slide6.xml><?xml version="1.0" encoding="utf-8"?>
 <p:sld xmlns:a="http://schemas.openxmlformats.org/drawingml/2006/main" xmlns:r="http://schemas.openxmlformats.org/officeDocument/2006/relationships" xmlns:p="http://schemas.openxmlformats.org/presentationml/2006/main">
   <p:cSld name="Slide 3">
     <p:bg>
@@ -12319,7 +14118,7 @@
           <a:bodyPr/>
           <a:lstStyle/>
           <a:p>
-            <a:endParaRPr lang="en-US"/>
+            <a:endParaRPr lang="en-US" dirty="0"/>
           </a:p>
         </p:txBody>
       </p:sp>
@@ -12613,7 +14412,1394 @@
           </a:p>
         </p:txBody>
       </p:sp>
+      <p:pic>
+        <p:nvPicPr>
+          <p:cNvPr id="1026" name="Picture 2" descr="Prompt engineering Generic Others icon ...">
+            <a:extLst>
+              <a:ext uri="{FF2B5EF4-FFF2-40B4-BE49-F238E27FC236}">
+                <a16:creationId xmlns:a16="http://schemas.microsoft.com/office/drawing/2014/main" id="{32587071-035C-C378-CD2B-062EF4A50DA6}"/>
+              </a:ext>
+            </a:extLst>
+          </p:cNvPr>
+          <p:cNvPicPr>
+            <a:picLocks noChangeAspect="1" noChangeArrowheads="1"/>
+          </p:cNvPicPr>
+          <p:nvPr/>
+        </p:nvPicPr>
+        <p:blipFill>
+          <a:blip r:embed="rId3">
+            <a:extLst>
+              <a:ext uri="{28A0092B-C50C-407E-A947-70E740481C1C}">
+                <a14:useLocalDpi xmlns:a14="http://schemas.microsoft.com/office/drawing/2010/main" val="0"/>
+              </a:ext>
+            </a:extLst>
+          </a:blip>
+          <a:srcRect/>
+          <a:stretch>
+            <a:fillRect/>
+          </a:stretch>
+        </p:blipFill>
+        <p:spPr bwMode="auto">
+          <a:xfrm>
+            <a:off x="6854009" y="3440536"/>
+            <a:ext cx="1700862" cy="1369208"/>
+          </a:xfrm>
+          <a:prstGeom prst="rect">
+            <a:avLst/>
+          </a:prstGeom>
+          <a:noFill/>
+          <a:extLst>
+            <a:ext uri="{909E8E84-426E-40DD-AFC4-6F175D3DCCD1}">
+              <a14:hiddenFill xmlns:a14="http://schemas.microsoft.com/office/drawing/2010/main">
+                <a:solidFill>
+                  <a:srgbClr val="FFFFFF"/>
+                </a:solidFill>
+              </a14:hiddenFill>
+            </a:ext>
+          </a:extLst>
+        </p:spPr>
+      </p:pic>
+      <p:pic>
+        <p:nvPicPr>
+          <p:cNvPr id="1030" name="Picture 6" descr="prompt engineering Icon - Free PNG &amp; SVG 6606597 - Noun Project">
+            <a:extLst>
+              <a:ext uri="{FF2B5EF4-FFF2-40B4-BE49-F238E27FC236}">
+                <a16:creationId xmlns:a16="http://schemas.microsoft.com/office/drawing/2014/main" id="{F6CD6BEC-C2DC-FD89-A0A5-4119189CE512}"/>
+              </a:ext>
+            </a:extLst>
+          </p:cNvPr>
+          <p:cNvPicPr>
+            <a:picLocks noChangeAspect="1" noChangeArrowheads="1"/>
+          </p:cNvPicPr>
+          <p:nvPr/>
+        </p:nvPicPr>
+        <p:blipFill>
+          <a:blip r:embed="rId4">
+            <a:extLst>
+              <a:ext uri="{28A0092B-C50C-407E-A947-70E740481C1C}">
+                <a14:useLocalDpi xmlns:a14="http://schemas.microsoft.com/office/drawing/2010/main" val="0"/>
+              </a:ext>
+            </a:extLst>
+          </a:blip>
+          <a:srcRect/>
+          <a:stretch>
+            <a:fillRect/>
+          </a:stretch>
+        </p:blipFill>
+        <p:spPr bwMode="auto">
+          <a:xfrm>
+            <a:off x="2702587" y="3397531"/>
+            <a:ext cx="1412213" cy="1412213"/>
+          </a:xfrm>
+          <a:prstGeom prst="rect">
+            <a:avLst/>
+          </a:prstGeom>
+          <a:noFill/>
+          <a:extLst>
+            <a:ext uri="{909E8E84-426E-40DD-AFC4-6F175D3DCCD1}">
+              <a14:hiddenFill xmlns:a14="http://schemas.microsoft.com/office/drawing/2010/main">
+                <a:solidFill>
+                  <a:srgbClr val="FFFFFF"/>
+                </a:solidFill>
+              </a14:hiddenFill>
+            </a:ext>
+          </a:extLst>
+        </p:spPr>
+      </p:pic>
     </p:spTree>
+  </p:cSld>
+  <p:clrMapOvr>
+    <a:masterClrMapping/>
+  </p:clrMapOvr>
+</p:sld>
+</file>
+
+<file path=ppt/slides/slide7.xml><?xml version="1.0" encoding="utf-8"?>
+<p:sld xmlns:a="http://schemas.openxmlformats.org/drawingml/2006/main" xmlns:r="http://schemas.openxmlformats.org/officeDocument/2006/relationships" xmlns:p="http://schemas.openxmlformats.org/presentationml/2006/main">
+  <p:cSld>
+    <p:spTree>
+      <p:nvGrpSpPr>
+        <p:cNvPr id="1" name="">
+          <a:extLst>
+            <a:ext uri="{FF2B5EF4-FFF2-40B4-BE49-F238E27FC236}">
+              <a16:creationId xmlns:a16="http://schemas.microsoft.com/office/drawing/2014/main" id="{300D7971-0F97-2C89-95F9-E6EC5B1C2CCF}"/>
+            </a:ext>
+          </a:extLst>
+        </p:cNvPr>
+        <p:cNvGrpSpPr/>
+        <p:nvPr/>
+      </p:nvGrpSpPr>
+      <p:grpSpPr>
+        <a:xfrm>
+          <a:off x="0" y="0"/>
+          <a:ext cx="0" cy="0"/>
+          <a:chOff x="0" y="0"/>
+          <a:chExt cx="0" cy="0"/>
+        </a:xfrm>
+      </p:grpSpPr>
+      <p:sp>
+        <p:nvSpPr>
+          <p:cNvPr id="2" name="Shape 0">
+            <a:extLst>
+              <a:ext uri="{FF2B5EF4-FFF2-40B4-BE49-F238E27FC236}">
+                <a16:creationId xmlns:a16="http://schemas.microsoft.com/office/drawing/2014/main" id="{A84B0A1B-6B67-AF85-502A-135A3408D7B1}"/>
+              </a:ext>
+            </a:extLst>
+          </p:cNvPr>
+          <p:cNvSpPr/>
+          <p:nvPr/>
+        </p:nvSpPr>
+        <p:spPr>
+          <a:xfrm>
+            <a:off x="0" y="0"/>
+            <a:ext cx="9144000" cy="658368"/>
+          </a:xfrm>
+          <a:prstGeom prst="rect">
+            <a:avLst/>
+          </a:prstGeom>
+          <a:solidFill>
+            <a:srgbClr val="CC0000"/>
+          </a:solidFill>
+          <a:ln w="12700">
+            <a:solidFill>
+              <a:srgbClr val="CC0000"/>
+            </a:solidFill>
+            <a:prstDash val="solid"/>
+          </a:ln>
+        </p:spPr>
+        <p:txBody>
+          <a:bodyPr/>
+          <a:lstStyle/>
+          <a:p>
+            <a:endParaRPr lang="en-US"/>
+          </a:p>
+        </p:txBody>
+      </p:sp>
+      <p:sp>
+        <p:nvSpPr>
+          <p:cNvPr id="3" name="Text 1">
+            <a:extLst>
+              <a:ext uri="{FF2B5EF4-FFF2-40B4-BE49-F238E27FC236}">
+                <a16:creationId xmlns:a16="http://schemas.microsoft.com/office/drawing/2014/main" id="{F2F7B2B4-725A-0871-3B68-4C8F13FEA7F9}"/>
+              </a:ext>
+            </a:extLst>
+          </p:cNvPr>
+          <p:cNvSpPr/>
+          <p:nvPr/>
+        </p:nvSpPr>
+        <p:spPr>
+          <a:xfrm>
+            <a:off x="320040" y="0"/>
+            <a:ext cx="8503920" cy="658368"/>
+          </a:xfrm>
+          <a:prstGeom prst="rect">
+            <a:avLst/>
+          </a:prstGeom>
+          <a:noFill/>
+          <a:ln/>
+        </p:spPr>
+        <p:txBody>
+          <a:bodyPr wrap="square" lIns="0" tIns="0" rIns="0" bIns="0" rtlCol="0" anchor="ctr"/>
+          <a:lstStyle/>
+          <a:p>
+            <a:pPr marL="0" indent="0">
+              <a:buNone/>
+            </a:pPr>
+            <a:r>
+              <a:rPr lang="en-US" sz="2000" b="1" dirty="0" err="1">
+                <a:solidFill>
+                  <a:srgbClr val="FFFFFF"/>
+                </a:solidFill>
+              </a:rPr>
+              <a:t>Uređivanje</a:t>
+            </a:r>
+            <a:r>
+              <a:rPr lang="en-US" sz="2000" b="1" dirty="0">
+                <a:solidFill>
+                  <a:srgbClr val="FFFFFF"/>
+                </a:solidFill>
+              </a:rPr>
+              <a:t> </a:t>
+            </a:r>
+            <a:r>
+              <a:rPr lang="en-US" sz="2000" b="1" dirty="0" err="1">
+                <a:solidFill>
+                  <a:srgbClr val="FFFFFF"/>
+                </a:solidFill>
+              </a:rPr>
+              <a:t>generiranog</a:t>
+            </a:r>
+            <a:r>
+              <a:rPr lang="en-US" sz="2000" b="1" dirty="0">
+                <a:solidFill>
+                  <a:srgbClr val="FFFFFF"/>
+                </a:solidFill>
+              </a:rPr>
+              <a:t> </a:t>
+            </a:r>
+            <a:r>
+              <a:rPr lang="en-US" sz="2000" b="1" dirty="0" err="1">
+                <a:solidFill>
+                  <a:srgbClr val="FFFFFF"/>
+                </a:solidFill>
+              </a:rPr>
+              <a:t>teksta</a:t>
+            </a:r>
+            <a:r>
+              <a:rPr lang="en-US" sz="2000" b="1" dirty="0">
+                <a:solidFill>
+                  <a:srgbClr val="FFFFFF"/>
+                </a:solidFill>
+              </a:rPr>
+              <a:t> za </a:t>
+            </a:r>
+            <a:r>
+              <a:rPr lang="en-US" sz="2000" b="1" dirty="0" err="1">
+                <a:solidFill>
+                  <a:srgbClr val="FFFFFF"/>
+                </a:solidFill>
+              </a:rPr>
+              <a:t>dijeljenje</a:t>
+            </a:r>
+            <a:endParaRPr lang="en-US" sz="2000" dirty="0"/>
+          </a:p>
+        </p:txBody>
+      </p:sp>
+      <p:sp>
+        <p:nvSpPr>
+          <p:cNvPr id="5" name="Shape 3">
+            <a:extLst>
+              <a:ext uri="{FF2B5EF4-FFF2-40B4-BE49-F238E27FC236}">
+                <a16:creationId xmlns:a16="http://schemas.microsoft.com/office/drawing/2014/main" id="{D4A2E077-601D-0549-DE37-6EAFDC91A16E}"/>
+              </a:ext>
+            </a:extLst>
+          </p:cNvPr>
+          <p:cNvSpPr/>
+          <p:nvPr/>
+        </p:nvSpPr>
+        <p:spPr>
+          <a:xfrm>
+            <a:off x="274320" y="882095"/>
+            <a:ext cx="4322449" cy="384048"/>
+          </a:xfrm>
+          <a:prstGeom prst="rect">
+            <a:avLst/>
+          </a:prstGeom>
+          <a:solidFill>
+            <a:srgbClr val="CC0000"/>
+          </a:solidFill>
+          <a:ln w="12700">
+            <a:solidFill>
+              <a:srgbClr val="CC0000"/>
+            </a:solidFill>
+            <a:prstDash val="solid"/>
+          </a:ln>
+        </p:spPr>
+        <p:txBody>
+          <a:bodyPr/>
+          <a:lstStyle/>
+          <a:p>
+            <a:endParaRPr lang="en-US"/>
+          </a:p>
+        </p:txBody>
+      </p:sp>
+      <p:sp>
+        <p:nvSpPr>
+          <p:cNvPr id="6" name="Text 4">
+            <a:extLst>
+              <a:ext uri="{FF2B5EF4-FFF2-40B4-BE49-F238E27FC236}">
+                <a16:creationId xmlns:a16="http://schemas.microsoft.com/office/drawing/2014/main" id="{2FCF1222-0D55-BA68-7A24-38629B026C6D}"/>
+              </a:ext>
+            </a:extLst>
+          </p:cNvPr>
+          <p:cNvSpPr/>
+          <p:nvPr/>
+        </p:nvSpPr>
+        <p:spPr>
+          <a:xfrm>
+            <a:off x="274320" y="882095"/>
+            <a:ext cx="4322449" cy="384048"/>
+          </a:xfrm>
+          <a:prstGeom prst="rect">
+            <a:avLst/>
+          </a:prstGeom>
+          <a:noFill/>
+          <a:ln/>
+        </p:spPr>
+        <p:txBody>
+          <a:bodyPr wrap="square" lIns="0" tIns="0" rIns="0" bIns="0" rtlCol="0" anchor="ctr"/>
+          <a:lstStyle/>
+          <a:p>
+            <a:pPr marL="0" indent="0" algn="ctr">
+              <a:buNone/>
+            </a:pPr>
+            <a:r>
+              <a:rPr lang="en-US" sz="1400" b="1" dirty="0">
+                <a:solidFill>
+                  <a:srgbClr val="FFFFFF"/>
+                </a:solidFill>
+              </a:rPr>
+              <a:t>COPY PASTE</a:t>
+            </a:r>
+            <a:endParaRPr lang="en-US" sz="1400" dirty="0"/>
+          </a:p>
+        </p:txBody>
+      </p:sp>
+      <p:sp>
+        <p:nvSpPr>
+          <p:cNvPr id="8" name="Text 6">
+            <a:extLst>
+              <a:ext uri="{FF2B5EF4-FFF2-40B4-BE49-F238E27FC236}">
+                <a16:creationId xmlns:a16="http://schemas.microsoft.com/office/drawing/2014/main" id="{B6EBD7C9-632D-BC94-0D70-9F9CE7D663E5}"/>
+              </a:ext>
+            </a:extLst>
+          </p:cNvPr>
+          <p:cNvSpPr/>
+          <p:nvPr/>
+        </p:nvSpPr>
+        <p:spPr>
+          <a:xfrm>
+            <a:off x="457199" y="1357583"/>
+            <a:ext cx="4114801" cy="3200400"/>
+          </a:xfrm>
+          <a:prstGeom prst="rect">
+            <a:avLst/>
+          </a:prstGeom>
+          <a:noFill/>
+          <a:ln/>
+        </p:spPr>
+        <p:txBody>
+          <a:bodyPr wrap="square" rtlCol="0" anchor="t"/>
+          <a:lstStyle/>
+          <a:p>
+            <a:pPr marL="342900" indent="-342900">
+              <a:spcAft>
+                <a:spcPts val="800"/>
+              </a:spcAft>
+              <a:buSzPct val="100000"/>
+              <a:buChar char="•"/>
+            </a:pPr>
+            <a:r>
+              <a:rPr lang="en-US" sz="1400" dirty="0">
+                <a:solidFill>
+                  <a:srgbClr val="444444"/>
+                </a:solidFill>
+              </a:rPr>
+              <a:t>AI </a:t>
+            </a:r>
+            <a:r>
+              <a:rPr lang="en-US" sz="1400" dirty="0" err="1">
+                <a:solidFill>
+                  <a:srgbClr val="444444"/>
+                </a:solidFill>
+              </a:rPr>
+              <a:t>služi</a:t>
+            </a:r>
+            <a:r>
+              <a:rPr lang="en-US" sz="1400" dirty="0">
+                <a:solidFill>
+                  <a:srgbClr val="444444"/>
+                </a:solidFill>
+              </a:rPr>
+              <a:t> </a:t>
+            </a:r>
+            <a:r>
+              <a:rPr lang="en-US" sz="1400" dirty="0" err="1">
+                <a:solidFill>
+                  <a:srgbClr val="444444"/>
+                </a:solidFill>
+              </a:rPr>
+              <a:t>kao</a:t>
+            </a:r>
+            <a:r>
+              <a:rPr lang="en-US" sz="1400" dirty="0">
+                <a:solidFill>
+                  <a:srgbClr val="444444"/>
+                </a:solidFill>
+              </a:rPr>
+              <a:t> </a:t>
+            </a:r>
+            <a:r>
+              <a:rPr lang="en-US" sz="1400" dirty="0" err="1">
+                <a:solidFill>
+                  <a:srgbClr val="444444"/>
+                </a:solidFill>
+              </a:rPr>
+              <a:t>temelj</a:t>
+            </a:r>
+            <a:r>
+              <a:rPr lang="en-US" sz="1400" dirty="0">
+                <a:solidFill>
+                  <a:srgbClr val="444444"/>
+                </a:solidFill>
+              </a:rPr>
+              <a:t>, </a:t>
+            </a:r>
+            <a:r>
+              <a:rPr lang="en-US" sz="1400" dirty="0" err="1">
+                <a:solidFill>
+                  <a:srgbClr val="444444"/>
+                </a:solidFill>
+              </a:rPr>
+              <a:t>ali</a:t>
+            </a:r>
+            <a:r>
+              <a:rPr lang="en-US" sz="1400" dirty="0">
+                <a:solidFill>
+                  <a:srgbClr val="444444"/>
+                </a:solidFill>
+              </a:rPr>
+              <a:t> </a:t>
+            </a:r>
+            <a:r>
+              <a:rPr lang="en-US" sz="1400" dirty="0" err="1">
+                <a:solidFill>
+                  <a:srgbClr val="444444"/>
+                </a:solidFill>
+              </a:rPr>
+              <a:t>odgovore</a:t>
+            </a:r>
+            <a:r>
+              <a:rPr lang="en-US" sz="1400" dirty="0">
+                <a:solidFill>
+                  <a:srgbClr val="444444"/>
+                </a:solidFill>
+              </a:rPr>
+              <a:t> </a:t>
+            </a:r>
+            <a:r>
+              <a:rPr lang="en-US" sz="1400" dirty="0" err="1">
+                <a:solidFill>
+                  <a:srgbClr val="444444"/>
+                </a:solidFill>
+              </a:rPr>
+              <a:t>možemo</a:t>
+            </a:r>
+            <a:r>
+              <a:rPr lang="en-US" sz="1400" dirty="0">
+                <a:solidFill>
+                  <a:srgbClr val="444444"/>
+                </a:solidFill>
+              </a:rPr>
+              <a:t> </a:t>
+            </a:r>
+            <a:r>
+              <a:rPr lang="en-US" sz="1400" dirty="0" err="1">
+                <a:solidFill>
+                  <a:srgbClr val="444444"/>
+                </a:solidFill>
+              </a:rPr>
+              <a:t>dodatno</a:t>
+            </a:r>
+            <a:r>
+              <a:rPr lang="en-US" sz="1400" dirty="0">
+                <a:solidFill>
+                  <a:srgbClr val="444444"/>
+                </a:solidFill>
+              </a:rPr>
+              <a:t> </a:t>
+            </a:r>
+            <a:r>
+              <a:rPr lang="en-US" sz="1400" dirty="0" err="1">
+                <a:solidFill>
+                  <a:srgbClr val="444444"/>
+                </a:solidFill>
+              </a:rPr>
+              <a:t>urediti</a:t>
+            </a:r>
+            <a:endParaRPr lang="en-US" sz="1400" dirty="0">
+              <a:solidFill>
+                <a:srgbClr val="444444"/>
+              </a:solidFill>
+            </a:endParaRPr>
+          </a:p>
+          <a:p>
+            <a:pPr marL="342900" indent="-342900">
+              <a:spcAft>
+                <a:spcPts val="800"/>
+              </a:spcAft>
+              <a:buSzPct val="100000"/>
+              <a:buChar char="•"/>
+            </a:pPr>
+            <a:r>
+              <a:rPr lang="en-US" sz="1400" dirty="0" err="1">
+                <a:solidFill>
+                  <a:srgbClr val="444444"/>
+                </a:solidFill>
+              </a:rPr>
+              <a:t>Klikom</a:t>
+            </a:r>
+            <a:r>
+              <a:rPr lang="en-US" sz="1400" dirty="0">
+                <a:solidFill>
+                  <a:srgbClr val="444444"/>
+                </a:solidFill>
+              </a:rPr>
+              <a:t> </a:t>
+            </a:r>
+            <a:r>
+              <a:rPr lang="en-US" sz="1400" dirty="0" err="1">
+                <a:solidFill>
+                  <a:srgbClr val="444444"/>
+                </a:solidFill>
+              </a:rPr>
+              <a:t>na</a:t>
+            </a:r>
+            <a:r>
+              <a:rPr lang="en-US" sz="1400" dirty="0">
+                <a:solidFill>
+                  <a:srgbClr val="444444"/>
+                </a:solidFill>
+              </a:rPr>
+              <a:t> </a:t>
+            </a:r>
+            <a:r>
+              <a:rPr lang="en-US" sz="1400" dirty="0" err="1">
+                <a:solidFill>
+                  <a:srgbClr val="444444"/>
+                </a:solidFill>
+              </a:rPr>
+              <a:t>ikonu</a:t>
+            </a:r>
+            <a:r>
+              <a:rPr lang="en-US" sz="1400" dirty="0">
+                <a:solidFill>
+                  <a:srgbClr val="444444"/>
+                </a:solidFill>
+              </a:rPr>
+              <a:t> </a:t>
+            </a:r>
+            <a:r>
+              <a:rPr lang="en-US" sz="1400" dirty="0" err="1">
+                <a:solidFill>
+                  <a:srgbClr val="444444"/>
+                </a:solidFill>
+              </a:rPr>
+              <a:t>na</a:t>
+            </a:r>
+            <a:r>
+              <a:rPr lang="en-US" sz="1400" dirty="0">
+                <a:solidFill>
+                  <a:srgbClr val="444444"/>
+                </a:solidFill>
+              </a:rPr>
+              <a:t> </a:t>
+            </a:r>
+            <a:r>
+              <a:rPr lang="en-US" sz="1400" dirty="0" err="1">
+                <a:solidFill>
+                  <a:srgbClr val="444444"/>
+                </a:solidFill>
+              </a:rPr>
+              <a:t>slici</a:t>
+            </a:r>
+            <a:r>
+              <a:rPr lang="en-US" sz="1400" dirty="0">
+                <a:solidFill>
+                  <a:srgbClr val="444444"/>
+                </a:solidFill>
+              </a:rPr>
+              <a:t> ChatGPT </a:t>
+            </a:r>
+            <a:r>
+              <a:rPr lang="en-US" sz="1400" dirty="0" err="1">
+                <a:solidFill>
+                  <a:srgbClr val="444444"/>
+                </a:solidFill>
+              </a:rPr>
+              <a:t>odgovor</a:t>
+            </a:r>
+            <a:r>
+              <a:rPr lang="en-US" sz="1400" dirty="0">
+                <a:solidFill>
+                  <a:srgbClr val="444444"/>
+                </a:solidFill>
+              </a:rPr>
+              <a:t> </a:t>
+            </a:r>
+            <a:r>
+              <a:rPr lang="en-US" sz="1400" dirty="0" err="1">
+                <a:solidFill>
+                  <a:srgbClr val="444444"/>
+                </a:solidFill>
+              </a:rPr>
+              <a:t>kopiramo</a:t>
+            </a:r>
+            <a:endParaRPr lang="en-US" sz="1400" dirty="0">
+              <a:solidFill>
+                <a:srgbClr val="444444"/>
+              </a:solidFill>
+            </a:endParaRPr>
+          </a:p>
+          <a:p>
+            <a:pPr marL="342900" indent="-342900">
+              <a:spcAft>
+                <a:spcPts val="800"/>
+              </a:spcAft>
+              <a:buSzPct val="100000"/>
+              <a:buChar char="•"/>
+            </a:pPr>
+            <a:r>
+              <a:rPr lang="en-US" sz="1400" dirty="0" err="1">
+                <a:solidFill>
+                  <a:srgbClr val="444444"/>
+                </a:solidFill>
+              </a:rPr>
+              <a:t>Kopirani</a:t>
+            </a:r>
+            <a:r>
+              <a:rPr lang="en-US" sz="1400" dirty="0">
+                <a:solidFill>
+                  <a:srgbClr val="444444"/>
+                </a:solidFill>
+              </a:rPr>
+              <a:t> </a:t>
+            </a:r>
+            <a:r>
+              <a:rPr lang="en-US" sz="1400" dirty="0" err="1">
+                <a:solidFill>
+                  <a:srgbClr val="444444"/>
+                </a:solidFill>
+              </a:rPr>
+              <a:t>tekst</a:t>
+            </a:r>
+            <a:r>
+              <a:rPr lang="en-US" sz="1400" dirty="0">
+                <a:solidFill>
+                  <a:srgbClr val="444444"/>
+                </a:solidFill>
+              </a:rPr>
+              <a:t> </a:t>
+            </a:r>
+            <a:r>
+              <a:rPr lang="en-US" sz="1400" dirty="0" err="1">
+                <a:solidFill>
+                  <a:srgbClr val="444444"/>
+                </a:solidFill>
+              </a:rPr>
+              <a:t>zalijepimo</a:t>
+            </a:r>
+            <a:r>
+              <a:rPr lang="en-US" sz="1400" dirty="0">
+                <a:solidFill>
+                  <a:srgbClr val="444444"/>
+                </a:solidFill>
+              </a:rPr>
+              <a:t> u </a:t>
+            </a:r>
+            <a:r>
+              <a:rPr lang="en-US" sz="1400" dirty="0" err="1">
+                <a:solidFill>
+                  <a:srgbClr val="444444"/>
+                </a:solidFill>
+              </a:rPr>
+              <a:t>uređivač</a:t>
+            </a:r>
+            <a:r>
+              <a:rPr lang="en-US" sz="1400" dirty="0">
+                <a:solidFill>
+                  <a:srgbClr val="444444"/>
+                </a:solidFill>
+              </a:rPr>
+              <a:t> </a:t>
+            </a:r>
+            <a:r>
+              <a:rPr lang="en-US" sz="1400" dirty="0" err="1">
+                <a:solidFill>
+                  <a:srgbClr val="444444"/>
+                </a:solidFill>
+              </a:rPr>
+              <a:t>teksta</a:t>
+            </a:r>
+            <a:r>
+              <a:rPr lang="en-US" sz="1400" dirty="0">
+                <a:solidFill>
+                  <a:srgbClr val="444444"/>
+                </a:solidFill>
+              </a:rPr>
+              <a:t> </a:t>
+            </a:r>
+            <a:r>
+              <a:rPr lang="en-US" sz="1400" i="1" dirty="0">
+                <a:solidFill>
+                  <a:schemeClr val="tx1">
+                    <a:lumMod val="65000"/>
+                    <a:lumOff val="35000"/>
+                  </a:schemeClr>
+                </a:solidFill>
+              </a:rPr>
+              <a:t>(Notepad, </a:t>
+            </a:r>
+            <a:r>
+              <a:rPr lang="en-US" sz="1400" i="1" dirty="0" err="1">
+                <a:solidFill>
+                  <a:schemeClr val="tx1">
+                    <a:lumMod val="65000"/>
+                    <a:lumOff val="35000"/>
+                  </a:schemeClr>
+                </a:solidFill>
+              </a:rPr>
+              <a:t>aplikacije</a:t>
+            </a:r>
+            <a:r>
+              <a:rPr lang="en-US" sz="1400" i="1" dirty="0">
+                <a:solidFill>
+                  <a:schemeClr val="tx1">
+                    <a:lumMod val="65000"/>
+                    <a:lumOff val="35000"/>
+                  </a:schemeClr>
+                </a:solidFill>
+              </a:rPr>
+              <a:t> </a:t>
+            </a:r>
+            <a:r>
+              <a:rPr lang="en-US" sz="1400" i="1" dirty="0" err="1">
+                <a:solidFill>
+                  <a:schemeClr val="tx1">
+                    <a:lumMod val="65000"/>
+                    <a:lumOff val="35000"/>
+                  </a:schemeClr>
+                </a:solidFill>
+              </a:rPr>
+              <a:t>na</a:t>
+            </a:r>
+            <a:r>
+              <a:rPr lang="en-US" sz="1400" i="1" dirty="0">
+                <a:solidFill>
+                  <a:schemeClr val="tx1">
+                    <a:lumMod val="65000"/>
+                    <a:lumOff val="35000"/>
+                  </a:schemeClr>
+                </a:solidFill>
+              </a:rPr>
+              <a:t> </a:t>
+            </a:r>
+            <a:r>
+              <a:rPr lang="en-US" sz="1400" i="1" dirty="0" err="1">
+                <a:solidFill>
+                  <a:schemeClr val="tx1">
+                    <a:lumMod val="65000"/>
+                    <a:lumOff val="35000"/>
+                  </a:schemeClr>
+                </a:solidFill>
+              </a:rPr>
+              <a:t>mobitelu</a:t>
+            </a:r>
+            <a:r>
+              <a:rPr lang="en-US" sz="1400" i="1" dirty="0">
+                <a:solidFill>
+                  <a:schemeClr val="tx1">
+                    <a:lumMod val="65000"/>
+                    <a:lumOff val="35000"/>
+                  </a:schemeClr>
+                </a:solidFill>
+              </a:rPr>
+              <a:t>…)</a:t>
+            </a:r>
+          </a:p>
+          <a:p>
+            <a:pPr marL="342900" indent="-342900">
+              <a:spcAft>
+                <a:spcPts val="800"/>
+              </a:spcAft>
+              <a:buSzPct val="100000"/>
+              <a:buChar char="•"/>
+            </a:pPr>
+            <a:r>
+              <a:rPr lang="en-US" sz="1400" dirty="0">
+                <a:solidFill>
+                  <a:srgbClr val="444444"/>
+                </a:solidFill>
+              </a:rPr>
+              <a:t>U </a:t>
+            </a:r>
+            <a:r>
+              <a:rPr lang="en-US" sz="1400" dirty="0" err="1">
+                <a:solidFill>
+                  <a:srgbClr val="444444"/>
+                </a:solidFill>
+              </a:rPr>
+              <a:t>uređivaču</a:t>
+            </a:r>
+            <a:r>
+              <a:rPr lang="en-US" sz="1400" dirty="0">
+                <a:solidFill>
+                  <a:srgbClr val="444444"/>
+                </a:solidFill>
+              </a:rPr>
+              <a:t> </a:t>
+            </a:r>
+            <a:r>
+              <a:rPr lang="en-US" sz="1400" dirty="0" err="1">
+                <a:solidFill>
+                  <a:srgbClr val="444444"/>
+                </a:solidFill>
+              </a:rPr>
+              <a:t>teksta</a:t>
+            </a:r>
+            <a:r>
+              <a:rPr lang="en-US" sz="1400" dirty="0">
+                <a:solidFill>
+                  <a:srgbClr val="444444"/>
+                </a:solidFill>
+              </a:rPr>
+              <a:t> </a:t>
+            </a:r>
+            <a:r>
+              <a:rPr lang="en-US" sz="1400" dirty="0" err="1">
+                <a:solidFill>
+                  <a:srgbClr val="444444"/>
+                </a:solidFill>
+              </a:rPr>
+              <a:t>uredimo</a:t>
+            </a:r>
+            <a:r>
+              <a:rPr lang="en-US" sz="1400" dirty="0">
+                <a:solidFill>
+                  <a:srgbClr val="444444"/>
+                </a:solidFill>
+              </a:rPr>
+              <a:t> </a:t>
+            </a:r>
+            <a:r>
+              <a:rPr lang="en-US" sz="1400" dirty="0" err="1">
+                <a:solidFill>
+                  <a:srgbClr val="444444"/>
+                </a:solidFill>
+              </a:rPr>
+              <a:t>tekst</a:t>
+            </a:r>
+            <a:r>
+              <a:rPr lang="en-US" sz="1400" dirty="0">
+                <a:solidFill>
+                  <a:srgbClr val="444444"/>
+                </a:solidFill>
+              </a:rPr>
+              <a:t> </a:t>
+            </a:r>
+            <a:endParaRPr lang="en-US" sz="1400" dirty="0"/>
+          </a:p>
+          <a:p>
+            <a:pPr marL="342900" indent="-342900">
+              <a:spcAft>
+                <a:spcPts val="800"/>
+              </a:spcAft>
+              <a:buSzPct val="100000"/>
+              <a:buChar char="•"/>
+            </a:pPr>
+            <a:r>
+              <a:rPr lang="en-US" sz="1400" dirty="0" err="1">
+                <a:solidFill>
+                  <a:srgbClr val="444444"/>
+                </a:solidFill>
+              </a:rPr>
+              <a:t>Tekst</a:t>
+            </a:r>
+            <a:r>
+              <a:rPr lang="en-US" sz="1400" dirty="0">
+                <a:solidFill>
+                  <a:srgbClr val="444444"/>
+                </a:solidFill>
+              </a:rPr>
+              <a:t> </a:t>
+            </a:r>
+            <a:r>
+              <a:rPr lang="en-US" sz="1400" dirty="0" err="1">
+                <a:solidFill>
+                  <a:srgbClr val="444444"/>
+                </a:solidFill>
+              </a:rPr>
+              <a:t>odaberemo</a:t>
+            </a:r>
+            <a:r>
+              <a:rPr lang="en-US" sz="1400" dirty="0">
+                <a:solidFill>
+                  <a:srgbClr val="444444"/>
+                </a:solidFill>
+              </a:rPr>
+              <a:t> </a:t>
+            </a:r>
+            <a:r>
+              <a:rPr lang="en-US" sz="1400" dirty="0" err="1">
+                <a:solidFill>
+                  <a:srgbClr val="444444"/>
+                </a:solidFill>
+              </a:rPr>
+              <a:t>držanjem</a:t>
+            </a:r>
+            <a:r>
+              <a:rPr lang="en-US" sz="1400" dirty="0">
+                <a:solidFill>
+                  <a:srgbClr val="444444"/>
+                </a:solidFill>
+              </a:rPr>
+              <a:t> </a:t>
+            </a:r>
+            <a:r>
+              <a:rPr lang="en-US" sz="1400" dirty="0" err="1">
+                <a:solidFill>
+                  <a:srgbClr val="444444"/>
+                </a:solidFill>
+              </a:rPr>
+              <a:t>pritisnutog</a:t>
+            </a:r>
+            <a:r>
+              <a:rPr lang="en-US" sz="1400" dirty="0">
+                <a:solidFill>
+                  <a:srgbClr val="444444"/>
+                </a:solidFill>
+              </a:rPr>
+              <a:t> </a:t>
+            </a:r>
+            <a:r>
+              <a:rPr lang="en-US" sz="1400" dirty="0" err="1">
+                <a:solidFill>
+                  <a:srgbClr val="444444"/>
+                </a:solidFill>
+              </a:rPr>
+              <a:t>miša</a:t>
+            </a:r>
+            <a:r>
+              <a:rPr lang="en-US" sz="1400" dirty="0">
+                <a:solidFill>
+                  <a:srgbClr val="444444"/>
+                </a:solidFill>
+              </a:rPr>
+              <a:t> </a:t>
+            </a:r>
+            <a:r>
+              <a:rPr lang="en-US" sz="1400" dirty="0" err="1">
+                <a:solidFill>
+                  <a:srgbClr val="444444"/>
+                </a:solidFill>
+              </a:rPr>
+              <a:t>preko</a:t>
+            </a:r>
+            <a:r>
+              <a:rPr lang="en-US" sz="1400" dirty="0">
+                <a:solidFill>
+                  <a:srgbClr val="444444"/>
+                </a:solidFill>
+              </a:rPr>
+              <a:t> </a:t>
+            </a:r>
+            <a:r>
+              <a:rPr lang="en-US" sz="1400" dirty="0" err="1">
+                <a:solidFill>
+                  <a:srgbClr val="444444"/>
+                </a:solidFill>
+              </a:rPr>
+              <a:t>njega</a:t>
+            </a:r>
+            <a:r>
+              <a:rPr lang="en-US" sz="1400" dirty="0">
+                <a:solidFill>
+                  <a:srgbClr val="444444"/>
+                </a:solidFill>
+              </a:rPr>
+              <a:t> </a:t>
+            </a:r>
+            <a:r>
+              <a:rPr lang="en-US" sz="1400" dirty="0" err="1">
+                <a:solidFill>
+                  <a:srgbClr val="444444"/>
+                </a:solidFill>
+              </a:rPr>
+              <a:t>ili</a:t>
+            </a:r>
+            <a:r>
+              <a:rPr lang="en-US" sz="1400" dirty="0">
+                <a:solidFill>
+                  <a:srgbClr val="444444"/>
+                </a:solidFill>
+              </a:rPr>
+              <a:t> </a:t>
+            </a:r>
+            <a:r>
+              <a:rPr lang="en-US" sz="1400" dirty="0" err="1">
+                <a:solidFill>
+                  <a:srgbClr val="444444"/>
+                </a:solidFill>
+              </a:rPr>
+              <a:t>klikom</a:t>
+            </a:r>
+            <a:r>
+              <a:rPr lang="en-US" sz="1400" dirty="0">
+                <a:solidFill>
+                  <a:srgbClr val="444444"/>
+                </a:solidFill>
+              </a:rPr>
+              <a:t> </a:t>
+            </a:r>
+            <a:r>
+              <a:rPr lang="en-US" sz="1400" dirty="0" err="1">
+                <a:solidFill>
+                  <a:srgbClr val="444444"/>
+                </a:solidFill>
+              </a:rPr>
+              <a:t>na</a:t>
+            </a:r>
+            <a:r>
+              <a:rPr lang="en-US" sz="1400" dirty="0">
+                <a:solidFill>
+                  <a:srgbClr val="444444"/>
+                </a:solidFill>
+              </a:rPr>
+              <a:t> Ctrl + A </a:t>
+            </a:r>
+            <a:r>
+              <a:rPr lang="en-US" sz="1400" dirty="0" err="1">
+                <a:solidFill>
+                  <a:srgbClr val="444444"/>
+                </a:solidFill>
+              </a:rPr>
+              <a:t>i</a:t>
+            </a:r>
+            <a:r>
+              <a:rPr lang="en-US" sz="1400" dirty="0">
+                <a:solidFill>
+                  <a:srgbClr val="444444"/>
+                </a:solidFill>
+              </a:rPr>
+              <a:t> </a:t>
+            </a:r>
+            <a:r>
+              <a:rPr lang="en-US" sz="1400" dirty="0" err="1">
+                <a:solidFill>
+                  <a:srgbClr val="444444"/>
+                </a:solidFill>
+              </a:rPr>
+              <a:t>kopiramo</a:t>
+            </a:r>
+            <a:endParaRPr lang="en-US" sz="1400" dirty="0">
+              <a:solidFill>
+                <a:srgbClr val="444444"/>
+              </a:solidFill>
+            </a:endParaRPr>
+          </a:p>
+          <a:p>
+            <a:pPr marL="342900" indent="-342900">
+              <a:spcAft>
+                <a:spcPts val="800"/>
+              </a:spcAft>
+              <a:buSzPct val="100000"/>
+              <a:buChar char="•"/>
+            </a:pPr>
+            <a:r>
+              <a:rPr lang="en-US" sz="1400" dirty="0" err="1">
+                <a:solidFill>
+                  <a:srgbClr val="444444"/>
+                </a:solidFill>
+              </a:rPr>
+              <a:t>Zalijepimo</a:t>
+            </a:r>
+            <a:r>
+              <a:rPr lang="en-US" sz="1400" dirty="0">
+                <a:solidFill>
+                  <a:srgbClr val="444444"/>
+                </a:solidFill>
+              </a:rPr>
+              <a:t> ga u </a:t>
+            </a:r>
+            <a:r>
+              <a:rPr lang="en-US" sz="1400" dirty="0" err="1">
+                <a:solidFill>
+                  <a:srgbClr val="444444"/>
+                </a:solidFill>
+              </a:rPr>
+              <a:t>aplikaciju</a:t>
+            </a:r>
+            <a:r>
+              <a:rPr lang="en-US" sz="1400" dirty="0">
+                <a:solidFill>
+                  <a:srgbClr val="444444"/>
+                </a:solidFill>
+              </a:rPr>
+              <a:t>/web </a:t>
+            </a:r>
+            <a:r>
+              <a:rPr lang="en-US" sz="1400" dirty="0" err="1">
+                <a:solidFill>
+                  <a:srgbClr val="444444"/>
+                </a:solidFill>
+              </a:rPr>
+              <a:t>stranicu</a:t>
+            </a:r>
+            <a:r>
+              <a:rPr lang="en-US" sz="1400" dirty="0">
+                <a:solidFill>
+                  <a:srgbClr val="444444"/>
+                </a:solidFill>
+              </a:rPr>
+              <a:t>/program u </a:t>
+            </a:r>
+            <a:r>
+              <a:rPr lang="en-US" sz="1400" dirty="0" err="1">
+                <a:solidFill>
+                  <a:srgbClr val="444444"/>
+                </a:solidFill>
+              </a:rPr>
+              <a:t>kojemu</a:t>
+            </a:r>
+            <a:r>
+              <a:rPr lang="en-US" sz="1400" dirty="0">
+                <a:solidFill>
+                  <a:srgbClr val="444444"/>
+                </a:solidFill>
+              </a:rPr>
+              <a:t> ga </a:t>
+            </a:r>
+            <a:r>
+              <a:rPr lang="en-US" sz="1400" dirty="0" err="1">
+                <a:solidFill>
+                  <a:srgbClr val="444444"/>
+                </a:solidFill>
+              </a:rPr>
+              <a:t>želimo</a:t>
+            </a:r>
+            <a:r>
+              <a:rPr lang="en-US" sz="1400" dirty="0">
+                <a:solidFill>
+                  <a:srgbClr val="444444"/>
+                </a:solidFill>
+              </a:rPr>
+              <a:t> </a:t>
+            </a:r>
+            <a:r>
+              <a:rPr lang="en-US" sz="1400" dirty="0" err="1">
+                <a:solidFill>
+                  <a:srgbClr val="444444"/>
+                </a:solidFill>
+              </a:rPr>
+              <a:t>poslati</a:t>
+            </a:r>
+            <a:endParaRPr lang="en-US" sz="1400" dirty="0"/>
+          </a:p>
+        </p:txBody>
+      </p:sp>
+      <p:pic>
+        <p:nvPicPr>
+          <p:cNvPr id="3074" name="Picture 2">
+            <a:extLst>
+              <a:ext uri="{FF2B5EF4-FFF2-40B4-BE49-F238E27FC236}">
+                <a16:creationId xmlns:a16="http://schemas.microsoft.com/office/drawing/2014/main" id="{9530EB56-6A2D-AD41-5E8F-BA0BC4AF6362}"/>
+              </a:ext>
+            </a:extLst>
+          </p:cNvPr>
+          <p:cNvPicPr>
+            <a:picLocks noChangeAspect="1" noChangeArrowheads="1"/>
+          </p:cNvPicPr>
+          <p:nvPr/>
+        </p:nvPicPr>
+        <p:blipFill>
+          <a:blip r:embed="rId3">
+            <a:extLst>
+              <a:ext uri="{28A0092B-C50C-407E-A947-70E740481C1C}">
+                <a14:useLocalDpi xmlns:a14="http://schemas.microsoft.com/office/drawing/2010/main" val="0"/>
+              </a:ext>
+            </a:extLst>
+          </a:blip>
+          <a:srcRect/>
+          <a:stretch>
+            <a:fillRect/>
+          </a:stretch>
+        </p:blipFill>
+        <p:spPr bwMode="auto">
+          <a:xfrm>
+            <a:off x="8423095" y="85486"/>
+            <a:ext cx="400865" cy="487395"/>
+          </a:xfrm>
+          <a:prstGeom prst="rect">
+            <a:avLst/>
+          </a:prstGeom>
+          <a:noFill/>
+          <a:extLst>
+            <a:ext uri="{909E8E84-426E-40DD-AFC4-6F175D3DCCD1}">
+              <a14:hiddenFill xmlns:a14="http://schemas.microsoft.com/office/drawing/2010/main">
+                <a:solidFill>
+                  <a:srgbClr val="FFFFFF"/>
+                </a:solidFill>
+              </a14:hiddenFill>
+            </a:ext>
+          </a:extLst>
+        </p:spPr>
+      </p:pic>
+      <p:pic>
+        <p:nvPicPr>
+          <p:cNvPr id="17" name="Picture 16">
+            <a:extLst>
+              <a:ext uri="{FF2B5EF4-FFF2-40B4-BE49-F238E27FC236}">
+                <a16:creationId xmlns:a16="http://schemas.microsoft.com/office/drawing/2014/main" id="{3E84CE11-0D79-88B0-0F77-2C580DB7EB68}"/>
+              </a:ext>
+            </a:extLst>
+          </p:cNvPr>
+          <p:cNvPicPr>
+            <a:picLocks noChangeAspect="1"/>
+          </p:cNvPicPr>
+          <p:nvPr/>
+        </p:nvPicPr>
+        <p:blipFill>
+          <a:blip r:embed="rId4"/>
+          <a:stretch>
+            <a:fillRect/>
+          </a:stretch>
+        </p:blipFill>
+        <p:spPr>
+          <a:xfrm>
+            <a:off x="4843623" y="882095"/>
+            <a:ext cx="3980337" cy="1102216"/>
+          </a:xfrm>
+          <a:prstGeom prst="rect">
+            <a:avLst/>
+          </a:prstGeom>
+        </p:spPr>
+      </p:pic>
+      <p:pic>
+        <p:nvPicPr>
+          <p:cNvPr id="25" name="Picture 24">
+            <a:extLst>
+              <a:ext uri="{FF2B5EF4-FFF2-40B4-BE49-F238E27FC236}">
+                <a16:creationId xmlns:a16="http://schemas.microsoft.com/office/drawing/2014/main" id="{B252F7E6-1AC3-A497-A354-8946CB4890CC}"/>
+              </a:ext>
+            </a:extLst>
+          </p:cNvPr>
+          <p:cNvPicPr>
+            <a:picLocks noChangeAspect="1"/>
+          </p:cNvPicPr>
+          <p:nvPr/>
+        </p:nvPicPr>
+        <p:blipFill>
+          <a:blip r:embed="rId5"/>
+          <a:stretch>
+            <a:fillRect/>
+          </a:stretch>
+        </p:blipFill>
+        <p:spPr>
+          <a:xfrm>
+            <a:off x="4843623" y="2028395"/>
+            <a:ext cx="4038582" cy="1178829"/>
+          </a:xfrm>
+          <a:prstGeom prst="rect">
+            <a:avLst/>
+          </a:prstGeom>
+        </p:spPr>
+      </p:pic>
+      <p:pic>
+        <p:nvPicPr>
+          <p:cNvPr id="27" name="Picture 26">
+            <a:extLst>
+              <a:ext uri="{FF2B5EF4-FFF2-40B4-BE49-F238E27FC236}">
+                <a16:creationId xmlns:a16="http://schemas.microsoft.com/office/drawing/2014/main" id="{10A53621-C350-7E48-5656-BCEF999E32D2}"/>
+              </a:ext>
+            </a:extLst>
+          </p:cNvPr>
+          <p:cNvPicPr>
+            <a:picLocks noChangeAspect="1"/>
+          </p:cNvPicPr>
+          <p:nvPr/>
+        </p:nvPicPr>
+        <p:blipFill>
+          <a:blip r:embed="rId6"/>
+          <a:stretch>
+            <a:fillRect/>
+          </a:stretch>
+        </p:blipFill>
+        <p:spPr>
+          <a:xfrm>
+            <a:off x="4845558" y="3207224"/>
+            <a:ext cx="4036648" cy="1278340"/>
+          </a:xfrm>
+          <a:prstGeom prst="rect">
+            <a:avLst/>
+          </a:prstGeom>
+        </p:spPr>
+      </p:pic>
+      <p:sp>
+        <p:nvSpPr>
+          <p:cNvPr id="28" name="TextBox 27">
+            <a:extLst>
+              <a:ext uri="{FF2B5EF4-FFF2-40B4-BE49-F238E27FC236}">
+                <a16:creationId xmlns:a16="http://schemas.microsoft.com/office/drawing/2014/main" id="{97AE4C8F-FCE0-85AC-1910-E4A5B6B52BCF}"/>
+              </a:ext>
+            </a:extLst>
+          </p:cNvPr>
+          <p:cNvSpPr txBox="1"/>
+          <p:nvPr/>
+        </p:nvSpPr>
+        <p:spPr>
+          <a:xfrm>
+            <a:off x="5175965" y="4533167"/>
+            <a:ext cx="1657826" cy="369332"/>
+          </a:xfrm>
+          <a:prstGeom prst="rect">
+            <a:avLst/>
+          </a:prstGeom>
+          <a:noFill/>
+        </p:spPr>
+        <p:txBody>
+          <a:bodyPr wrap="none" rtlCol="0">
+            <a:spAutoFit/>
+          </a:bodyPr>
+          <a:lstStyle/>
+          <a:p>
+            <a:r>
+              <a:rPr lang="en-US" b="1" dirty="0"/>
+              <a:t>Ctrl + C, Ctrl + P</a:t>
+            </a:r>
+            <a:endParaRPr lang="hr-HR" b="1" dirty="0"/>
+          </a:p>
+        </p:txBody>
+      </p:sp>
+      <p:sp>
+        <p:nvSpPr>
+          <p:cNvPr id="29" name="TextBox 28">
+            <a:extLst>
+              <a:ext uri="{FF2B5EF4-FFF2-40B4-BE49-F238E27FC236}">
+                <a16:creationId xmlns:a16="http://schemas.microsoft.com/office/drawing/2014/main" id="{748B621D-322B-929A-4930-0165A62C44E5}"/>
+              </a:ext>
+            </a:extLst>
+          </p:cNvPr>
+          <p:cNvSpPr txBox="1"/>
+          <p:nvPr/>
+        </p:nvSpPr>
+        <p:spPr>
+          <a:xfrm>
+            <a:off x="7437756" y="4533167"/>
+            <a:ext cx="1103187" cy="369332"/>
+          </a:xfrm>
+          <a:prstGeom prst="rect">
+            <a:avLst/>
+          </a:prstGeom>
+          <a:noFill/>
+        </p:spPr>
+        <p:txBody>
+          <a:bodyPr wrap="none" rtlCol="0">
+            <a:spAutoFit/>
+          </a:bodyPr>
+          <a:lstStyle/>
+          <a:p>
+            <a:r>
+              <a:rPr lang="en-US" b="1" dirty="0" err="1"/>
+              <a:t>Desni</a:t>
+            </a:r>
+            <a:r>
+              <a:rPr lang="en-US" b="1" dirty="0"/>
+              <a:t> </a:t>
+            </a:r>
+            <a:r>
+              <a:rPr lang="en-US" b="1" dirty="0" err="1"/>
+              <a:t>klik</a:t>
+            </a:r>
+            <a:endParaRPr lang="hr-HR" b="1" dirty="0"/>
+          </a:p>
+        </p:txBody>
+      </p:sp>
+    </p:spTree>
+    <p:extLst>
+      <p:ext uri="{BB962C8B-B14F-4D97-AF65-F5344CB8AC3E}">
+        <p14:creationId xmlns:p14="http://schemas.microsoft.com/office/powerpoint/2010/main" val="1979668417"/>
+      </p:ext>
+    </p:extLst>
   </p:cSld>
   <p:clrMapOvr>
     <a:masterClrMapping/>
@@ -12703,12 +15889,68 @@
               <a:buNone/>
             </a:pPr>
             <a:r>
+              <a:rPr lang="en-US" sz="2000" b="1" dirty="0" err="1">
+                <a:solidFill>
+                  <a:srgbClr val="FFFFFF"/>
+                </a:solidFill>
+              </a:rPr>
+              <a:t>Zašto</a:t>
+            </a:r>
+            <a:r>
               <a:rPr lang="en-US" sz="2000" b="1" dirty="0">
                 <a:solidFill>
                   <a:srgbClr val="FFFFFF"/>
                 </a:solidFill>
               </a:rPr>
-              <a:t>Zašto je AI koristan u svakodnevnom životu?</a:t>
+              <a:t> je AI </a:t>
+            </a:r>
+            <a:r>
+              <a:rPr lang="en-US" sz="2000" b="1" dirty="0" err="1">
+                <a:solidFill>
+                  <a:srgbClr val="FFFFFF"/>
+                </a:solidFill>
+              </a:rPr>
+              <a:t>koristan</a:t>
+            </a:r>
+            <a:r>
+              <a:rPr lang="en-US" sz="2000" b="1" dirty="0">
+                <a:solidFill>
+                  <a:srgbClr val="FFFFFF"/>
+                </a:solidFill>
+              </a:rPr>
+              <a:t> u </a:t>
+            </a:r>
+            <a:r>
+              <a:rPr lang="en-US" sz="2000" b="1" dirty="0" err="1">
+                <a:solidFill>
+                  <a:srgbClr val="FFFFFF"/>
+                </a:solidFill>
+              </a:rPr>
+              <a:t>svakodnevnom</a:t>
+            </a:r>
+            <a:r>
+              <a:rPr lang="en-US" sz="2000" b="1" dirty="0">
+                <a:solidFill>
+                  <a:srgbClr val="FFFFFF"/>
+                </a:solidFill>
+              </a:rPr>
+              <a:t> </a:t>
+            </a:r>
+            <a:r>
+              <a:rPr lang="en-US" sz="2000" b="1" dirty="0" err="1">
+                <a:solidFill>
+                  <a:srgbClr val="FFFFFF"/>
+                </a:solidFill>
+              </a:rPr>
+              <a:t>životu</a:t>
+            </a:r>
+            <a:r>
+              <a:rPr lang="en-US" sz="2000" b="1" dirty="0">
+                <a:solidFill>
+                  <a:srgbClr val="FFFFFF"/>
+                </a:solidFill>
+              </a:rPr>
+              <a:t>?</a:t>
             </a:r>
             <a:endParaRPr lang="en-US" sz="2000" dirty="0"/>
           </a:p>
